--- a/Презентация_к_защите.pptx
+++ b/Презентация_к_защите.pptx
@@ -3113,7 +3113,7 @@
             <a:avLst/>
           </a:prstGeom>
           <a:solidFill>
-            <a:srgbClr val="2E9E5B"/>
+            <a:srgbClr val="112A1D"/>
           </a:solidFill>
           <a:ln>
             <a:noFill/>
@@ -3150,8 +3150,8 @@
         </p:nvSpPr>
         <p:spPr>
           <a:xfrm>
-            <a:off x="0" y="4160520"/>
-            <a:ext cx="12191695" cy="45720"/>
+            <a:off x="822960" y="1874519"/>
+            <a:ext cx="1280160" cy="76200"/>
           </a:xfrm>
           <a:prstGeom prst="rect">
             <a:avLst/>
@@ -3194,7 +3194,7 @@
         </p:nvSpPr>
         <p:spPr>
           <a:xfrm>
-            <a:off x="822960" y="640080"/>
+            <a:off x="822960" y="777240"/>
             <a:ext cx="10515600" cy="548640"/>
           </a:xfrm>
           <a:prstGeom prst="rect">
@@ -3214,13 +3214,13 @@
               </a:spcAft>
             </a:pPr>
             <a:r>
-              <a:rPr sz="2000" b="1" i="0">
-                <a:solidFill>
-                  <a:srgbClr val="E6F4EC"/>
-                </a:solidFill>
-                <a:latin typeface="Segoe UI"/>
-              </a:rPr>
-              <a:t>Instacart Insights</a:t>
+              <a:rPr sz="1500" b="1" i="0">
+                <a:solidFill>
+                  <a:srgbClr val="6FCE97"/>
+                </a:solidFill>
+                <a:latin typeface="Segoe UI"/>
+              </a:rPr>
+              <a:t>INSTACART INSIGHTS</a:t>
             </a:r>
           </a:p>
         </p:txBody>
@@ -3233,8 +3233,8 @@
         </p:nvSpPr>
         <p:spPr>
           <a:xfrm>
-            <a:off x="822960" y="1371600"/>
-            <a:ext cx="10515600" cy="2377440"/>
+            <a:off x="822960" y="2194560"/>
+            <a:ext cx="10515600" cy="2926080"/>
           </a:xfrm>
           <a:prstGeom prst="rect">
             <a:avLst/>
@@ -3249,49 +3249,34 @@
           <a:p>
             <a:pPr algn="l">
               <a:spcAft>
-                <a:spcPts val="600"/>
-              </a:spcAft>
-            </a:pPr>
-            <a:r>
-              <a:rPr sz="4000" b="1" i="0">
+                <a:spcPts val="1000"/>
+              </a:spcAft>
+            </a:pPr>
+            <a:r>
+              <a:rPr sz="4200" b="1" i="0">
                 <a:solidFill>
                   <a:srgbClr val="FFFFFF"/>
                 </a:solidFill>
                 <a:latin typeface="Segoe UI"/>
               </a:rPr>
-              <a:t>Интеллектуальный клиентский аналитический сервис</a:t>
+              <a:t>Покупатель тонет в рутине.
+Магазин теряет клиента.</a:t>
             </a:r>
           </a:p>
           <a:p>
             <a:pPr algn="l">
               <a:spcAft>
-                <a:spcPts val="200"/>
-              </a:spcAft>
-            </a:pPr>
-            <a:r>
-              <a:rPr sz="2200" b="0" i="0">
-                <a:solidFill>
-                  <a:srgbClr val="E6F4EC"/>
-                </a:solidFill>
-                <a:latin typeface="Segoe UI"/>
-              </a:rPr>
-              <a:t>на данных покупательского поведения Instacart:</a:t>
-            </a:r>
-          </a:p>
-          <a:p>
-            <a:pPr algn="l">
-              <a:spcAft>
-                <a:spcPts val="800"/>
-              </a:spcAft>
-            </a:pPr>
-            <a:r>
-              <a:rPr sz="2200" b="0" i="0">
-                <a:solidFill>
-                  <a:srgbClr val="E6F4EC"/>
-                </a:solidFill>
-                <a:latin typeface="Segoe UI"/>
-              </a:rPr>
-              <a:t>low-code аналитика Loginom + Flask + большая языковая модель Mistral</a:t>
+                <a:spcPts val="0"/>
+              </a:spcAft>
+            </a:pPr>
+            <a:r>
+              <a:rPr sz="2100" b="0" i="0">
+                <a:solidFill>
+                  <a:srgbClr val="B8C4BC"/>
+                </a:solidFill>
+                <a:latin typeface="Segoe UI"/>
+              </a:rPr>
+              <a:t>Мы решаем обе проблемы одним умным сервисом.</a:t>
             </a:r>
           </a:p>
         </p:txBody>
@@ -3304,8 +3289,8 @@
         </p:nvSpPr>
         <p:spPr>
           <a:xfrm>
-            <a:off x="822960" y="4389120"/>
-            <a:ext cx="10515600" cy="2011680"/>
+            <a:off x="822960" y="5623560"/>
+            <a:ext cx="10515600" cy="914400"/>
           </a:xfrm>
           <a:prstGeom prst="rect">
             <a:avLst/>
@@ -3320,81 +3305,17 @@
           <a:p>
             <a:pPr algn="l">
               <a:spcAft>
-                <a:spcPts val="400"/>
-              </a:spcAft>
-            </a:pPr>
-            <a:r>
-              <a:rPr sz="1500" b="1" i="0">
-                <a:solidFill>
-                  <a:srgbClr val="FFFFFF"/>
-                </a:solidFill>
-                <a:latin typeface="Segoe UI"/>
-              </a:rPr>
-              <a:t>Выполнили студенты 1 курса группы 15.27Д-ИСТ01/25б:</a:t>
-            </a:r>
-          </a:p>
-          <a:p>
-            <a:pPr algn="l">
-              <a:spcAft>
-                <a:spcPts val="200"/>
-              </a:spcAft>
-            </a:pPr>
-            <a:r>
-              <a:rPr sz="1500" b="0" i="0">
-                <a:solidFill>
-                  <a:srgbClr val="E6F4EC"/>
-                </a:solidFill>
-                <a:latin typeface="Segoe UI"/>
-              </a:rPr>
-              <a:t>Абакаров Магомед Шамилевич — аналитик (Loginom)</a:t>
-            </a:r>
-          </a:p>
-          <a:p>
-            <a:pPr algn="l">
-              <a:spcAft>
-                <a:spcPts val="200"/>
-              </a:spcAft>
-            </a:pPr>
-            <a:r>
-              <a:rPr sz="1500" b="0" i="0">
-                <a:solidFill>
-                  <a:srgbClr val="E6F4EC"/>
-                </a:solidFill>
-                <a:latin typeface="Segoe UI"/>
-              </a:rPr>
-              <a:t>Черевиченко Николай Александрович — бэкенд (Flask, интеграции)</a:t>
-            </a:r>
-          </a:p>
-          <a:p>
-            <a:pPr algn="l">
-              <a:spcAft>
-                <a:spcPts val="1000"/>
-              </a:spcAft>
-            </a:pPr>
-            <a:r>
-              <a:rPr sz="1500" b="0" i="0">
-                <a:solidFill>
-                  <a:srgbClr val="E6F4EC"/>
-                </a:solidFill>
-                <a:latin typeface="Segoe UI"/>
-              </a:rPr>
-              <a:t>Поляков Максим Константинович — фронтенд (интерфейс, UX)</a:t>
-            </a:r>
-          </a:p>
-          <a:p>
-            <a:pPr algn="l">
-              <a:spcAft>
                 <a:spcPts val="800"/>
               </a:spcAft>
             </a:pPr>
             <a:r>
-              <a:rPr sz="1400" b="1" i="0">
-                <a:solidFill>
-                  <a:srgbClr val="FFFFFF"/>
-                </a:solidFill>
-                <a:latin typeface="Segoe UI"/>
-              </a:rPr>
-              <a:t>Руководитель практики: Паклин Николай Борисович        ·        Москва — 2026</a:t>
+              <a:rPr sz="1300" b="0" i="0">
+                <a:solidFill>
+                  <a:srgbClr val="B8C4BC"/>
+                </a:solidFill>
+                <a:latin typeface="Segoe UI"/>
+              </a:rPr>
+              <a:t>Абакаров М.Ш.  ·  Черевиченко Н.А.  ·  Поляков М.К.    |    группа 15.27Д-ИСТ01/25б</a:t>
             </a:r>
           </a:p>
         </p:txBody>
@@ -3426,13 +3347,13 @@
         <p:spPr>
           <a:xfrm>
             <a:off x="0" y="0"/>
-            <a:ext cx="12191695" cy="1051560"/>
+            <a:ext cx="12191695" cy="6858000"/>
           </a:xfrm>
           <a:prstGeom prst="rect">
             <a:avLst/>
           </a:prstGeom>
           <a:solidFill>
-            <a:srgbClr val="2E9E5B"/>
+            <a:srgbClr val="112A1D"/>
           </a:solidFill>
           <a:ln>
             <a:noFill/>
@@ -3469,14 +3390,14 @@
         </p:nvSpPr>
         <p:spPr>
           <a:xfrm>
-            <a:off x="0" y="1051560"/>
-            <a:ext cx="12191695" cy="54864"/>
+            <a:off x="822960" y="1874519"/>
+            <a:ext cx="1280160" cy="76200"/>
           </a:xfrm>
           <a:prstGeom prst="rect">
             <a:avLst/>
           </a:prstGeom>
           <a:solidFill>
-            <a:srgbClr val="217A45"/>
+            <a:srgbClr val="6FCE97"/>
           </a:solidFill>
           <a:ln>
             <a:noFill/>
@@ -3513,47 +3434,8 @@
         </p:nvSpPr>
         <p:spPr>
           <a:xfrm>
-            <a:off x="548640" y="109728"/>
-            <a:ext cx="10972800" cy="868680"/>
-          </a:xfrm>
-          <a:prstGeom prst="rect">
-            <a:avLst/>
-          </a:prstGeom>
-          <a:noFill/>
-        </p:spPr>
-        <p:txBody>
-          <a:bodyPr wrap="square" anchor="ctr">
-            <a:spAutoFit/>
-          </a:bodyPr>
-          <a:lstStyle/>
-          <a:p>
-            <a:pPr algn="l">
-              <a:spcAft>
-                <a:spcPts val="800"/>
-              </a:spcAft>
-            </a:pPr>
-            <a:r>
-              <a:rPr sz="2600" b="1" i="0">
-                <a:solidFill>
-                  <a:srgbClr val="FFFFFF"/>
-                </a:solidFill>
-                <a:latin typeface="Segoe UI"/>
-              </a:rPr>
-              <a:t>Обоснование ценности: How Might We</a:t>
-            </a:r>
-          </a:p>
-        </p:txBody>
-      </p:sp>
-      <p:sp>
-        <p:nvSpPr>
-          <p:cNvPr id="5" name="TextBox 4"/>
-          <p:cNvSpPr txBox="1"/>
-          <p:nvPr/>
-        </p:nvSpPr>
-        <p:spPr>
-          <a:xfrm>
-            <a:off x="457200" y="6419088"/>
-            <a:ext cx="8229600" cy="365760"/>
+            <a:off x="822960" y="777240"/>
+            <a:ext cx="10515600" cy="548640"/>
           </a:xfrm>
           <a:prstGeom prst="rect">
             <a:avLst/>
@@ -3572,27 +3454,27 @@
               </a:spcAft>
             </a:pPr>
             <a:r>
-              <a:rPr sz="1000" b="0" i="0">
-                <a:solidFill>
-                  <a:srgbClr val="6B7280"/>
-                </a:solidFill>
-                <a:latin typeface="Segoe UI"/>
-              </a:rPr>
-              <a:t>Учебная (ознакомительная) практика · РЭУ им. Г.В. Плеханова · 2026</a:t>
-            </a:r>
-          </a:p>
-        </p:txBody>
-      </p:sp>
-      <p:sp>
-        <p:nvSpPr>
-          <p:cNvPr id="6" name="TextBox 5"/>
+              <a:rPr sz="1500" b="1" i="0">
+                <a:solidFill>
+                  <a:srgbClr val="6FCE97"/>
+                </a:solidFill>
+                <a:latin typeface="Segoe UI"/>
+              </a:rPr>
+              <a:t>ЭТО ТОЛЬКО НАЧАЛО</a:t>
+            </a:r>
+          </a:p>
+        </p:txBody>
+      </p:sp>
+      <p:sp>
+        <p:nvSpPr>
+          <p:cNvPr id="5" name="TextBox 4"/>
           <p:cNvSpPr txBox="1"/>
           <p:nvPr/>
         </p:nvSpPr>
         <p:spPr>
           <a:xfrm>
-            <a:off x="11247120" y="6419088"/>
-            <a:ext cx="731520" cy="365760"/>
+            <a:off x="822960" y="2194560"/>
+            <a:ext cx="10515600" cy="2926080"/>
           </a:xfrm>
           <a:prstGeom prst="rect">
             <a:avLst/>
@@ -3605,80 +3487,58 @@
           </a:bodyPr>
           <a:lstStyle/>
           <a:p>
-            <a:pPr algn="r">
-              <a:spcAft>
-                <a:spcPts val="800"/>
-              </a:spcAft>
-            </a:pPr>
-            <a:r>
-              <a:rPr sz="1000" b="0" i="0">
-                <a:solidFill>
-                  <a:srgbClr val="6B7280"/>
-                </a:solidFill>
-                <a:latin typeface="Segoe UI"/>
-              </a:rPr>
-              <a:t>10</a:t>
-            </a:r>
-          </a:p>
-        </p:txBody>
-      </p:sp>
-      <p:sp>
-        <p:nvSpPr>
-          <p:cNvPr id="7" name="TextBox 6"/>
-          <p:cNvSpPr txBox="1"/>
-          <p:nvPr/>
-        </p:nvSpPr>
-        <p:spPr>
-          <a:xfrm>
-            <a:off x="640080" y="1325880"/>
-            <a:ext cx="10972800" cy="1371600"/>
-          </a:xfrm>
-          <a:prstGeom prst="rect">
-            <a:avLst/>
-          </a:prstGeom>
-          <a:noFill/>
-        </p:spPr>
-        <p:txBody>
-          <a:bodyPr wrap="square" anchor="t">
-            <a:spAutoFit/>
-          </a:bodyPr>
-          <a:lstStyle/>
-          <a:p>
             <a:pPr algn="l">
               <a:spcAft>
-                <a:spcPts val="800"/>
-              </a:spcAft>
-            </a:pPr>
-            <a:r>
-              <a:rPr sz="1600" b="0" i="0">
-                <a:solidFill>
-                  <a:srgbClr val="1F2430"/>
-                </a:solidFill>
-                <a:latin typeface="Segoe UI"/>
-              </a:rPr>
-              <a:t>Состав сервисов обоснован методом дизайн-мышления How Might We — каждую проблему клиента формулируем как вопрос-возможность.</a:t>
-            </a:r>
-          </a:p>
-        </p:txBody>
-      </p:sp>
-      <p:sp>
-        <p:nvSpPr>
-          <p:cNvPr id="8" name="Rectangle 7"/>
+                <a:spcPts val="1000"/>
+              </a:spcAft>
+            </a:pPr>
+            <a:r>
+              <a:rPr sz="4200" b="1" i="0">
+                <a:solidFill>
+                  <a:srgbClr val="FFFFFF"/>
+                </a:solidFill>
+                <a:latin typeface="Segoe UI"/>
+              </a:rPr>
+              <a:t>Сегодня — Instacart.
+Завтра — любой ретейл.</a:t>
+            </a:r>
+          </a:p>
+          <a:p>
+            <a:pPr algn="l">
+              <a:spcAft>
+                <a:spcPts val="0"/>
+              </a:spcAft>
+            </a:pPr>
+            <a:r>
+              <a:rPr sz="2100" b="0" i="0">
+                <a:solidFill>
+                  <a:srgbClr val="B8C4BC"/>
+                </a:solidFill>
+                <a:latin typeface="Segoe UI"/>
+              </a:rPr>
+              <a:t>Новые сервисы, персонализация на реальных пользователях, проверка HMW-гипотез.</a:t>
+            </a:r>
+          </a:p>
+        </p:txBody>
+      </p:sp>
+      <p:sp>
+        <p:nvSpPr>
+          <p:cNvPr id="6" name="Rounded Rectangle 5"/>
           <p:cNvSpPr/>
           <p:nvPr/>
         </p:nvSpPr>
         <p:spPr>
           <a:xfrm>
-            <a:off x="640080" y="2468880"/>
-            <a:ext cx="10881360" cy="914400"/>
-          </a:xfrm>
-          <a:prstGeom prst="rect">
+            <a:off x="822960" y="5212080"/>
+            <a:ext cx="2286000" cy="914400"/>
+          </a:xfrm>
+          <a:prstGeom prst="roundRect">
             <a:avLst/>
           </a:prstGeom>
           <a:solidFill>
-            <a:srgbClr val="E6F4EC"/>
+            <a:srgbClr val="1C3B2A"/>
           </a:solidFill>
-          <a:ln>
+          <a:ln w="12700">
             <a:solidFill>
               <a:srgbClr val="2E9E5B"/>
             </a:solidFill>
@@ -3705,120 +3565,183 @@
           <a:p>
             <a:pPr algn="ctr">
               <a:spcAft>
-                <a:spcPts val="800"/>
-              </a:spcAft>
-            </a:pPr>
-            <a:r>
-              <a:rPr sz="1600" b="1" i="1">
-                <a:solidFill>
-                  <a:srgbClr val="217A45"/>
-                </a:solidFill>
-                <a:latin typeface="Segoe UI"/>
-              </a:rPr>
-              <a:t>«Как мы могли бы превратить обезличенные числовые данные о покупках в понятную и полезную клиенту информацию прямо в личном кабинете?»</a:t>
-            </a:r>
-          </a:p>
-        </p:txBody>
-      </p:sp>
-      <p:sp>
-        <p:nvSpPr>
-          <p:cNvPr id="9" name="TextBox 8"/>
-          <p:cNvSpPr txBox="1"/>
-          <p:nvPr/>
-        </p:nvSpPr>
-        <p:spPr>
-          <a:xfrm>
-            <a:off x="640080" y="3657600"/>
-            <a:ext cx="10972800" cy="2560320"/>
-          </a:xfrm>
-          <a:prstGeom prst="rect">
-            <a:avLst/>
-          </a:prstGeom>
-          <a:noFill/>
-        </p:spPr>
-        <p:txBody>
-          <a:bodyPr wrap="square" anchor="t">
-            <a:spAutoFit/>
-          </a:bodyPr>
-          <a:lstStyle/>
-          <a:p>
-            <a:pPr algn="l">
-              <a:spcAft>
-                <a:spcPts val="600"/>
-              </a:spcAft>
-            </a:pPr>
-            <a:r>
-              <a:rPr sz="1500" b="1" i="0">
-                <a:solidFill>
-                  <a:srgbClr val="1F2430"/>
-                </a:solidFill>
-                <a:latin typeface="Segoe UI"/>
-              </a:rPr>
-              <a:t>Каждый сервис — ответ на частный HMW-вопрос:</a:t>
-            </a:r>
-          </a:p>
-          <a:p>
-            <a:pPr algn="l">
-              <a:spcAft>
-                <a:spcPts val="600"/>
-              </a:spcAft>
-            </a:pPr>
-            <a:r>
-              <a:rPr sz="1400" b="0" i="0">
-                <a:solidFill>
-                  <a:srgbClr val="1F2430"/>
-                </a:solidFill>
-                <a:latin typeface="Segoe UI"/>
-              </a:rPr>
-              <a:t>•  …напомнить о забытых привычных товарах?  → Забытые товары</a:t>
-            </a:r>
-          </a:p>
-          <a:p>
-            <a:pPr algn="l">
-              <a:spcAft>
-                <a:spcPts val="600"/>
-              </a:spcAft>
-            </a:pPr>
-            <a:r>
-              <a:rPr sz="1400" b="0" i="0">
-                <a:solidFill>
-                  <a:srgbClr val="1F2430"/>
-                </a:solidFill>
-                <a:latin typeface="Segoe UI"/>
-              </a:rPr>
-              <a:t>•  …подсказать, когда снова понадобится заказ?  → Ритм покупок</a:t>
-            </a:r>
-          </a:p>
-          <a:p>
-            <a:pPr algn="l">
-              <a:spcAft>
-                <a:spcPts val="600"/>
-              </a:spcAft>
-            </a:pPr>
-            <a:r>
-              <a:rPr sz="1400" b="0" i="0">
-                <a:solidFill>
-                  <a:srgbClr val="1F2430"/>
-                </a:solidFill>
-                <a:latin typeface="Segoe UI"/>
-              </a:rPr>
-              <a:t>•  …дать наглядный портрет поведения одним экраном?  → Сводка по клиенту</a:t>
-            </a:r>
-          </a:p>
-          <a:p>
-            <a:pPr algn="l">
-              <a:spcAft>
-                <a:spcPts val="600"/>
-              </a:spcAft>
-            </a:pPr>
-            <a:r>
-              <a:rPr sz="1400" b="0" i="0">
-                <a:solidFill>
-                  <a:srgbClr val="1F2430"/>
-                </a:solidFill>
-                <a:latin typeface="Segoe UI"/>
-              </a:rPr>
-              <a:t>•  …показать, покупатель какого типа клиент?  → Отделы и категории</a:t>
+                <a:spcPts val="0"/>
+              </a:spcAft>
+            </a:pPr>
+            <a:r>
+              <a:rPr sz="2400" b="1" i="0">
+                <a:solidFill>
+                  <a:srgbClr val="6FCE97"/>
+                </a:solidFill>
+                <a:latin typeface="Segoe UI"/>
+              </a:rPr>
+              <a:t>5</a:t>
+            </a:r>
+          </a:p>
+          <a:p>
+            <a:pPr algn="ctr">
+              <a:spcAft>
+                <a:spcPts val="0"/>
+              </a:spcAft>
+            </a:pPr>
+            <a:r>
+              <a:rPr sz="1200" b="0" i="0">
+                <a:solidFill>
+                  <a:srgbClr val="B8C4BC"/>
+                </a:solidFill>
+                <a:latin typeface="Segoe UI"/>
+              </a:rPr>
+              <a:t>сервисов</a:t>
+            </a:r>
+          </a:p>
+        </p:txBody>
+      </p:sp>
+      <p:sp>
+        <p:nvSpPr>
+          <p:cNvPr id="7" name="Rounded Rectangle 6"/>
+          <p:cNvSpPr/>
+          <p:nvPr/>
+        </p:nvSpPr>
+        <p:spPr>
+          <a:xfrm>
+            <a:off x="3383280" y="5212080"/>
+            <a:ext cx="2286000" cy="914400"/>
+          </a:xfrm>
+          <a:prstGeom prst="roundRect">
+            <a:avLst/>
+          </a:prstGeom>
+          <a:solidFill>
+            <a:srgbClr val="1C3B2A"/>
+          </a:solidFill>
+          <a:ln w="12700">
+            <a:solidFill>
+              <a:srgbClr val="2E9E5B"/>
+            </a:solidFill>
+          </a:ln>
+          <a:effectLst/>
+        </p:spPr>
+        <p:style>
+          <a:lnRef idx="1">
+            <a:schemeClr val="accent1"/>
+          </a:lnRef>
+          <a:fillRef idx="3">
+            <a:schemeClr val="accent1"/>
+          </a:fillRef>
+          <a:effectRef idx="2">
+            <a:schemeClr val="accent1"/>
+          </a:effectRef>
+          <a:fontRef idx="minor">
+            <a:schemeClr val="lt1"/>
+          </a:fontRef>
+        </p:style>
+        <p:txBody>
+          <a:bodyPr rtlCol="0" anchor="ctr" wrap="square"/>
+          <a:lstStyle/>
+          <a:p>
+            <a:pPr algn="ctr">
+              <a:spcAft>
+                <a:spcPts val="0"/>
+              </a:spcAft>
+            </a:pPr>
+            <a:r>
+              <a:rPr sz="2400" b="1" i="0">
+                <a:solidFill>
+                  <a:srgbClr val="6FCE97"/>
+                </a:solidFill>
+                <a:latin typeface="Segoe UI"/>
+              </a:rPr>
+              <a:t>25</a:t>
+            </a:r>
+          </a:p>
+          <a:p>
+            <a:pPr algn="ctr">
+              <a:spcAft>
+                <a:spcPts val="0"/>
+              </a:spcAft>
+            </a:pPr>
+            <a:r>
+              <a:rPr sz="1200" b="0" i="0">
+                <a:solidFill>
+                  <a:srgbClr val="B8C4BC"/>
+                </a:solidFill>
+                <a:latin typeface="Segoe UI"/>
+              </a:rPr>
+              <a:t>тестов</a:t>
+            </a:r>
+          </a:p>
+        </p:txBody>
+      </p:sp>
+      <p:sp>
+        <p:nvSpPr>
+          <p:cNvPr id="8" name="Rounded Rectangle 7"/>
+          <p:cNvSpPr/>
+          <p:nvPr/>
+        </p:nvSpPr>
+        <p:spPr>
+          <a:xfrm>
+            <a:off x="5943600" y="5212080"/>
+            <a:ext cx="2286000" cy="914400"/>
+          </a:xfrm>
+          <a:prstGeom prst="roundRect">
+            <a:avLst/>
+          </a:prstGeom>
+          <a:solidFill>
+            <a:srgbClr val="1C3B2A"/>
+          </a:solidFill>
+          <a:ln w="12700">
+            <a:solidFill>
+              <a:srgbClr val="2E9E5B"/>
+            </a:solidFill>
+          </a:ln>
+          <a:effectLst/>
+        </p:spPr>
+        <p:style>
+          <a:lnRef idx="1">
+            <a:schemeClr val="accent1"/>
+          </a:lnRef>
+          <a:fillRef idx="3">
+            <a:schemeClr val="accent1"/>
+          </a:fillRef>
+          <a:effectRef idx="2">
+            <a:schemeClr val="accent1"/>
+          </a:effectRef>
+          <a:fontRef idx="minor">
+            <a:schemeClr val="lt1"/>
+          </a:fontRef>
+        </p:style>
+        <p:txBody>
+          <a:bodyPr rtlCol="0" anchor="ctr" wrap="square"/>
+          <a:lstStyle/>
+          <a:p>
+            <a:pPr algn="ctr">
+              <a:spcAft>
+                <a:spcPts val="0"/>
+              </a:spcAft>
+            </a:pPr>
+            <a:r>
+              <a:rPr sz="2400" b="1" i="0">
+                <a:solidFill>
+                  <a:srgbClr val="6FCE97"/>
+                </a:solidFill>
+                <a:latin typeface="Segoe UI"/>
+              </a:rPr>
+              <a:t>2 нед.</a:t>
+            </a:r>
+          </a:p>
+          <a:p>
+            <a:pPr algn="ctr">
+              <a:spcAft>
+                <a:spcPts val="0"/>
+              </a:spcAft>
+            </a:pPr>
+            <a:r>
+              <a:rPr sz="1200" b="0" i="0">
+                <a:solidFill>
+                  <a:srgbClr val="B8C4BC"/>
+                </a:solidFill>
+                <a:latin typeface="Segoe UI"/>
+              </a:rPr>
+              <a:t>до MVP</a:t>
             </a:r>
           </a:p>
         </p:txBody>
@@ -3850,7 +3773,7 @@
         <p:spPr>
           <a:xfrm>
             <a:off x="0" y="0"/>
-            <a:ext cx="12191695" cy="1051560"/>
+            <a:ext cx="12191695" cy="6858000"/>
           </a:xfrm>
           <a:prstGeom prst="rect">
             <a:avLst/>
@@ -3887,20 +3810,170 @@
       </p:sp>
       <p:sp>
         <p:nvSpPr>
-          <p:cNvPr id="3" name="Rectangle 2"/>
+          <p:cNvPr id="3" name="TextBox 2"/>
+          <p:cNvSpPr txBox="1"/>
+          <p:nvPr/>
+        </p:nvSpPr>
+        <p:spPr>
+          <a:xfrm>
+            <a:off x="822960" y="914400"/>
+            <a:ext cx="6949440" cy="548640"/>
+          </a:xfrm>
+          <a:prstGeom prst="rect">
+            <a:avLst/>
+          </a:prstGeom>
+          <a:noFill/>
+        </p:spPr>
+        <p:txBody>
+          <a:bodyPr wrap="square" anchor="t">
+            <a:spAutoFit/>
+          </a:bodyPr>
+          <a:lstStyle/>
+          <a:p>
+            <a:pPr algn="l">
+              <a:spcAft>
+                <a:spcPts val="800"/>
+              </a:spcAft>
+            </a:pPr>
+            <a:r>
+              <a:rPr sz="1600" b="1" i="0">
+                <a:solidFill>
+                  <a:srgbClr val="FFFFFF"/>
+                </a:solidFill>
+                <a:latin typeface="Segoe UI"/>
+              </a:rPr>
+              <a:t>ПОПРОБУЙТЕ ПРЯМО СЕЙЧАС</a:t>
+            </a:r>
+          </a:p>
+        </p:txBody>
+      </p:sp>
+      <p:sp>
+        <p:nvSpPr>
+          <p:cNvPr id="4" name="TextBox 3"/>
+          <p:cNvSpPr txBox="1"/>
+          <p:nvPr/>
+        </p:nvSpPr>
+        <p:spPr>
+          <a:xfrm>
+            <a:off x="822960" y="1737360"/>
+            <a:ext cx="6766560" cy="2743200"/>
+          </a:xfrm>
+          <a:prstGeom prst="rect">
+            <a:avLst/>
+          </a:prstGeom>
+          <a:noFill/>
+        </p:spPr>
+        <p:txBody>
+          <a:bodyPr wrap="square" anchor="t">
+            <a:spAutoFit/>
+          </a:bodyPr>
+          <a:lstStyle/>
+          <a:p>
+            <a:pPr algn="l">
+              <a:spcAft>
+                <a:spcPts val="1200"/>
+              </a:spcAft>
+            </a:pPr>
+            <a:r>
+              <a:rPr sz="3400" b="1" i="0">
+                <a:solidFill>
+                  <a:srgbClr val="FFFFFF"/>
+                </a:solidFill>
+                <a:latin typeface="Segoe UI"/>
+              </a:rPr>
+              <a:t>Наведите камеру —
+и откройте живое приложение</a:t>
+            </a:r>
+          </a:p>
+          <a:p>
+            <a:pPr algn="l">
+              <a:spcAft>
+                <a:spcPts val="0"/>
+              </a:spcAft>
+            </a:pPr>
+            <a:r>
+              <a:rPr sz="2000" b="0" i="0">
+                <a:solidFill>
+                  <a:srgbClr val="E6F4EC"/>
+                </a:solidFill>
+                <a:latin typeface="Segoe UI"/>
+              </a:rPr>
+              <a:t>practica2-gekyme.amvera.io</a:t>
+            </a:r>
+          </a:p>
+        </p:txBody>
+      </p:sp>
+      <p:sp>
+        <p:nvSpPr>
+          <p:cNvPr id="5" name="TextBox 4"/>
+          <p:cNvSpPr txBox="1"/>
+          <p:nvPr/>
+        </p:nvSpPr>
+        <p:spPr>
+          <a:xfrm>
+            <a:off x="822960" y="5120640"/>
+            <a:ext cx="6766560" cy="1280160"/>
+          </a:xfrm>
+          <a:prstGeom prst="rect">
+            <a:avLst/>
+          </a:prstGeom>
+          <a:noFill/>
+        </p:spPr>
+        <p:txBody>
+          <a:bodyPr wrap="square" anchor="t">
+            <a:spAutoFit/>
+          </a:bodyPr>
+          <a:lstStyle/>
+          <a:p>
+            <a:pPr algn="l">
+              <a:spcAft>
+                <a:spcPts val="400"/>
+              </a:spcAft>
+            </a:pPr>
+            <a:r>
+              <a:rPr sz="2200" b="1" i="0">
+                <a:solidFill>
+                  <a:srgbClr val="FFFFFF"/>
+                </a:solidFill>
+                <a:latin typeface="Segoe UI"/>
+              </a:rPr>
+              <a:t>Спасибо за внимание!</a:t>
+            </a:r>
+          </a:p>
+          <a:p>
+            <a:pPr algn="l">
+              <a:spcAft>
+                <a:spcPts val="0"/>
+              </a:spcAft>
+            </a:pPr>
+            <a:r>
+              <a:rPr sz="1500" b="0" i="0">
+                <a:solidFill>
+                  <a:srgbClr val="E6F4EC"/>
+                </a:solidFill>
+                <a:latin typeface="Segoe UI"/>
+              </a:rPr>
+              <a:t>Абакаров · Черевиченко · Поляков</a:t>
+            </a:r>
+          </a:p>
+        </p:txBody>
+      </p:sp>
+      <p:sp>
+        <p:nvSpPr>
+          <p:cNvPr id="6" name="Rounded Rectangle 5"/>
           <p:cNvSpPr/>
           <p:nvPr/>
         </p:nvSpPr>
         <p:spPr>
           <a:xfrm>
-            <a:off x="0" y="1051560"/>
-            <a:ext cx="12191695" cy="54864"/>
-          </a:xfrm>
-          <a:prstGeom prst="rect">
+            <a:off x="8229600" y="1645920"/>
+            <a:ext cx="3108960" cy="3291840"/>
+          </a:xfrm>
+          <a:prstGeom prst="roundRect">
             <a:avLst/>
           </a:prstGeom>
           <a:solidFill>
-            <a:srgbClr val="217A45"/>
+            <a:srgbClr val="FFFFFF"/>
           </a:solidFill>
           <a:ln>
             <a:noFill/>
@@ -3929,94 +4002,40 @@
           </a:p>
         </p:txBody>
       </p:sp>
-      <p:sp>
-        <p:nvSpPr>
-          <p:cNvPr id="4" name="TextBox 3"/>
+      <p:pic>
+        <p:nvPicPr>
+          <p:cNvPr id="7" name="Picture 6" descr="qr.png"/>
+          <p:cNvPicPr>
+            <a:picLocks noChangeAspect="1"/>
+          </p:cNvPicPr>
+          <p:nvPr/>
+        </p:nvPicPr>
+        <p:blipFill>
+          <a:blip r:embed="rId2"/>
+          <a:stretch>
+            <a:fillRect/>
+          </a:stretch>
+        </p:blipFill>
+        <p:spPr>
+          <a:xfrm>
+            <a:off x="8503920" y="1874519"/>
+            <a:ext cx="2560320" cy="2560320"/>
+          </a:xfrm>
+          <a:prstGeom prst="rect">
+            <a:avLst/>
+          </a:prstGeom>
+        </p:spPr>
+      </p:pic>
+      <p:sp>
+        <p:nvSpPr>
+          <p:cNvPr id="8" name="TextBox 7"/>
           <p:cNvSpPr txBox="1"/>
           <p:nvPr/>
         </p:nvSpPr>
         <p:spPr>
           <a:xfrm>
-            <a:off x="548640" y="109728"/>
-            <a:ext cx="10972800" cy="868680"/>
-          </a:xfrm>
-          <a:prstGeom prst="rect">
-            <a:avLst/>
-          </a:prstGeom>
-          <a:noFill/>
-        </p:spPr>
-        <p:txBody>
-          <a:bodyPr wrap="square" anchor="ctr">
-            <a:spAutoFit/>
-          </a:bodyPr>
-          <a:lstStyle/>
-          <a:p>
-            <a:pPr algn="l">
-              <a:spcAft>
-                <a:spcPts val="800"/>
-              </a:spcAft>
-            </a:pPr>
-            <a:r>
-              <a:rPr sz="2600" b="1" i="0">
-                <a:solidFill>
-                  <a:srgbClr val="FFFFFF"/>
-                </a:solidFill>
-                <a:latin typeface="Segoe UI"/>
-              </a:rPr>
-              <a:t>Вклад команды и итоги</a:t>
-            </a:r>
-          </a:p>
-        </p:txBody>
-      </p:sp>
-      <p:sp>
-        <p:nvSpPr>
-          <p:cNvPr id="5" name="TextBox 4"/>
-          <p:cNvSpPr txBox="1"/>
-          <p:nvPr/>
-        </p:nvSpPr>
-        <p:spPr>
-          <a:xfrm>
-            <a:off x="9692640" y="109728"/>
-            <a:ext cx="2194560" cy="868680"/>
-          </a:xfrm>
-          <a:prstGeom prst="rect">
-            <a:avLst/>
-          </a:prstGeom>
-          <a:noFill/>
-        </p:spPr>
-        <p:txBody>
-          <a:bodyPr wrap="square" anchor="ctr">
-            <a:spAutoFit/>
-          </a:bodyPr>
-          <a:lstStyle/>
-          <a:p>
-            <a:pPr algn="r">
-              <a:spcAft>
-                <a:spcPts val="800"/>
-              </a:spcAft>
-            </a:pPr>
-            <a:r>
-              <a:rPr sz="1200" b="1" i="0">
-                <a:solidFill>
-                  <a:srgbClr val="E6F4EC"/>
-                </a:solidFill>
-                <a:latin typeface="Segoe UI"/>
-              </a:rPr>
-              <a:t>вклад участников</a:t>
-            </a:r>
-          </a:p>
-        </p:txBody>
-      </p:sp>
-      <p:sp>
-        <p:nvSpPr>
-          <p:cNvPr id="6" name="TextBox 5"/>
-          <p:cNvSpPr txBox="1"/>
-          <p:nvPr/>
-        </p:nvSpPr>
-        <p:spPr>
-          <a:xfrm>
-            <a:off x="457200" y="6419088"/>
-            <a:ext cx="8229600" cy="365760"/>
+            <a:off x="8229600" y="4389120"/>
+            <a:ext cx="3108960" cy="457200"/>
           </a:xfrm>
           <a:prstGeom prst="rect">
             <a:avLst/>
@@ -4029,460 +4048,19 @@
           </a:bodyPr>
           <a:lstStyle/>
           <a:p>
-            <a:pPr algn="l">
+            <a:pPr algn="ctr">
               <a:spcAft>
                 <a:spcPts val="800"/>
               </a:spcAft>
             </a:pPr>
             <a:r>
-              <a:rPr sz="1000" b="0" i="0">
+              <a:rPr sz="1200" b="0" i="0">
                 <a:solidFill>
                   <a:srgbClr val="6B7280"/>
                 </a:solidFill>
                 <a:latin typeface="Segoe UI"/>
               </a:rPr>
-              <a:t>Учебная (ознакомительная) практика · РЭУ им. Г.В. Плеханова · 2026</a:t>
-            </a:r>
-          </a:p>
-        </p:txBody>
-      </p:sp>
-      <p:sp>
-        <p:nvSpPr>
-          <p:cNvPr id="7" name="TextBox 6"/>
-          <p:cNvSpPr txBox="1"/>
-          <p:nvPr/>
-        </p:nvSpPr>
-        <p:spPr>
-          <a:xfrm>
-            <a:off x="11247120" y="6419088"/>
-            <a:ext cx="731520" cy="365760"/>
-          </a:xfrm>
-          <a:prstGeom prst="rect">
-            <a:avLst/>
-          </a:prstGeom>
-          <a:noFill/>
-        </p:spPr>
-        <p:txBody>
-          <a:bodyPr wrap="square" anchor="t">
-            <a:spAutoFit/>
-          </a:bodyPr>
-          <a:lstStyle/>
-          <a:p>
-            <a:pPr algn="r">
-              <a:spcAft>
-                <a:spcPts val="800"/>
-              </a:spcAft>
-            </a:pPr>
-            <a:r>
-              <a:rPr sz="1000" b="0" i="0">
-                <a:solidFill>
-                  <a:srgbClr val="6B7280"/>
-                </a:solidFill>
-                <a:latin typeface="Segoe UI"/>
-              </a:rPr>
-              <a:t>11</a:t>
-            </a:r>
-          </a:p>
-        </p:txBody>
-      </p:sp>
-      <p:graphicFrame>
-        <p:nvGraphicFramePr>
-          <p:cNvPr id="8" name="Table 7"/>
-          <p:cNvGraphicFramePr>
-            <a:graphicFrameLocks noGrp="1"/>
-          </p:cNvGraphicFramePr>
-          <p:nvPr/>
-        </p:nvGraphicFramePr>
-        <p:xfrm>
-          <a:off x="640080" y="1371600"/>
-          <a:ext cx="10881360" cy="2194560"/>
-        </p:xfrm>
-        <a:graphic>
-          <a:graphicData uri="http://schemas.openxmlformats.org/drawingml/2006/table">
-            <a:tbl>
-              <a:tblPr firstRow="1" bandRow="1">
-                <a:tableStyleId>{5C22544A-7EE6-4342-B048-85BDC9FD1C3A}</a:tableStyleId>
-              </a:tblPr>
-              <a:tblGrid>
-                <a:gridCol w="2560320"/>
-                <a:gridCol w="2743200"/>
-                <a:gridCol w="5577840"/>
-              </a:tblGrid>
-              <a:tr h="548640">
-                <a:tc>
-                  <a:txBody>
-                    <a:bodyPr/>
-                    <a:lstStyle/>
-                    <a:p>
-                      <a:r>
-                        <a:rPr sz="1400" b="1" i="0">
-                          <a:solidFill>
-                            <a:srgbClr val="FFFFFF"/>
-                          </a:solidFill>
-                          <a:latin typeface="Segoe UI"/>
-                        </a:rPr>
-                        <a:t>Участник</a:t>
-                      </a:r>
-                    </a:p>
-                  </a:txBody>
-                  <a:tcPr>
-                    <a:solidFill>
-                      <a:srgbClr val="2E9E5B"/>
-                    </a:solidFill>
-                  </a:tcPr>
-                </a:tc>
-                <a:tc>
-                  <a:txBody>
-                    <a:bodyPr/>
-                    <a:lstStyle/>
-                    <a:p>
-                      <a:r>
-                        <a:rPr sz="1400" b="1" i="0">
-                          <a:solidFill>
-                            <a:srgbClr val="FFFFFF"/>
-                          </a:solidFill>
-                          <a:latin typeface="Segoe UI"/>
-                        </a:rPr>
-                        <a:t>Роль</a:t>
-                      </a:r>
-                    </a:p>
-                  </a:txBody>
-                  <a:tcPr>
-                    <a:solidFill>
-                      <a:srgbClr val="2E9E5B"/>
-                    </a:solidFill>
-                  </a:tcPr>
-                </a:tc>
-                <a:tc>
-                  <a:txBody>
-                    <a:bodyPr/>
-                    <a:lstStyle/>
-                    <a:p>
-                      <a:r>
-                        <a:rPr sz="1400" b="1" i="0">
-                          <a:solidFill>
-                            <a:srgbClr val="FFFFFF"/>
-                          </a:solidFill>
-                          <a:latin typeface="Segoe UI"/>
-                        </a:rPr>
-                        <a:t>Вклад</a:t>
-                      </a:r>
-                    </a:p>
-                  </a:txBody>
-                  <a:tcPr>
-                    <a:solidFill>
-                      <a:srgbClr val="2E9E5B"/>
-                    </a:solidFill>
-                  </a:tcPr>
-                </a:tc>
-              </a:tr>
-              <a:tr h="548640">
-                <a:tc>
-                  <a:txBody>
-                    <a:bodyPr/>
-                    <a:lstStyle/>
-                    <a:p>
-                      <a:r>
-                        <a:rPr sz="1200" b="1" i="0">
-                          <a:solidFill>
-                            <a:srgbClr val="1F2430"/>
-                          </a:solidFill>
-                          <a:latin typeface="Segoe UI"/>
-                        </a:rPr>
-                        <a:t>Абакаров М.Ш.</a:t>
-                      </a:r>
-                    </a:p>
-                  </a:txBody>
-                  <a:tcPr>
-                    <a:solidFill>
-                      <a:srgbClr val="FFFFFF"/>
-                    </a:solidFill>
-                  </a:tcPr>
-                </a:tc>
-                <a:tc>
-                  <a:txBody>
-                    <a:bodyPr/>
-                    <a:lstStyle/>
-                    <a:p>
-                      <a:r>
-                        <a:rPr sz="1200" b="0" i="0">
-                          <a:solidFill>
-                            <a:srgbClr val="1F2430"/>
-                          </a:solidFill>
-                          <a:latin typeface="Segoe UI"/>
-                        </a:rPr>
-                        <a:t>Аналитик / Loginom</a:t>
-                      </a:r>
-                    </a:p>
-                  </a:txBody>
-                  <a:tcPr>
-                    <a:solidFill>
-                      <a:srgbClr val="FFFFFF"/>
-                    </a:solidFill>
-                  </a:tcPr>
-                </a:tc>
-                <a:tc>
-                  <a:txBody>
-                    <a:bodyPr/>
-                    <a:lstStyle/>
-                    <a:p>
-                      <a:r>
-                        <a:rPr sz="1200" b="0" i="0">
-                          <a:solidFill>
-                            <a:srgbClr val="1F2430"/>
-                          </a:solidFill>
-                          <a:latin typeface="Segoe UI"/>
-                        </a:rPr>
-                        <a:t>Сервисы, SQL, публикация REST, промпты</a:t>
-                      </a:r>
-                    </a:p>
-                  </a:txBody>
-                  <a:tcPr>
-                    <a:solidFill>
-                      <a:srgbClr val="FFFFFF"/>
-                    </a:solidFill>
-                  </a:tcPr>
-                </a:tc>
-              </a:tr>
-              <a:tr h="548640">
-                <a:tc>
-                  <a:txBody>
-                    <a:bodyPr/>
-                    <a:lstStyle/>
-                    <a:p>
-                      <a:r>
-                        <a:rPr sz="1200" b="1" i="0">
-                          <a:solidFill>
-                            <a:srgbClr val="1F2430"/>
-                          </a:solidFill>
-                          <a:latin typeface="Segoe UI"/>
-                        </a:rPr>
-                        <a:t>Черевиченко Н.А.</a:t>
-                      </a:r>
-                    </a:p>
-                  </a:txBody>
-                  <a:tcPr>
-                    <a:solidFill>
-                      <a:srgbClr val="F3F7F4"/>
-                    </a:solidFill>
-                  </a:tcPr>
-                </a:tc>
-                <a:tc>
-                  <a:txBody>
-                    <a:bodyPr/>
-                    <a:lstStyle/>
-                    <a:p>
-                      <a:r>
-                        <a:rPr sz="1200" b="0" i="0">
-                          <a:solidFill>
-                            <a:srgbClr val="1F2430"/>
-                          </a:solidFill>
-                          <a:latin typeface="Segoe UI"/>
-                        </a:rPr>
-                        <a:t>Бэкенд / Flask</a:t>
-                      </a:r>
-                    </a:p>
-                  </a:txBody>
-                  <a:tcPr>
-                    <a:solidFill>
-                      <a:srgbClr val="F3F7F4"/>
-                    </a:solidFill>
-                  </a:tcPr>
-                </a:tc>
-                <a:tc>
-                  <a:txBody>
-                    <a:bodyPr/>
-                    <a:lstStyle/>
-                    <a:p>
-                      <a:r>
-                        <a:rPr sz="1200" b="0" i="0">
-                          <a:solidFill>
-                            <a:srgbClr val="1F2430"/>
-                          </a:solidFill>
-                          <a:latin typeface="Segoe UI"/>
-                        </a:rPr>
-                        <a:t>Приложение, интеграции, кэш, тесты, деплой</a:t>
-                      </a:r>
-                    </a:p>
-                  </a:txBody>
-                  <a:tcPr>
-                    <a:solidFill>
-                      <a:srgbClr val="F3F7F4"/>
-                    </a:solidFill>
-                  </a:tcPr>
-                </a:tc>
-              </a:tr>
-              <a:tr h="548640">
-                <a:tc>
-                  <a:txBody>
-                    <a:bodyPr/>
-                    <a:lstStyle/>
-                    <a:p>
-                      <a:r>
-                        <a:rPr sz="1200" b="1" i="0">
-                          <a:solidFill>
-                            <a:srgbClr val="1F2430"/>
-                          </a:solidFill>
-                          <a:latin typeface="Segoe UI"/>
-                        </a:rPr>
-                        <a:t>Поляков М.К.</a:t>
-                      </a:r>
-                    </a:p>
-                  </a:txBody>
-                  <a:tcPr>
-                    <a:solidFill>
-                      <a:srgbClr val="FFFFFF"/>
-                    </a:solidFill>
-                  </a:tcPr>
-                </a:tc>
-                <a:tc>
-                  <a:txBody>
-                    <a:bodyPr/>
-                    <a:lstStyle/>
-                    <a:p>
-                      <a:r>
-                        <a:rPr sz="1200" b="0" i="0">
-                          <a:solidFill>
-                            <a:srgbClr val="1F2430"/>
-                          </a:solidFill>
-                          <a:latin typeface="Segoe UI"/>
-                        </a:rPr>
-                        <a:t>Фронтенд / UX</a:t>
-                      </a:r>
-                    </a:p>
-                  </a:txBody>
-                  <a:tcPr>
-                    <a:solidFill>
-                      <a:srgbClr val="FFFFFF"/>
-                    </a:solidFill>
-                  </a:tcPr>
-                </a:tc>
-                <a:tc>
-                  <a:txBody>
-                    <a:bodyPr/>
-                    <a:lstStyle/>
-                    <a:p>
-                      <a:r>
-                        <a:rPr sz="1200" b="0" i="0">
-                          <a:solidFill>
-                            <a:srgbClr val="1F2430"/>
-                          </a:solidFill>
-                          <a:latin typeface="Segoe UI"/>
-                        </a:rPr>
-                        <a:t>Интерфейс, навигация, Chart.js, стиль</a:t>
-                      </a:r>
-                    </a:p>
-                  </a:txBody>
-                  <a:tcPr>
-                    <a:solidFill>
-                      <a:srgbClr val="FFFFFF"/>
-                    </a:solidFill>
-                  </a:tcPr>
-                </a:tc>
-              </a:tr>
-            </a:tbl>
-          </a:graphicData>
-        </a:graphic>
-      </p:graphicFrame>
-      <p:sp>
-        <p:nvSpPr>
-          <p:cNvPr id="9" name="TextBox 8"/>
-          <p:cNvSpPr txBox="1"/>
-          <p:nvPr/>
-        </p:nvSpPr>
-        <p:spPr>
-          <a:xfrm>
-            <a:off x="640080" y="3886200"/>
-            <a:ext cx="10972800" cy="2377440"/>
-          </a:xfrm>
-          <a:prstGeom prst="rect">
-            <a:avLst/>
-          </a:prstGeom>
-          <a:noFill/>
-        </p:spPr>
-        <p:txBody>
-          <a:bodyPr wrap="square" anchor="t">
-            <a:spAutoFit/>
-          </a:bodyPr>
-          <a:lstStyle/>
-          <a:p>
-            <a:pPr algn="l">
-              <a:spcAft>
-                <a:spcPts val="400"/>
-              </a:spcAft>
-            </a:pPr>
-            <a:r>
-              <a:rPr sz="2000" b="1" i="0">
-                <a:solidFill>
-                  <a:srgbClr val="217A45"/>
-                </a:solidFill>
-                <a:latin typeface="Segoe UI"/>
-              </a:rPr>
-              <a:t>Итоги</a:t>
-            </a:r>
-          </a:p>
-          <a:p>
-            <a:pPr algn="l">
-              <a:spcAft>
-                <a:spcPts val="600"/>
-              </a:spcAft>
-            </a:pPr>
-            <a:r>
-              <a:rPr sz="1500" b="0" i="0">
-                <a:solidFill>
-                  <a:srgbClr val="1F2430"/>
-                </a:solidFill>
-                <a:latin typeface="Segoe UI"/>
-              </a:rPr>
-              <a:t>•  Собран рабочий MVP: 5 аналитических сервисов + многостраничный кабинет</a:t>
-            </a:r>
-          </a:p>
-          <a:p>
-            <a:pPr algn="l">
-              <a:spcAft>
-                <a:spcPts val="600"/>
-              </a:spcAft>
-            </a:pPr>
-            <a:r>
-              <a:rPr sz="1500" b="0" i="0">
-                <a:solidFill>
-                  <a:srgbClr val="1F2430"/>
-                </a:solidFill>
-                <a:latin typeface="Segoe UI"/>
-              </a:rPr>
-              <a:t>•  Связка «аналитика Loginom → метрики → рекомендации Mistral» с кэшем</a:t>
-            </a:r>
-          </a:p>
-          <a:p>
-            <a:pPr algn="l">
-              <a:spcAft>
-                <a:spcPts val="600"/>
-              </a:spcAft>
-            </a:pPr>
-            <a:r>
-              <a:rPr sz="1500" b="0" i="0">
-                <a:solidFill>
-                  <a:srgbClr val="1F2430"/>
-                </a:solidFill>
-                <a:latin typeface="Segoe UI"/>
-              </a:rPr>
-              <a:t>•  25 автоматических тестов (все проходят) и ручная проверка сценариев</a:t>
-            </a:r>
-          </a:p>
-          <a:p>
-            <a:pPr algn="l">
-              <a:spcAft>
-                <a:spcPts val="600"/>
-              </a:spcAft>
-            </a:pPr>
-            <a:r>
-              <a:rPr sz="1500" b="0" i="0">
-                <a:solidFill>
-                  <a:srgbClr val="1F2430"/>
-                </a:solidFill>
-                <a:latin typeface="Segoe UI"/>
-              </a:rPr>
-              <a:t>•  Приложение развёрнуто в облаке Amvera. Задачи практики выполнены полностью.</a:t>
+              <a:t>Живое приложение в облаке Amvera</a:t>
             </a:r>
           </a:p>
         </p:txBody>
@@ -4514,7 +4092,7 @@
         <p:spPr>
           <a:xfrm>
             <a:off x="0" y="0"/>
-            <a:ext cx="12191695" cy="1051560"/>
+            <a:ext cx="12191695" cy="1143000"/>
           </a:xfrm>
           <a:prstGeom prst="rect">
             <a:avLst/>
@@ -4557,7 +4135,7 @@
         </p:nvSpPr>
         <p:spPr>
           <a:xfrm>
-            <a:off x="0" y="1051560"/>
+            <a:off x="0" y="1143000"/>
             <a:ext cx="12191695" cy="54864"/>
           </a:xfrm>
           <a:prstGeom prst="rect">
@@ -4601,8 +4179,8 @@
         </p:nvSpPr>
         <p:spPr>
           <a:xfrm>
-            <a:off x="548640" y="109728"/>
-            <a:ext cx="10972800" cy="868680"/>
+            <a:off x="548640" y="128016"/>
+            <a:ext cx="11155680" cy="960120"/>
           </a:xfrm>
           <a:prstGeom prst="rect">
             <a:avLst/>
@@ -4617,31 +4195,272 @@
           <a:p>
             <a:pPr algn="l">
               <a:spcAft>
-                <a:spcPts val="800"/>
-              </a:spcAft>
-            </a:pPr>
-            <a:r>
-              <a:rPr sz="2600" b="1" i="0">
+                <a:spcPts val="200"/>
+              </a:spcAft>
+            </a:pPr>
+            <a:r>
+              <a:rPr sz="1200" b="1" i="0">
+                <a:solidFill>
+                  <a:srgbClr val="E6F4EC"/>
+                </a:solidFill>
+                <a:latin typeface="Segoe UI"/>
+              </a:rPr>
+              <a:t>ПРОБЛЕМА · ЧАСТЬ 1</a:t>
+            </a:r>
+          </a:p>
+          <a:p>
+            <a:pPr algn="l">
+              <a:spcAft>
+                <a:spcPts val="0"/>
+              </a:spcAft>
+            </a:pPr>
+            <a:r>
+              <a:rPr sz="2700" b="1" i="0">
                 <a:solidFill>
                   <a:srgbClr val="FFFFFF"/>
                 </a:solidFill>
                 <a:latin typeface="Segoe UI"/>
               </a:rPr>
-              <a:t>Цель и актуальность</a:t>
-            </a:r>
-          </a:p>
-        </p:txBody>
-      </p:sp>
-      <p:sp>
-        <p:nvSpPr>
-          <p:cNvPr id="5" name="TextBox 4"/>
+              <a:t>Данные о покупках есть — а пользы клиенту нет</a:t>
+            </a:r>
+          </a:p>
+        </p:txBody>
+      </p:sp>
+      <p:sp>
+        <p:nvSpPr>
+          <p:cNvPr id="5" name="Rounded Rectangle 4"/>
+          <p:cNvSpPr/>
+          <p:nvPr/>
+        </p:nvSpPr>
+        <p:spPr>
+          <a:xfrm>
+            <a:off x="548640" y="1600200"/>
+            <a:ext cx="3611880" cy="3108960"/>
+          </a:xfrm>
+          <a:prstGeom prst="roundRect">
+            <a:avLst/>
+          </a:prstGeom>
+          <a:solidFill>
+            <a:srgbClr val="F3F7F4"/>
+          </a:solidFill>
+          <a:ln w="15875">
+            <a:solidFill>
+              <a:srgbClr val="6FCE97"/>
+            </a:solidFill>
+          </a:ln>
+          <a:effectLst/>
+        </p:spPr>
+        <p:style>
+          <a:lnRef idx="1">
+            <a:schemeClr val="accent1"/>
+          </a:lnRef>
+          <a:fillRef idx="3">
+            <a:schemeClr val="accent1"/>
+          </a:fillRef>
+          <a:effectRef idx="2">
+            <a:schemeClr val="accent1"/>
+          </a:effectRef>
+          <a:fontRef idx="minor">
+            <a:schemeClr val="lt1"/>
+          </a:fontRef>
+        </p:style>
+        <p:txBody>
+          <a:bodyPr rtlCol="0" anchor="ctr" wrap="square" lIns="274320" rIns="274320" tIns="320040"/>
+          <a:lstStyle/>
+          <a:p>
+            <a:pPr algn="l">
+              <a:spcAft>
+                <a:spcPts val="1000"/>
+              </a:spcAft>
+            </a:pPr>
+            <a:r>
+              <a:rPr sz="2000" b="1" i="0">
+                <a:solidFill>
+                  <a:srgbClr val="2E9E5B"/>
+                </a:solidFill>
+                <a:latin typeface="Segoe UI"/>
+              </a:rPr>
+              <a:t>Забывают привычное</a:t>
+            </a:r>
+          </a:p>
+          <a:p>
+            <a:pPr algn="l">
+              <a:spcAft>
+                <a:spcPts val="0"/>
+              </a:spcAft>
+            </a:pPr>
+            <a:r>
+              <a:rPr sz="1600" b="0" i="0">
+                <a:solidFill>
+                  <a:srgbClr val="1F2430"/>
+                </a:solidFill>
+                <a:latin typeface="Segoe UI"/>
+              </a:rPr>
+              <a:t>Регулярные товары выпадают из заказа — о них никто не напомнит.</a:t>
+            </a:r>
+          </a:p>
+        </p:txBody>
+      </p:sp>
+      <p:sp>
+        <p:nvSpPr>
+          <p:cNvPr id="6" name="Rounded Rectangle 5"/>
+          <p:cNvSpPr/>
+          <p:nvPr/>
+        </p:nvSpPr>
+        <p:spPr>
+          <a:xfrm>
+            <a:off x="4507992" y="1600200"/>
+            <a:ext cx="3611880" cy="3108960"/>
+          </a:xfrm>
+          <a:prstGeom prst="roundRect">
+            <a:avLst/>
+          </a:prstGeom>
+          <a:solidFill>
+            <a:srgbClr val="F3F7F4"/>
+          </a:solidFill>
+          <a:ln w="15875">
+            <a:solidFill>
+              <a:srgbClr val="6FCE97"/>
+            </a:solidFill>
+          </a:ln>
+          <a:effectLst/>
+        </p:spPr>
+        <p:style>
+          <a:lnRef idx="1">
+            <a:schemeClr val="accent1"/>
+          </a:lnRef>
+          <a:fillRef idx="3">
+            <a:schemeClr val="accent1"/>
+          </a:fillRef>
+          <a:effectRef idx="2">
+            <a:schemeClr val="accent1"/>
+          </a:effectRef>
+          <a:fontRef idx="minor">
+            <a:schemeClr val="lt1"/>
+          </a:fontRef>
+        </p:style>
+        <p:txBody>
+          <a:bodyPr rtlCol="0" anchor="ctr" wrap="square" lIns="274320" rIns="274320" tIns="320040"/>
+          <a:lstStyle/>
+          <a:p>
+            <a:pPr algn="l">
+              <a:spcAft>
+                <a:spcPts val="1000"/>
+              </a:spcAft>
+            </a:pPr>
+            <a:r>
+              <a:rPr sz="2000" b="1" i="0">
+                <a:solidFill>
+                  <a:srgbClr val="2E9E5B"/>
+                </a:solidFill>
+                <a:latin typeface="Segoe UI"/>
+              </a:rPr>
+              <a:t>Тонут в списках</a:t>
+            </a:r>
+          </a:p>
+          <a:p>
+            <a:pPr algn="l">
+              <a:spcAft>
+                <a:spcPts val="0"/>
+              </a:spcAft>
+            </a:pPr>
+            <a:r>
+              <a:rPr sz="1600" b="0" i="0">
+                <a:solidFill>
+                  <a:srgbClr val="1F2430"/>
+                </a:solidFill>
+                <a:latin typeface="Segoe UI"/>
+              </a:rPr>
+              <a:t>Сотни позиций в истории и ноль подсказок, что с этим делать.</a:t>
+            </a:r>
+          </a:p>
+        </p:txBody>
+      </p:sp>
+      <p:sp>
+        <p:nvSpPr>
+          <p:cNvPr id="7" name="Rounded Rectangle 6"/>
+          <p:cNvSpPr/>
+          <p:nvPr/>
+        </p:nvSpPr>
+        <p:spPr>
+          <a:xfrm>
+            <a:off x="8467344" y="1600200"/>
+            <a:ext cx="3611880" cy="3108960"/>
+          </a:xfrm>
+          <a:prstGeom prst="roundRect">
+            <a:avLst/>
+          </a:prstGeom>
+          <a:solidFill>
+            <a:srgbClr val="F3F7F4"/>
+          </a:solidFill>
+          <a:ln w="15875">
+            <a:solidFill>
+              <a:srgbClr val="6FCE97"/>
+            </a:solidFill>
+          </a:ln>
+          <a:effectLst/>
+        </p:spPr>
+        <p:style>
+          <a:lnRef idx="1">
+            <a:schemeClr val="accent1"/>
+          </a:lnRef>
+          <a:fillRef idx="3">
+            <a:schemeClr val="accent1"/>
+          </a:fillRef>
+          <a:effectRef idx="2">
+            <a:schemeClr val="accent1"/>
+          </a:effectRef>
+          <a:fontRef idx="minor">
+            <a:schemeClr val="lt1"/>
+          </a:fontRef>
+        </p:style>
+        <p:txBody>
+          <a:bodyPr rtlCol="0" anchor="ctr" wrap="square" lIns="274320" rIns="274320" tIns="320040"/>
+          <a:lstStyle/>
+          <a:p>
+            <a:pPr algn="l">
+              <a:spcAft>
+                <a:spcPts val="1000"/>
+              </a:spcAft>
+            </a:pPr>
+            <a:r>
+              <a:rPr sz="2000" b="1" i="0">
+                <a:solidFill>
+                  <a:srgbClr val="2E9E5B"/>
+                </a:solidFill>
+                <a:latin typeface="Segoe UI"/>
+              </a:rPr>
+              <a:t>Не планируют</a:t>
+            </a:r>
+          </a:p>
+          <a:p>
+            <a:pPr algn="l">
+              <a:spcAft>
+                <a:spcPts val="0"/>
+              </a:spcAft>
+            </a:pPr>
+            <a:r>
+              <a:rPr sz="1600" b="0" i="0">
+                <a:solidFill>
+                  <a:srgbClr val="1F2430"/>
+                </a:solidFill>
+                <a:latin typeface="Segoe UI"/>
+              </a:rPr>
+              <a:t>Клиент не знает, когда ему снова пора оформить заказ.</a:t>
+            </a:r>
+          </a:p>
+        </p:txBody>
+      </p:sp>
+      <p:sp>
+        <p:nvSpPr>
+          <p:cNvPr id="8" name="TextBox 7"/>
           <p:cNvSpPr txBox="1"/>
           <p:nvPr/>
         </p:nvSpPr>
         <p:spPr>
           <a:xfrm>
-            <a:off x="457200" y="6419088"/>
-            <a:ext cx="8229600" cy="365760"/>
+            <a:off x="548640" y="5029200"/>
+            <a:ext cx="11064240" cy="1005840"/>
           </a:xfrm>
           <a:prstGeom prst="rect">
             <a:avLst/>
@@ -4660,27 +4479,27 @@
               </a:spcAft>
             </a:pPr>
             <a:r>
-              <a:rPr sz="1000" b="0" i="0">
-                <a:solidFill>
-                  <a:srgbClr val="6B7280"/>
-                </a:solidFill>
-                <a:latin typeface="Segoe UI"/>
-              </a:rPr>
-              <a:t>Учебная (ознакомительная) практика · РЭУ им. Г.В. Плеханова · 2026</a:t>
-            </a:r>
-          </a:p>
-        </p:txBody>
-      </p:sp>
-      <p:sp>
-        <p:nvSpPr>
-          <p:cNvPr id="6" name="TextBox 5"/>
+              <a:rPr sz="1800" b="1" i="0">
+                <a:solidFill>
+                  <a:srgbClr val="1F2430"/>
+                </a:solidFill>
+                <a:latin typeface="Segoe UI"/>
+              </a:rPr>
+              <a:t>Всю работу клиент делает сам — а сервис, у которого есть вся история заказов, молчит.</a:t>
+            </a:r>
+          </a:p>
+        </p:txBody>
+      </p:sp>
+      <p:sp>
+        <p:nvSpPr>
+          <p:cNvPr id="9" name="TextBox 8"/>
           <p:cNvSpPr txBox="1"/>
           <p:nvPr/>
         </p:nvSpPr>
         <p:spPr>
           <a:xfrm>
-            <a:off x="11247120" y="6419088"/>
-            <a:ext cx="731520" cy="365760"/>
+            <a:off x="457200" y="6437376"/>
+            <a:ext cx="9144000" cy="365760"/>
           </a:xfrm>
           <a:prstGeom prst="rect">
             <a:avLst/>
@@ -4693,7 +4512,7 @@
           </a:bodyPr>
           <a:lstStyle/>
           <a:p>
-            <a:pPr algn="r">
+            <a:pPr algn="l">
               <a:spcAft>
                 <a:spcPts val="800"/>
               </a:spcAft>
@@ -4705,21 +4524,21 @@
                 </a:solidFill>
                 <a:latin typeface="Segoe UI"/>
               </a:rPr>
-              <a:t>2</a:t>
-            </a:r>
-          </a:p>
-        </p:txBody>
-      </p:sp>
-      <p:sp>
-        <p:nvSpPr>
-          <p:cNvPr id="7" name="TextBox 6"/>
+              <a:t>Instacart Insights · РЭУ им. Г.В. Плеханова · 2026</a:t>
+            </a:r>
+          </a:p>
+        </p:txBody>
+      </p:sp>
+      <p:sp>
+        <p:nvSpPr>
+          <p:cNvPr id="10" name="TextBox 9"/>
           <p:cNvSpPr txBox="1"/>
           <p:nvPr/>
         </p:nvSpPr>
         <p:spPr>
           <a:xfrm>
-            <a:off x="640080" y="1371600"/>
-            <a:ext cx="10972800" cy="4846320"/>
+            <a:off x="11338560" y="6437376"/>
+            <a:ext cx="640080" cy="365760"/>
           </a:xfrm>
           <a:prstGeom prst="rect">
             <a:avLst/>
@@ -4732,99 +4551,19 @@
           </a:bodyPr>
           <a:lstStyle/>
           <a:p>
-            <a:pPr algn="l">
-              <a:spcAft>
-                <a:spcPts val="400"/>
-              </a:spcAft>
-            </a:pPr>
-            <a:r>
-              <a:rPr sz="2000" b="1" i="0">
-                <a:solidFill>
-                  <a:srgbClr val="217A45"/>
-                </a:solidFill>
-                <a:latin typeface="Segoe UI"/>
-              </a:rPr>
-              <a:t>Цель практики</a:t>
-            </a:r>
-          </a:p>
-          <a:p>
-            <a:pPr algn="l">
-              <a:spcAft>
-                <a:spcPts val="1600"/>
-              </a:spcAft>
-            </a:pPr>
-            <a:r>
-              <a:rPr sz="1700" b="0" i="0">
-                <a:solidFill>
-                  <a:srgbClr val="1F2430"/>
-                </a:solidFill>
-                <a:latin typeface="Segoe UI"/>
-              </a:rPr>
-              <a:t>Освоить технологию разработки клиентских аналитических сервисов на основе связки low-code/no-code аналитики, веб-приложения и большой языковой модели (LLM).</a:t>
-            </a:r>
-          </a:p>
-          <a:p>
-            <a:pPr algn="l">
-              <a:spcAft>
-                <a:spcPts val="400"/>
-              </a:spcAft>
-            </a:pPr>
-            <a:r>
-              <a:rPr sz="2000" b="1" i="0">
-                <a:solidFill>
-                  <a:srgbClr val="217A45"/>
-                </a:solidFill>
-                <a:latin typeface="Segoe UI"/>
-              </a:rPr>
-              <a:t>Актуальность</a:t>
-            </a:r>
-          </a:p>
-          <a:p>
-            <a:pPr algn="l">
-              <a:spcAft>
-                <a:spcPts val="600"/>
-              </a:spcAft>
-            </a:pPr>
-            <a:r>
-              <a:rPr sz="1600" b="0" i="0">
-                <a:solidFill>
-                  <a:srgbClr val="1F2430"/>
-                </a:solidFill>
-                <a:latin typeface="Segoe UI"/>
-              </a:rPr>
-              <a:t>•  Low-code/no-code резко сокращает путь от идеи до работающего прототипа: визуальная сборка сценариев заменяет большой объём кода.</a:t>
-            </a:r>
-          </a:p>
-          <a:p>
-            <a:pPr algn="l">
-              <a:spcAft>
-                <a:spcPts val="600"/>
-              </a:spcAft>
-            </a:pPr>
-            <a:r>
-              <a:rPr sz="1600" b="0" i="0">
-                <a:solidFill>
-                  <a:srgbClr val="1F2430"/>
-                </a:solidFill>
-                <a:latin typeface="Segoe UI"/>
-              </a:rPr>
-              <a:t>•  Большие языковые модели превращают сухие числовые результаты в понятные человеку тексты и рекомендации.</a:t>
-            </a:r>
-          </a:p>
-          <a:p>
-            <a:pPr algn="l">
-              <a:spcAft>
-                <a:spcPts val="600"/>
-              </a:spcAft>
-            </a:pPr>
-            <a:r>
-              <a:rPr sz="1600" b="0" i="0">
-                <a:solidFill>
-                  <a:srgbClr val="1F2430"/>
-                </a:solidFill>
-                <a:latin typeface="Segoe UI"/>
-              </a:rPr>
-              <a:t>•  Их связка — современный способ быстро создавать востребованные в IT минимально жизнеспособные продукты (MVP).</a:t>
+            <a:pPr algn="r">
+              <a:spcAft>
+                <a:spcPts val="800"/>
+              </a:spcAft>
+            </a:pPr>
+            <a:r>
+              <a:rPr sz="1000" b="0" i="0">
+                <a:solidFill>
+                  <a:srgbClr val="6B7280"/>
+                </a:solidFill>
+                <a:latin typeface="Segoe UI"/>
+              </a:rPr>
+              <a:t>2</a:t>
             </a:r>
           </a:p>
         </p:txBody>
@@ -4856,13 +4595,13 @@
         <p:spPr>
           <a:xfrm>
             <a:off x="0" y="0"/>
-            <a:ext cx="12191695" cy="1051560"/>
+            <a:ext cx="12191695" cy="6858000"/>
           </a:xfrm>
           <a:prstGeom prst="rect">
             <a:avLst/>
           </a:prstGeom>
           <a:solidFill>
-            <a:srgbClr val="2E9E5B"/>
+            <a:srgbClr val="181D24"/>
           </a:solidFill>
           <a:ln>
             <a:noFill/>
@@ -4893,23 +4632,119 @@
       </p:sp>
       <p:sp>
         <p:nvSpPr>
-          <p:cNvPr id="3" name="Rectangle 2"/>
+          <p:cNvPr id="3" name="TextBox 2"/>
+          <p:cNvSpPr txBox="1"/>
+          <p:nvPr/>
+        </p:nvSpPr>
+        <p:spPr>
+          <a:xfrm>
+            <a:off x="822960" y="731520"/>
+            <a:ext cx="10515600" cy="457200"/>
+          </a:xfrm>
+          <a:prstGeom prst="rect">
+            <a:avLst/>
+          </a:prstGeom>
+          <a:noFill/>
+        </p:spPr>
+        <p:txBody>
+          <a:bodyPr wrap="square" anchor="t">
+            <a:spAutoFit/>
+          </a:bodyPr>
+          <a:lstStyle/>
+          <a:p>
+            <a:pPr algn="l">
+              <a:spcAft>
+                <a:spcPts val="800"/>
+              </a:spcAft>
+            </a:pPr>
+            <a:r>
+              <a:rPr sz="1400" b="1" i="0">
+                <a:solidFill>
+                  <a:srgbClr val="6FCE97"/>
+                </a:solidFill>
+                <a:latin typeface="Segoe UI"/>
+              </a:rPr>
+              <a:t>ПРОБЛЕМА · ЧАСТЬ 2</a:t>
+            </a:r>
+          </a:p>
+        </p:txBody>
+      </p:sp>
+      <p:sp>
+        <p:nvSpPr>
+          <p:cNvPr id="4" name="TextBox 3"/>
+          <p:cNvSpPr txBox="1"/>
+          <p:nvPr/>
+        </p:nvSpPr>
+        <p:spPr>
+          <a:xfrm>
+            <a:off x="822960" y="1463040"/>
+            <a:ext cx="10515600" cy="1645920"/>
+          </a:xfrm>
+          <a:prstGeom prst="rect">
+            <a:avLst/>
+          </a:prstGeom>
+          <a:noFill/>
+        </p:spPr>
+        <p:txBody>
+          <a:bodyPr wrap="square" anchor="t">
+            <a:spAutoFit/>
+          </a:bodyPr>
+          <a:lstStyle/>
+          <a:p>
+            <a:pPr algn="l">
+              <a:spcAft>
+                <a:spcPts val="600"/>
+              </a:spcAft>
+            </a:pPr>
+            <a:r>
+              <a:rPr sz="3400" b="1" i="0">
+                <a:solidFill>
+                  <a:srgbClr val="FFFFFF"/>
+                </a:solidFill>
+                <a:latin typeface="Segoe UI"/>
+              </a:rPr>
+              <a:t>Гигабайты истории заказов лежат мёртвым грузом</a:t>
+            </a:r>
+          </a:p>
+          <a:p>
+            <a:pPr algn="l">
+              <a:spcAft>
+                <a:spcPts val="0"/>
+              </a:spcAft>
+            </a:pPr>
+            <a:r>
+              <a:rPr sz="1900" b="0" i="0">
+                <a:solidFill>
+                  <a:srgbClr val="B8C4BC"/>
+                </a:solidFill>
+                <a:latin typeface="Segoe UI"/>
+              </a:rPr>
+              <a:t>Без персонализации магазин недозарабатывает на каждом клиенте.</a:t>
+            </a:r>
+          </a:p>
+        </p:txBody>
+      </p:sp>
+      <p:sp>
+        <p:nvSpPr>
+          <p:cNvPr id="5" name="Rounded Rectangle 4"/>
           <p:cNvSpPr/>
           <p:nvPr/>
         </p:nvSpPr>
         <p:spPr>
           <a:xfrm>
-            <a:off x="0" y="1051560"/>
-            <a:ext cx="12191695" cy="54864"/>
-          </a:xfrm>
-          <a:prstGeom prst="rect">
+            <a:off x="822960" y="3749039"/>
+            <a:ext cx="3520440" cy="1737360"/>
+          </a:xfrm>
+          <a:prstGeom prst="roundRect">
             <a:avLst/>
           </a:prstGeom>
           <a:solidFill>
-            <a:srgbClr val="217A45"/>
+            <a:srgbClr val="232B25"/>
           </a:solidFill>
-          <a:ln>
-            <a:noFill/>
+          <a:ln w="12700">
+            <a:solidFill>
+              <a:srgbClr val="2E9E5B"/>
+            </a:solidFill>
           </a:ln>
           <a:effectLst/>
         </p:spPr>
@@ -4928,62 +4763,202 @@
           </a:fontRef>
         </p:style>
         <p:txBody>
-          <a:bodyPr rtlCol="0" anchor="ctr"/>
-          <a:lstStyle/>
-          <a:p>
-            <a:pPr algn="ctr"/>
-          </a:p>
-        </p:txBody>
-      </p:sp>
-      <p:sp>
-        <p:nvSpPr>
-          <p:cNvPr id="4" name="TextBox 3"/>
+          <a:bodyPr rtlCol="0" anchor="ctr" wrap="square"/>
+          <a:lstStyle/>
+          <a:p>
+            <a:pPr algn="ctr">
+              <a:spcAft>
+                <a:spcPts val="400"/>
+              </a:spcAft>
+            </a:pPr>
+            <a:r>
+              <a:rPr sz="2400" b="1" i="0">
+                <a:solidFill>
+                  <a:srgbClr val="6FCE97"/>
+                </a:solidFill>
+                <a:latin typeface="Segoe UI"/>
+              </a:rPr>
+              <a:t>↓ заказов</a:t>
+            </a:r>
+          </a:p>
+          <a:p>
+            <a:pPr algn="ctr">
+              <a:spcAft>
+                <a:spcPts val="0"/>
+              </a:spcAft>
+            </a:pPr>
+            <a:r>
+              <a:rPr sz="1400" b="0" i="0">
+                <a:solidFill>
+                  <a:srgbClr val="B8C4BC"/>
+                </a:solidFill>
+                <a:latin typeface="Segoe UI"/>
+              </a:rPr>
+              <a:t>меньше повторных покупок</a:t>
+            </a:r>
+          </a:p>
+        </p:txBody>
+      </p:sp>
+      <p:sp>
+        <p:nvSpPr>
+          <p:cNvPr id="6" name="Rounded Rectangle 5"/>
+          <p:cNvSpPr/>
+          <p:nvPr/>
+        </p:nvSpPr>
+        <p:spPr>
+          <a:xfrm>
+            <a:off x="4690872" y="3749039"/>
+            <a:ext cx="3520440" cy="1737360"/>
+          </a:xfrm>
+          <a:prstGeom prst="roundRect">
+            <a:avLst/>
+          </a:prstGeom>
+          <a:solidFill>
+            <a:srgbClr val="232B25"/>
+          </a:solidFill>
+          <a:ln w="12700">
+            <a:solidFill>
+              <a:srgbClr val="2E9E5B"/>
+            </a:solidFill>
+          </a:ln>
+          <a:effectLst/>
+        </p:spPr>
+        <p:style>
+          <a:lnRef idx="1">
+            <a:schemeClr val="accent1"/>
+          </a:lnRef>
+          <a:fillRef idx="3">
+            <a:schemeClr val="accent1"/>
+          </a:fillRef>
+          <a:effectRef idx="2">
+            <a:schemeClr val="accent1"/>
+          </a:effectRef>
+          <a:fontRef idx="minor">
+            <a:schemeClr val="lt1"/>
+          </a:fontRef>
+        </p:style>
+        <p:txBody>
+          <a:bodyPr rtlCol="0" anchor="ctr" wrap="square"/>
+          <a:lstStyle/>
+          <a:p>
+            <a:pPr algn="ctr">
+              <a:spcAft>
+                <a:spcPts val="400"/>
+              </a:spcAft>
+            </a:pPr>
+            <a:r>
+              <a:rPr sz="2400" b="1" i="0">
+                <a:solidFill>
+                  <a:srgbClr val="6FCE97"/>
+                </a:solidFill>
+                <a:latin typeface="Segoe UI"/>
+              </a:rPr>
+              <a:t>↓ лояльность</a:t>
+            </a:r>
+          </a:p>
+          <a:p>
+            <a:pPr algn="ctr">
+              <a:spcAft>
+                <a:spcPts val="0"/>
+              </a:spcAft>
+            </a:pPr>
+            <a:r>
+              <a:rPr sz="1400" b="0" i="0">
+                <a:solidFill>
+                  <a:srgbClr val="B8C4BC"/>
+                </a:solidFill>
+                <a:latin typeface="Segoe UI"/>
+              </a:rPr>
+              <a:t>клиент не чувствует заботы</a:t>
+            </a:r>
+          </a:p>
+        </p:txBody>
+      </p:sp>
+      <p:sp>
+        <p:nvSpPr>
+          <p:cNvPr id="7" name="Rounded Rectangle 6"/>
+          <p:cNvSpPr/>
+          <p:nvPr/>
+        </p:nvSpPr>
+        <p:spPr>
+          <a:xfrm>
+            <a:off x="8558784" y="3749039"/>
+            <a:ext cx="3520440" cy="1737360"/>
+          </a:xfrm>
+          <a:prstGeom prst="roundRect">
+            <a:avLst/>
+          </a:prstGeom>
+          <a:solidFill>
+            <a:srgbClr val="232B25"/>
+          </a:solidFill>
+          <a:ln w="12700">
+            <a:solidFill>
+              <a:srgbClr val="2E9E5B"/>
+            </a:solidFill>
+          </a:ln>
+          <a:effectLst/>
+        </p:spPr>
+        <p:style>
+          <a:lnRef idx="1">
+            <a:schemeClr val="accent1"/>
+          </a:lnRef>
+          <a:fillRef idx="3">
+            <a:schemeClr val="accent1"/>
+          </a:fillRef>
+          <a:effectRef idx="2">
+            <a:schemeClr val="accent1"/>
+          </a:effectRef>
+          <a:fontRef idx="minor">
+            <a:schemeClr val="lt1"/>
+          </a:fontRef>
+        </p:style>
+        <p:txBody>
+          <a:bodyPr rtlCol="0" anchor="ctr" wrap="square"/>
+          <a:lstStyle/>
+          <a:p>
+            <a:pPr algn="ctr">
+              <a:spcAft>
+                <a:spcPts val="400"/>
+              </a:spcAft>
+            </a:pPr>
+            <a:r>
+              <a:rPr sz="2400" b="1" i="0">
+                <a:solidFill>
+                  <a:srgbClr val="6FCE97"/>
+                </a:solidFill>
+                <a:latin typeface="Segoe UI"/>
+              </a:rPr>
+              <a:t>↑ отток</a:t>
+            </a:r>
+          </a:p>
+          <a:p>
+            <a:pPr algn="ctr">
+              <a:spcAft>
+                <a:spcPts val="0"/>
+              </a:spcAft>
+            </a:pPr>
+            <a:r>
+              <a:rPr sz="1400" b="0" i="0">
+                <a:solidFill>
+                  <a:srgbClr val="B8C4BC"/>
+                </a:solidFill>
+                <a:latin typeface="Segoe UI"/>
+              </a:rPr>
+              <a:t>уходит к тем, кто удобнее</a:t>
+            </a:r>
+          </a:p>
+        </p:txBody>
+      </p:sp>
+      <p:sp>
+        <p:nvSpPr>
+          <p:cNvPr id="8" name="TextBox 7"/>
           <p:cNvSpPr txBox="1"/>
           <p:nvPr/>
         </p:nvSpPr>
         <p:spPr>
           <a:xfrm>
-            <a:off x="548640" y="109728"/>
-            <a:ext cx="10972800" cy="868680"/>
-          </a:xfrm>
-          <a:prstGeom prst="rect">
-            <a:avLst/>
-          </a:prstGeom>
-          <a:noFill/>
-        </p:spPr>
-        <p:txBody>
-          <a:bodyPr wrap="square" anchor="ctr">
-            <a:spAutoFit/>
-          </a:bodyPr>
-          <a:lstStyle/>
-          <a:p>
-            <a:pPr algn="l">
-              <a:spcAft>
-                <a:spcPts val="800"/>
-              </a:spcAft>
-            </a:pPr>
-            <a:r>
-              <a:rPr sz="2600" b="1" i="0">
-                <a:solidFill>
-                  <a:srgbClr val="FFFFFF"/>
-                </a:solidFill>
-                <a:latin typeface="Segoe UI"/>
-              </a:rPr>
-              <a:t>Данные и задача</a:t>
-            </a:r>
-          </a:p>
-        </p:txBody>
-      </p:sp>
-      <p:sp>
-        <p:nvSpPr>
-          <p:cNvPr id="5" name="TextBox 4"/>
-          <p:cNvSpPr txBox="1"/>
-          <p:nvPr/>
-        </p:nvSpPr>
-        <p:spPr>
-          <a:xfrm>
-            <a:off x="457200" y="6419088"/>
-            <a:ext cx="8229600" cy="365760"/>
+            <a:off x="457200" y="6437376"/>
+            <a:ext cx="9144000" cy="365760"/>
           </a:xfrm>
           <a:prstGeom prst="rect">
             <a:avLst/>
@@ -5004,25 +4979,25 @@
             <a:r>
               <a:rPr sz="1000" b="0" i="0">
                 <a:solidFill>
-                  <a:srgbClr val="6B7280"/>
-                </a:solidFill>
-                <a:latin typeface="Segoe UI"/>
-              </a:rPr>
-              <a:t>Учебная (ознакомительная) практика · РЭУ им. Г.В. Плеханова · 2026</a:t>
-            </a:r>
-          </a:p>
-        </p:txBody>
-      </p:sp>
-      <p:sp>
-        <p:nvSpPr>
-          <p:cNvPr id="6" name="TextBox 5"/>
+                  <a:srgbClr val="B8C4BC"/>
+                </a:solidFill>
+                <a:latin typeface="Segoe UI"/>
+              </a:rPr>
+              <a:t>Instacart Insights · РЭУ им. Г.В. Плеханова · 2026</a:t>
+            </a:r>
+          </a:p>
+        </p:txBody>
+      </p:sp>
+      <p:sp>
+        <p:nvSpPr>
+          <p:cNvPr id="9" name="TextBox 8"/>
           <p:cNvSpPr txBox="1"/>
           <p:nvPr/>
         </p:nvSpPr>
         <p:spPr>
           <a:xfrm>
-            <a:off x="11247120" y="6419088"/>
-            <a:ext cx="731520" cy="365760"/>
+            <a:off x="11338560" y="6437376"/>
+            <a:ext cx="640080" cy="365760"/>
           </a:xfrm>
           <a:prstGeom prst="rect">
             <a:avLst/>
@@ -5043,7 +5018,7 @@
             <a:r>
               <a:rPr sz="1000" b="0" i="0">
                 <a:solidFill>
-                  <a:srgbClr val="6B7280"/>
+                  <a:srgbClr val="B8C4BC"/>
                 </a:solidFill>
                 <a:latin typeface="Segoe UI"/>
               </a:rPr>
@@ -5052,170 +5027,6 @@
           </a:p>
         </p:txBody>
       </p:sp>
-      <p:sp>
-        <p:nvSpPr>
-          <p:cNvPr id="7" name="TextBox 6"/>
-          <p:cNvSpPr txBox="1"/>
-          <p:nvPr/>
-        </p:nvSpPr>
-        <p:spPr>
-          <a:xfrm>
-            <a:off x="640080" y="1371600"/>
-            <a:ext cx="6492240" cy="4846320"/>
-          </a:xfrm>
-          <a:prstGeom prst="rect">
-            <a:avLst/>
-          </a:prstGeom>
-          <a:noFill/>
-        </p:spPr>
-        <p:txBody>
-          <a:bodyPr wrap="square" anchor="t">
-            <a:spAutoFit/>
-          </a:bodyPr>
-          <a:lstStyle/>
-          <a:p>
-            <a:pPr algn="l">
-              <a:spcAft>
-                <a:spcPts val="400"/>
-              </a:spcAft>
-            </a:pPr>
-            <a:r>
-              <a:rPr sz="2000" b="1" i="0">
-                <a:solidFill>
-                  <a:srgbClr val="217A45"/>
-                </a:solidFill>
-                <a:latin typeface="Segoe UI"/>
-              </a:rPr>
-              <a:t>Датасет Instacart</a:t>
-            </a:r>
-          </a:p>
-          <a:p>
-            <a:pPr algn="l">
-              <a:spcAft>
-                <a:spcPts val="600"/>
-              </a:spcAft>
-            </a:pPr>
-            <a:r>
-              <a:rPr sz="1600" b="0" i="0">
-                <a:solidFill>
-                  <a:srgbClr val="1F2430"/>
-                </a:solidFill>
-                <a:latin typeface="Segoe UI"/>
-              </a:rPr>
-              <a:t>•  Более 3 млн онлайн-заказов продуктов от 200 000+ клиентов.</a:t>
-            </a:r>
-          </a:p>
-          <a:p>
-            <a:pPr algn="l">
-              <a:spcAft>
-                <a:spcPts val="400"/>
-              </a:spcAft>
-            </a:pPr>
-            <a:r>
-              <a:rPr sz="1500" b="0" i="0">
-                <a:solidFill>
-                  <a:srgbClr val="1F2430"/>
-                </a:solidFill>
-                <a:latin typeface="Segoe UI"/>
-              </a:rPr>
-              <a:t>•  orders — заказы (номер, день недели, час, интервал).</a:t>
-            </a:r>
-          </a:p>
-          <a:p>
-            <a:pPr algn="l">
-              <a:spcAft>
-                <a:spcPts val="400"/>
-              </a:spcAft>
-            </a:pPr>
-            <a:r>
-              <a:rPr sz="1500" b="0" i="0">
-                <a:solidFill>
-                  <a:srgbClr val="1F2430"/>
-                </a:solidFill>
-                <a:latin typeface="Segoe UI"/>
-              </a:rPr>
-              <a:t>•  orders_prior — состав заказов, признак повторной покупки.</a:t>
-            </a:r>
-          </a:p>
-          <a:p>
-            <a:pPr algn="l">
-              <a:spcAft>
-                <a:spcPts val="1400"/>
-              </a:spcAft>
-            </a:pPr>
-            <a:r>
-              <a:rPr sz="1500" b="0" i="0">
-                <a:solidFill>
-                  <a:srgbClr val="1F2430"/>
-                </a:solidFill>
-                <a:latin typeface="Segoe UI"/>
-              </a:rPr>
-              <a:t>•  products — товары с русским названием отдела.</a:t>
-            </a:r>
-          </a:p>
-          <a:p>
-            <a:pPr algn="l">
-              <a:spcAft>
-                <a:spcPts val="400"/>
-              </a:spcAft>
-            </a:pPr>
-            <a:r>
-              <a:rPr sz="2000" b="1" i="0">
-                <a:solidFill>
-                  <a:srgbClr val="217A45"/>
-                </a:solidFill>
-                <a:latin typeface="Segoe UI"/>
-              </a:rPr>
-              <a:t>Задача</a:t>
-            </a:r>
-          </a:p>
-          <a:p>
-            <a:pPr algn="l">
-              <a:spcAft>
-                <a:spcPts val="600"/>
-              </a:spcAft>
-            </a:pPr>
-            <a:r>
-              <a:rPr sz="1600" b="0" i="0">
-                <a:solidFill>
-                  <a:srgbClr val="1F2430"/>
-                </a:solidFill>
-                <a:latin typeface="Segoe UI"/>
-              </a:rPr>
-              <a:t>По идентификатору клиента (user_id) показать аналитику его покупок и сформировать понятные персональные рекомендации.</a:t>
-            </a:r>
-          </a:p>
-        </p:txBody>
-      </p:sp>
-      <p:pic>
-        <p:nvPicPr>
-          <p:cNvPr id="8" name="Picture 7" descr="image4.jpg"/>
-          <p:cNvPicPr>
-            <a:picLocks noChangeAspect="1"/>
-          </p:cNvPicPr>
-          <p:nvPr/>
-        </p:nvPicPr>
-        <p:blipFill>
-          <a:blip r:embed="rId2"/>
-          <a:stretch>
-            <a:fillRect/>
-          </a:stretch>
-        </p:blipFill>
-        <p:spPr>
-          <a:xfrm>
-            <a:off x="7315200" y="1458658"/>
-            <a:ext cx="4480560" cy="4580764"/>
-          </a:xfrm>
-          <a:prstGeom prst="rect">
-            <a:avLst/>
-          </a:prstGeom>
-          <a:ln w="12700">
-            <a:solidFill>
-              <a:srgbClr val="D0D5DD"/>
-            </a:solidFill>
-          </a:ln>
-        </p:spPr>
-      </p:pic>
     </p:spTree>
   </p:cSld>
   <p:clrMapOvr>
@@ -5243,7 +5054,7 @@
         <p:spPr>
           <a:xfrm>
             <a:off x="0" y="0"/>
-            <a:ext cx="12191695" cy="1051560"/>
+            <a:ext cx="12191695" cy="6858000"/>
           </a:xfrm>
           <a:prstGeom prst="rect">
             <a:avLst/>
@@ -5286,14 +5097,14 @@
         </p:nvSpPr>
         <p:spPr>
           <a:xfrm>
-            <a:off x="0" y="1051560"/>
-            <a:ext cx="12191695" cy="54864"/>
+            <a:off x="822960" y="1874519"/>
+            <a:ext cx="1280160" cy="76200"/>
           </a:xfrm>
           <a:prstGeom prst="rect">
             <a:avLst/>
           </a:prstGeom>
           <a:solidFill>
-            <a:srgbClr val="217A45"/>
+            <a:srgbClr val="FFFFFF"/>
           </a:solidFill>
           <a:ln>
             <a:noFill/>
@@ -5330,47 +5141,8 @@
         </p:nvSpPr>
         <p:spPr>
           <a:xfrm>
-            <a:off x="548640" y="109728"/>
-            <a:ext cx="10972800" cy="868680"/>
-          </a:xfrm>
-          <a:prstGeom prst="rect">
-            <a:avLst/>
-          </a:prstGeom>
-          <a:noFill/>
-        </p:spPr>
-        <p:txBody>
-          <a:bodyPr wrap="square" anchor="ctr">
-            <a:spAutoFit/>
-          </a:bodyPr>
-          <a:lstStyle/>
-          <a:p>
-            <a:pPr algn="l">
-              <a:spcAft>
-                <a:spcPts val="800"/>
-              </a:spcAft>
-            </a:pPr>
-            <a:r>
-              <a:rPr sz="2600" b="1" i="0">
-                <a:solidFill>
-                  <a:srgbClr val="FFFFFF"/>
-                </a:solidFill>
-                <a:latin typeface="Segoe UI"/>
-              </a:rPr>
-              <a:t>Архитектура решения</a:t>
-            </a:r>
-          </a:p>
-        </p:txBody>
-      </p:sp>
-      <p:sp>
-        <p:nvSpPr>
-          <p:cNvPr id="5" name="TextBox 4"/>
-          <p:cNvSpPr txBox="1"/>
-          <p:nvPr/>
-        </p:nvSpPr>
-        <p:spPr>
-          <a:xfrm>
-            <a:off x="457200" y="6419088"/>
-            <a:ext cx="8229600" cy="365760"/>
+            <a:off x="822960" y="777240"/>
+            <a:ext cx="10515600" cy="548640"/>
           </a:xfrm>
           <a:prstGeom prst="rect">
             <a:avLst/>
@@ -5389,27 +5161,27 @@
               </a:spcAft>
             </a:pPr>
             <a:r>
-              <a:rPr sz="1000" b="0" i="0">
-                <a:solidFill>
-                  <a:srgbClr val="6B7280"/>
-                </a:solidFill>
-                <a:latin typeface="Segoe UI"/>
-              </a:rPr>
-              <a:t>Учебная (ознакомительная) практика · РЭУ им. Г.В. Плеханова · 2026</a:t>
-            </a:r>
-          </a:p>
-        </p:txBody>
-      </p:sp>
-      <p:sp>
-        <p:nvSpPr>
-          <p:cNvPr id="6" name="TextBox 5"/>
+              <a:rPr sz="1500" b="1" i="0">
+                <a:solidFill>
+                  <a:srgbClr val="FFFFFF"/>
+                </a:solidFill>
+                <a:latin typeface="Segoe UI"/>
+              </a:rPr>
+              <a:t>РЕШЕНИЕ</a:t>
+            </a:r>
+          </a:p>
+        </p:txBody>
+      </p:sp>
+      <p:sp>
+        <p:nvSpPr>
+          <p:cNvPr id="5" name="TextBox 4"/>
           <p:cNvSpPr txBox="1"/>
           <p:nvPr/>
         </p:nvSpPr>
         <p:spPr>
           <a:xfrm>
-            <a:off x="11247120" y="6419088"/>
-            <a:ext cx="731520" cy="365760"/>
+            <a:off x="822960" y="2194560"/>
+            <a:ext cx="10515600" cy="2194560"/>
           </a:xfrm>
           <a:prstGeom prst="rect">
             <a:avLst/>
@@ -5422,44 +5194,58 @@
           </a:bodyPr>
           <a:lstStyle/>
           <a:p>
-            <a:pPr algn="r">
-              <a:spcAft>
-                <a:spcPts val="800"/>
-              </a:spcAft>
-            </a:pPr>
-            <a:r>
-              <a:rPr sz="1000" b="0" i="0">
-                <a:solidFill>
-                  <a:srgbClr val="6B7280"/>
-                </a:solidFill>
-                <a:latin typeface="Segoe UI"/>
-              </a:rPr>
-              <a:t>4</a:t>
-            </a:r>
-          </a:p>
-        </p:txBody>
-      </p:sp>
-      <p:sp>
-        <p:nvSpPr>
-          <p:cNvPr id="7" name="Rectangle 6"/>
+            <a:pPr algn="l">
+              <a:spcAft>
+                <a:spcPts val="1000"/>
+              </a:spcAft>
+            </a:pPr>
+            <a:r>
+              <a:rPr sz="4400" b="1" i="0">
+                <a:solidFill>
+                  <a:srgbClr val="FFFFFF"/>
+                </a:solidFill>
+                <a:latin typeface="Segoe UI"/>
+              </a:rPr>
+              <a:t>Личный ИИ-аналитик покупок</a:t>
+            </a:r>
+          </a:p>
+          <a:p>
+            <a:pPr algn="l">
+              <a:spcAft>
+                <a:spcPts val="0"/>
+              </a:spcAft>
+            </a:pPr>
+            <a:r>
+              <a:rPr sz="2100" b="0" i="0">
+                <a:solidFill>
+                  <a:srgbClr val="E6F4EC"/>
+                </a:solidFill>
+                <a:latin typeface="Segoe UI"/>
+              </a:rPr>
+              <a:t>По одному user_id — понятная аналитика и дружелюбные советы клиенту прямо в кабинете.</a:t>
+            </a:r>
+          </a:p>
+        </p:txBody>
+      </p:sp>
+      <p:sp>
+        <p:nvSpPr>
+          <p:cNvPr id="6" name="Rounded Rectangle 5"/>
           <p:cNvSpPr/>
           <p:nvPr/>
         </p:nvSpPr>
         <p:spPr>
           <a:xfrm>
-            <a:off x="548640" y="2011680"/>
-            <a:ext cx="2606040" cy="1645920"/>
-          </a:xfrm>
-          <a:prstGeom prst="rect">
+            <a:off x="822960" y="5212080"/>
+            <a:ext cx="2377440" cy="640080"/>
+          </a:xfrm>
+          <a:prstGeom prst="roundRect">
             <a:avLst/>
           </a:prstGeom>
           <a:solidFill>
-            <a:srgbClr val="E6F4EC"/>
+            <a:srgbClr val="FFFFFF"/>
           </a:solidFill>
           <a:ln>
-            <a:solidFill>
-              <a:srgbClr val="2E9E5B"/>
-            </a:solidFill>
+            <a:noFill/>
           </a:ln>
           <a:effectLst/>
         </p:spPr>
@@ -5483,98 +5269,40 @@
           <a:p>
             <a:pPr algn="ctr">
               <a:spcAft>
-                <a:spcPts val="400"/>
-              </a:spcAft>
-            </a:pPr>
-            <a:r>
-              <a:rPr sz="1700" b="1" i="0">
-                <a:solidFill>
-                  <a:srgbClr val="217A45"/>
-                </a:solidFill>
-                <a:latin typeface="Segoe UI"/>
-              </a:rPr>
-              <a:t>Клиент</a:t>
-            </a:r>
-          </a:p>
-          <a:p>
-            <a:pPr algn="ctr">
-              <a:spcAft>
                 <a:spcPts val="0"/>
               </a:spcAft>
             </a:pPr>
             <a:r>
-              <a:rPr sz="1200" b="0" i="0">
-                <a:solidFill>
-                  <a:srgbClr val="1F2430"/>
-                </a:solidFill>
-                <a:latin typeface="Segoe UI"/>
-              </a:rPr>
-              <a:t>вводит user_id
-в личном кабинете</a:t>
-            </a:r>
-          </a:p>
-        </p:txBody>
-      </p:sp>
-      <p:sp>
-        <p:nvSpPr>
-          <p:cNvPr id="8" name="TextBox 7"/>
-          <p:cNvSpPr txBox="1"/>
-          <p:nvPr/>
-        </p:nvSpPr>
-        <p:spPr>
-          <a:xfrm>
-            <a:off x="3154680" y="2011680"/>
-            <a:ext cx="301752" cy="1645920"/>
-          </a:xfrm>
-          <a:prstGeom prst="rect">
-            <a:avLst/>
-          </a:prstGeom>
-          <a:noFill/>
-        </p:spPr>
-        <p:txBody>
-          <a:bodyPr wrap="square" anchor="ctr">
-            <a:spAutoFit/>
-          </a:bodyPr>
-          <a:lstStyle/>
-          <a:p>
-            <a:pPr algn="ctr">
-              <a:spcAft>
-                <a:spcPts val="800"/>
-              </a:spcAft>
-            </a:pPr>
-            <a:r>
-              <a:rPr sz="2600" b="0" i="0">
+              <a:rPr sz="1600" b="1" i="0">
                 <a:solidFill>
                   <a:srgbClr val="2E9E5B"/>
                 </a:solidFill>
                 <a:latin typeface="Segoe UI"/>
               </a:rPr>
-              <a:t>→</a:t>
-            </a:r>
-          </a:p>
-        </p:txBody>
-      </p:sp>
-      <p:sp>
-        <p:nvSpPr>
-          <p:cNvPr id="9" name="Rectangle 8"/>
+              <a:t>Понятно</a:t>
+            </a:r>
+          </a:p>
+        </p:txBody>
+      </p:sp>
+      <p:sp>
+        <p:nvSpPr>
+          <p:cNvPr id="7" name="Rounded Rectangle 6"/>
           <p:cNvSpPr/>
           <p:nvPr/>
         </p:nvSpPr>
         <p:spPr>
           <a:xfrm>
-            <a:off x="3456432" y="2011680"/>
-            <a:ext cx="2606040" cy="1645920"/>
-          </a:xfrm>
-          <a:prstGeom prst="rect">
+            <a:off x="3474720" y="5212080"/>
+            <a:ext cx="2377440" cy="640080"/>
+          </a:xfrm>
+          <a:prstGeom prst="roundRect">
             <a:avLst/>
           </a:prstGeom>
           <a:solidFill>
-            <a:srgbClr val="E6F4EC"/>
+            <a:srgbClr val="FFFFFF"/>
           </a:solidFill>
           <a:ln>
-            <a:solidFill>
-              <a:srgbClr val="2E9E5B"/>
-            </a:solidFill>
+            <a:noFill/>
           </a:ln>
           <a:effectLst/>
         </p:spPr>
@@ -5598,98 +5326,40 @@
           <a:p>
             <a:pPr algn="ctr">
               <a:spcAft>
-                <a:spcPts val="400"/>
-              </a:spcAft>
-            </a:pPr>
-            <a:r>
-              <a:rPr sz="1700" b="1" i="0">
-                <a:solidFill>
-                  <a:srgbClr val="217A45"/>
-                </a:solidFill>
-                <a:latin typeface="Segoe UI"/>
-              </a:rPr>
-              <a:t>Flask</a:t>
-            </a:r>
-          </a:p>
-          <a:p>
-            <a:pPr algn="ctr">
-              <a:spcAft>
                 <a:spcPts val="0"/>
               </a:spcAft>
             </a:pPr>
             <a:r>
-              <a:rPr sz="1200" b="0" i="0">
-                <a:solidFill>
-                  <a:srgbClr val="1F2430"/>
-                </a:solidFill>
-                <a:latin typeface="Segoe UI"/>
-              </a:rPr>
-              <a:t>маршруты, сессии,
-обобщённый обработчик</a:t>
-            </a:r>
-          </a:p>
-        </p:txBody>
-      </p:sp>
-      <p:sp>
-        <p:nvSpPr>
-          <p:cNvPr id="10" name="TextBox 9"/>
-          <p:cNvSpPr txBox="1"/>
-          <p:nvPr/>
-        </p:nvSpPr>
-        <p:spPr>
-          <a:xfrm>
-            <a:off x="6062472" y="2011680"/>
-            <a:ext cx="301752" cy="1645920"/>
-          </a:xfrm>
-          <a:prstGeom prst="rect">
-            <a:avLst/>
-          </a:prstGeom>
-          <a:noFill/>
-        </p:spPr>
-        <p:txBody>
-          <a:bodyPr wrap="square" anchor="ctr">
-            <a:spAutoFit/>
-          </a:bodyPr>
-          <a:lstStyle/>
-          <a:p>
-            <a:pPr algn="ctr">
-              <a:spcAft>
-                <a:spcPts val="800"/>
-              </a:spcAft>
-            </a:pPr>
-            <a:r>
-              <a:rPr sz="2600" b="0" i="0">
+              <a:rPr sz="1600" b="1" i="0">
                 <a:solidFill>
                   <a:srgbClr val="2E9E5B"/>
                 </a:solidFill>
                 <a:latin typeface="Segoe UI"/>
               </a:rPr>
-              <a:t>→</a:t>
-            </a:r>
-          </a:p>
-        </p:txBody>
-      </p:sp>
-      <p:sp>
-        <p:nvSpPr>
-          <p:cNvPr id="11" name="Rectangle 10"/>
+              <a:t>Персонально</a:t>
+            </a:r>
+          </a:p>
+        </p:txBody>
+      </p:sp>
+      <p:sp>
+        <p:nvSpPr>
+          <p:cNvPr id="8" name="Rounded Rectangle 7"/>
           <p:cNvSpPr/>
           <p:nvPr/>
         </p:nvSpPr>
         <p:spPr>
           <a:xfrm>
-            <a:off x="6364224" y="2011680"/>
-            <a:ext cx="2606040" cy="1645920"/>
-          </a:xfrm>
-          <a:prstGeom prst="rect">
+            <a:off x="6126480" y="5212080"/>
+            <a:ext cx="2377440" cy="640080"/>
+          </a:xfrm>
+          <a:prstGeom prst="roundRect">
             <a:avLst/>
           </a:prstGeom>
           <a:solidFill>
-            <a:srgbClr val="E6F4EC"/>
+            <a:srgbClr val="FFFFFF"/>
           </a:solidFill>
           <a:ln>
-            <a:solidFill>
-              <a:srgbClr val="2E9E5B"/>
-            </a:solidFill>
+            <a:noFill/>
           </a:ln>
           <a:effectLst/>
         </p:spPr>
@@ -5713,220 +5383,17 @@
           <a:p>
             <a:pPr algn="ctr">
               <a:spcAft>
-                <a:spcPts val="400"/>
-              </a:spcAft>
-            </a:pPr>
-            <a:r>
-              <a:rPr sz="1700" b="1" i="0">
-                <a:solidFill>
-                  <a:srgbClr val="217A45"/>
-                </a:solidFill>
-                <a:latin typeface="Segoe UI"/>
-              </a:rPr>
-              <a:t>Loginom REST</a:t>
-            </a:r>
-          </a:p>
-          <a:p>
-            <a:pPr algn="ctr">
-              <a:spcAft>
                 <a:spcPts val="0"/>
               </a:spcAft>
             </a:pPr>
             <a:r>
-              <a:rPr sz="1200" b="0" i="0">
-                <a:solidFill>
-                  <a:srgbClr val="1F2430"/>
-                </a:solidFill>
-                <a:latin typeface="Segoe UI"/>
-              </a:rPr>
-              <a:t>SQL по Instacart,
-метрики клиента</a:t>
-            </a:r>
-          </a:p>
-        </p:txBody>
-      </p:sp>
-      <p:sp>
-        <p:nvSpPr>
-          <p:cNvPr id="12" name="TextBox 11"/>
-          <p:cNvSpPr txBox="1"/>
-          <p:nvPr/>
-        </p:nvSpPr>
-        <p:spPr>
-          <a:xfrm>
-            <a:off x="8970264" y="2011680"/>
-            <a:ext cx="301752" cy="1645920"/>
-          </a:xfrm>
-          <a:prstGeom prst="rect">
-            <a:avLst/>
-          </a:prstGeom>
-          <a:noFill/>
-        </p:spPr>
-        <p:txBody>
-          <a:bodyPr wrap="square" anchor="ctr">
-            <a:spAutoFit/>
-          </a:bodyPr>
-          <a:lstStyle/>
-          <a:p>
-            <a:pPr algn="ctr">
-              <a:spcAft>
-                <a:spcPts val="800"/>
-              </a:spcAft>
-            </a:pPr>
-            <a:r>
-              <a:rPr sz="2600" b="0" i="0">
+              <a:rPr sz="1600" b="1" i="0">
                 <a:solidFill>
                   <a:srgbClr val="2E9E5B"/>
                 </a:solidFill>
                 <a:latin typeface="Segoe UI"/>
               </a:rPr>
-              <a:t>→</a:t>
-            </a:r>
-          </a:p>
-        </p:txBody>
-      </p:sp>
-      <p:sp>
-        <p:nvSpPr>
-          <p:cNvPr id="13" name="Rectangle 12"/>
-          <p:cNvSpPr/>
-          <p:nvPr/>
-        </p:nvSpPr>
-        <p:spPr>
-          <a:xfrm>
-            <a:off x="9272016" y="2011680"/>
-            <a:ext cx="2606040" cy="1645920"/>
-          </a:xfrm>
-          <a:prstGeom prst="rect">
-            <a:avLst/>
-          </a:prstGeom>
-          <a:solidFill>
-            <a:srgbClr val="E6F4EC"/>
-          </a:solidFill>
-          <a:ln>
-            <a:solidFill>
-              <a:srgbClr val="2E9E5B"/>
-            </a:solidFill>
-          </a:ln>
-          <a:effectLst/>
-        </p:spPr>
-        <p:style>
-          <a:lnRef idx="1">
-            <a:schemeClr val="accent1"/>
-          </a:lnRef>
-          <a:fillRef idx="3">
-            <a:schemeClr val="accent1"/>
-          </a:fillRef>
-          <a:effectRef idx="2">
-            <a:schemeClr val="accent1"/>
-          </a:effectRef>
-          <a:fontRef idx="minor">
-            <a:schemeClr val="lt1"/>
-          </a:fontRef>
-        </p:style>
-        <p:txBody>
-          <a:bodyPr rtlCol="0" anchor="ctr" wrap="square"/>
-          <a:lstStyle/>
-          <a:p>
-            <a:pPr algn="ctr">
-              <a:spcAft>
-                <a:spcPts val="400"/>
-              </a:spcAft>
-            </a:pPr>
-            <a:r>
-              <a:rPr sz="1700" b="1" i="0">
-                <a:solidFill>
-                  <a:srgbClr val="217A45"/>
-                </a:solidFill>
-                <a:latin typeface="Segoe UI"/>
-              </a:rPr>
-              <a:t>Mistral (LLM)</a:t>
-            </a:r>
-          </a:p>
-          <a:p>
-            <a:pPr algn="ctr">
-              <a:spcAft>
-                <a:spcPts val="0"/>
-              </a:spcAft>
-            </a:pPr>
-            <a:r>
-              <a:rPr sz="1200" b="0" i="0">
-                <a:solidFill>
-                  <a:srgbClr val="1F2430"/>
-                </a:solidFill>
-                <a:latin typeface="Segoe UI"/>
-              </a:rPr>
-              <a:t>рекомендация
-по промпту сервиса</a:t>
-            </a:r>
-          </a:p>
-        </p:txBody>
-      </p:sp>
-      <p:sp>
-        <p:nvSpPr>
-          <p:cNvPr id="14" name="TextBox 13"/>
-          <p:cNvSpPr txBox="1"/>
-          <p:nvPr/>
-        </p:nvSpPr>
-        <p:spPr>
-          <a:xfrm>
-            <a:off x="640080" y="4114800"/>
-            <a:ext cx="10972800" cy="2011680"/>
-          </a:xfrm>
-          <a:prstGeom prst="rect">
-            <a:avLst/>
-          </a:prstGeom>
-          <a:noFill/>
-        </p:spPr>
-        <p:txBody>
-          <a:bodyPr wrap="square" anchor="t">
-            <a:spAutoFit/>
-          </a:bodyPr>
-          <a:lstStyle/>
-          <a:p>
-            <a:pPr algn="l">
-              <a:spcAft>
-                <a:spcPts val="600"/>
-              </a:spcAft>
-            </a:pPr>
-            <a:r>
-              <a:rPr sz="1600" b="0" i="0">
-                <a:solidFill>
-                  <a:srgbClr val="1F2430"/>
-                </a:solidFill>
-                <a:latin typeface="Segoe UI"/>
-              </a:rPr>
-              <a:t>•  Кэширование ответов LLM на диске — повторные запросы не идут в модель повторно.</a:t>
-            </a:r>
-          </a:p>
-          <a:p>
-            <a:pPr algn="l">
-              <a:spcAft>
-                <a:spcPts val="600"/>
-              </a:spcAft>
-            </a:pPr>
-            <a:r>
-              <a:rPr sz="1600" b="0" i="0">
-                <a:solidFill>
-                  <a:srgbClr val="1F2430"/>
-                </a:solidFill>
-                <a:latin typeface="Segoe UI"/>
-              </a:rPr>
-              <a:t>•  Согласованный контракт: имя сервиса и имена колонок Loginom = ожидания приложения.</a:t>
-            </a:r>
-          </a:p>
-          <a:p>
-            <a:pPr algn="l">
-              <a:spcAft>
-                <a:spcPts val="600"/>
-              </a:spcAft>
-            </a:pPr>
-            <a:r>
-              <a:rPr sz="1600" b="0" i="0">
-                <a:solidFill>
-                  <a:srgbClr val="1F2430"/>
-                </a:solidFill>
-                <a:latin typeface="Segoe UI"/>
-              </a:rPr>
-              <a:t>•  Публикация в облаке Amvera: порт из переменной окружения, секреты — через окружение.</a:t>
+              <a:t>Мгновенно</a:t>
             </a:r>
           </a:p>
         </p:txBody>
@@ -5958,7 +5425,7 @@
         <p:spPr>
           <a:xfrm>
             <a:off x="0" y="0"/>
-            <a:ext cx="12191695" cy="1051560"/>
+            <a:ext cx="12191695" cy="1143000"/>
           </a:xfrm>
           <a:prstGeom prst="rect">
             <a:avLst/>
@@ -6001,7 +5468,7 @@
         </p:nvSpPr>
         <p:spPr>
           <a:xfrm>
-            <a:off x="0" y="1051560"/>
+            <a:off x="0" y="1143000"/>
             <a:ext cx="12191695" cy="54864"/>
           </a:xfrm>
           <a:prstGeom prst="rect">
@@ -6045,8 +5512,8 @@
         </p:nvSpPr>
         <p:spPr>
           <a:xfrm>
-            <a:off x="548640" y="109728"/>
-            <a:ext cx="10972800" cy="868680"/>
+            <a:off x="548640" y="128016"/>
+            <a:ext cx="11155680" cy="960120"/>
           </a:xfrm>
           <a:prstGeom prst="rect">
             <a:avLst/>
@@ -6061,31 +5528,123 @@
           <a:p>
             <a:pPr algn="l">
               <a:spcAft>
-                <a:spcPts val="800"/>
-              </a:spcAft>
-            </a:pPr>
-            <a:r>
-              <a:rPr sz="2600" b="1" i="0">
+                <a:spcPts val="200"/>
+              </a:spcAft>
+            </a:pPr>
+            <a:r>
+              <a:rPr sz="1200" b="1" i="0">
+                <a:solidFill>
+                  <a:srgbClr val="E6F4EC"/>
+                </a:solidFill>
+                <a:latin typeface="Segoe UI"/>
+              </a:rPr>
+              <a:t>СУТЬ</a:t>
+            </a:r>
+          </a:p>
+          <a:p>
+            <a:pPr algn="l">
+              <a:spcAft>
+                <a:spcPts val="0"/>
+              </a:spcAft>
+            </a:pPr>
+            <a:r>
+              <a:rPr sz="2700" b="1" i="0">
                 <a:solidFill>
                   <a:srgbClr val="FFFFFF"/>
                 </a:solidFill>
                 <a:latin typeface="Segoe UI"/>
               </a:rPr>
-              <a:t>Аналитические сервисы</a:t>
-            </a:r>
-          </a:p>
-        </p:txBody>
-      </p:sp>
-      <p:sp>
-        <p:nvSpPr>
-          <p:cNvPr id="5" name="TextBox 4"/>
+              <a:t>Почему это возможно так быстро</a:t>
+            </a:r>
+          </a:p>
+        </p:txBody>
+      </p:sp>
+      <p:sp>
+        <p:nvSpPr>
+          <p:cNvPr id="5" name="Rounded Rectangle 4"/>
+          <p:cNvSpPr/>
+          <p:nvPr/>
+        </p:nvSpPr>
+        <p:spPr>
+          <a:xfrm>
+            <a:off x="640080" y="1737360"/>
+            <a:ext cx="2514600" cy="1737360"/>
+          </a:xfrm>
+          <a:prstGeom prst="roundRect">
+            <a:avLst/>
+          </a:prstGeom>
+          <a:solidFill>
+            <a:srgbClr val="E6F4EC"/>
+          </a:solidFill>
+          <a:ln w="12700">
+            <a:solidFill>
+              <a:srgbClr val="2E9E5B"/>
+            </a:solidFill>
+          </a:ln>
+          <a:effectLst/>
+        </p:spPr>
+        <p:style>
+          <a:lnRef idx="1">
+            <a:schemeClr val="accent1"/>
+          </a:lnRef>
+          <a:fillRef idx="3">
+            <a:schemeClr val="accent1"/>
+          </a:fillRef>
+          <a:effectRef idx="2">
+            <a:schemeClr val="accent1"/>
+          </a:effectRef>
+          <a:fontRef idx="minor">
+            <a:schemeClr val="lt1"/>
+          </a:fontRef>
+        </p:style>
+        <p:txBody>
+          <a:bodyPr rtlCol="0" anchor="ctr" wrap="square"/>
+          <a:lstStyle/>
+          <a:p>
+            <a:pPr algn="ctr">
+              <a:spcAft>
+                <a:spcPts val="400"/>
+              </a:spcAft>
+            </a:pPr>
+            <a:r>
+              <a:rPr sz="1800" b="1" i="0">
+                <a:solidFill>
+                  <a:srgbClr val="2E9E5B"/>
+                </a:solidFill>
+                <a:latin typeface="Segoe UI"/>
+              </a:rPr>
+              <a:t>Loginom</a:t>
+            </a:r>
+          </a:p>
+          <a:p>
+            <a:pPr algn="ctr">
+              <a:spcAft>
+                <a:spcPts val="0"/>
+              </a:spcAft>
+            </a:pPr>
+            <a:r>
+              <a:rPr sz="1300" b="0" i="0">
+                <a:solidFill>
+                  <a:srgbClr val="1F2430"/>
+                </a:solidFill>
+                <a:latin typeface="Segoe UI"/>
+              </a:rPr>
+              <a:t>аналитика
+без кода</a:t>
+            </a:r>
+          </a:p>
+        </p:txBody>
+      </p:sp>
+      <p:sp>
+        <p:nvSpPr>
+          <p:cNvPr id="6" name="TextBox 5"/>
           <p:cNvSpPr txBox="1"/>
           <p:nvPr/>
         </p:nvSpPr>
         <p:spPr>
           <a:xfrm>
-            <a:off x="9692640" y="109728"/>
-            <a:ext cx="2194560" cy="868680"/>
+            <a:off x="3154680" y="1737360"/>
+            <a:ext cx="274320" cy="1737360"/>
           </a:xfrm>
           <a:prstGeom prst="rect">
             <a:avLst/>
@@ -6098,33 +5657,396 @@
           </a:bodyPr>
           <a:lstStyle/>
           <a:p>
-            <a:pPr algn="r">
+            <a:pPr algn="ctr">
               <a:spcAft>
                 <a:spcPts val="800"/>
               </a:spcAft>
             </a:pPr>
             <a:r>
-              <a:rPr sz="1200" b="1" i="0">
-                <a:solidFill>
-                  <a:srgbClr val="E6F4EC"/>
-                </a:solidFill>
-                <a:latin typeface="Segoe UI"/>
-              </a:rPr>
-              <a:t>показать пользу клиенту</a:t>
-            </a:r>
-          </a:p>
-        </p:txBody>
-      </p:sp>
-      <p:sp>
-        <p:nvSpPr>
-          <p:cNvPr id="6" name="TextBox 5"/>
+              <a:rPr sz="2400" b="0" i="0">
+                <a:solidFill>
+                  <a:srgbClr val="2E9E5B"/>
+                </a:solidFill>
+                <a:latin typeface="Segoe UI"/>
+              </a:rPr>
+              <a:t>→</a:t>
+            </a:r>
+          </a:p>
+        </p:txBody>
+      </p:sp>
+      <p:sp>
+        <p:nvSpPr>
+          <p:cNvPr id="7" name="Rounded Rectangle 6"/>
+          <p:cNvSpPr/>
+          <p:nvPr/>
+        </p:nvSpPr>
+        <p:spPr>
+          <a:xfrm>
+            <a:off x="3429000" y="1737360"/>
+            <a:ext cx="2514600" cy="1737360"/>
+          </a:xfrm>
+          <a:prstGeom prst="roundRect">
+            <a:avLst/>
+          </a:prstGeom>
+          <a:solidFill>
+            <a:srgbClr val="E6F4EC"/>
+          </a:solidFill>
+          <a:ln w="12700">
+            <a:solidFill>
+              <a:srgbClr val="2E9E5B"/>
+            </a:solidFill>
+          </a:ln>
+          <a:effectLst/>
+        </p:spPr>
+        <p:style>
+          <a:lnRef idx="1">
+            <a:schemeClr val="accent1"/>
+          </a:lnRef>
+          <a:fillRef idx="3">
+            <a:schemeClr val="accent1"/>
+          </a:fillRef>
+          <a:effectRef idx="2">
+            <a:schemeClr val="accent1"/>
+          </a:effectRef>
+          <a:fontRef idx="minor">
+            <a:schemeClr val="lt1"/>
+          </a:fontRef>
+        </p:style>
+        <p:txBody>
+          <a:bodyPr rtlCol="0" anchor="ctr" wrap="square"/>
+          <a:lstStyle/>
+          <a:p>
+            <a:pPr algn="ctr">
+              <a:spcAft>
+                <a:spcPts val="400"/>
+              </a:spcAft>
+            </a:pPr>
+            <a:r>
+              <a:rPr sz="1800" b="1" i="0">
+                <a:solidFill>
+                  <a:srgbClr val="2E9E5B"/>
+                </a:solidFill>
+                <a:latin typeface="Segoe UI"/>
+              </a:rPr>
+              <a:t>Flask</a:t>
+            </a:r>
+          </a:p>
+          <a:p>
+            <a:pPr algn="ctr">
+              <a:spcAft>
+                <a:spcPts val="0"/>
+              </a:spcAft>
+            </a:pPr>
+            <a:r>
+              <a:rPr sz="1300" b="0" i="0">
+                <a:solidFill>
+                  <a:srgbClr val="1F2430"/>
+                </a:solidFill>
+                <a:latin typeface="Segoe UI"/>
+              </a:rPr>
+              <a:t>лёгкое
+веб-приложение</a:t>
+            </a:r>
+          </a:p>
+        </p:txBody>
+      </p:sp>
+      <p:sp>
+        <p:nvSpPr>
+          <p:cNvPr id="8" name="TextBox 7"/>
           <p:cNvSpPr txBox="1"/>
           <p:nvPr/>
         </p:nvSpPr>
         <p:spPr>
           <a:xfrm>
-            <a:off x="457200" y="6419088"/>
-            <a:ext cx="8229600" cy="365760"/>
+            <a:off x="5943600" y="1737360"/>
+            <a:ext cx="274320" cy="1737360"/>
+          </a:xfrm>
+          <a:prstGeom prst="rect">
+            <a:avLst/>
+          </a:prstGeom>
+          <a:noFill/>
+        </p:spPr>
+        <p:txBody>
+          <a:bodyPr wrap="square" anchor="ctr">
+            <a:spAutoFit/>
+          </a:bodyPr>
+          <a:lstStyle/>
+          <a:p>
+            <a:pPr algn="ctr">
+              <a:spcAft>
+                <a:spcPts val="800"/>
+              </a:spcAft>
+            </a:pPr>
+            <a:r>
+              <a:rPr sz="2400" b="0" i="0">
+                <a:solidFill>
+                  <a:srgbClr val="2E9E5B"/>
+                </a:solidFill>
+                <a:latin typeface="Segoe UI"/>
+              </a:rPr>
+              <a:t>→</a:t>
+            </a:r>
+          </a:p>
+        </p:txBody>
+      </p:sp>
+      <p:sp>
+        <p:nvSpPr>
+          <p:cNvPr id="9" name="Rounded Rectangle 8"/>
+          <p:cNvSpPr/>
+          <p:nvPr/>
+        </p:nvSpPr>
+        <p:spPr>
+          <a:xfrm>
+            <a:off x="6217920" y="1737360"/>
+            <a:ext cx="2514600" cy="1737360"/>
+          </a:xfrm>
+          <a:prstGeom prst="roundRect">
+            <a:avLst/>
+          </a:prstGeom>
+          <a:solidFill>
+            <a:srgbClr val="E6F4EC"/>
+          </a:solidFill>
+          <a:ln w="12700">
+            <a:solidFill>
+              <a:srgbClr val="2E9E5B"/>
+            </a:solidFill>
+          </a:ln>
+          <a:effectLst/>
+        </p:spPr>
+        <p:style>
+          <a:lnRef idx="1">
+            <a:schemeClr val="accent1"/>
+          </a:lnRef>
+          <a:fillRef idx="3">
+            <a:schemeClr val="accent1"/>
+          </a:fillRef>
+          <a:effectRef idx="2">
+            <a:schemeClr val="accent1"/>
+          </a:effectRef>
+          <a:fontRef idx="minor">
+            <a:schemeClr val="lt1"/>
+          </a:fontRef>
+        </p:style>
+        <p:txBody>
+          <a:bodyPr rtlCol="0" anchor="ctr" wrap="square"/>
+          <a:lstStyle/>
+          <a:p>
+            <a:pPr algn="ctr">
+              <a:spcAft>
+                <a:spcPts val="400"/>
+              </a:spcAft>
+            </a:pPr>
+            <a:r>
+              <a:rPr sz="1800" b="1" i="0">
+                <a:solidFill>
+                  <a:srgbClr val="2E9E5B"/>
+                </a:solidFill>
+                <a:latin typeface="Segoe UI"/>
+              </a:rPr>
+              <a:t>Mistral (ИИ)</a:t>
+            </a:r>
+          </a:p>
+          <a:p>
+            <a:pPr algn="ctr">
+              <a:spcAft>
+                <a:spcPts val="0"/>
+              </a:spcAft>
+            </a:pPr>
+            <a:r>
+              <a:rPr sz="1300" b="0" i="0">
+                <a:solidFill>
+                  <a:srgbClr val="1F2430"/>
+                </a:solidFill>
+                <a:latin typeface="Segoe UI"/>
+              </a:rPr>
+              <a:t>советы
+человеческим языком</a:t>
+            </a:r>
+          </a:p>
+        </p:txBody>
+      </p:sp>
+      <p:sp>
+        <p:nvSpPr>
+          <p:cNvPr id="10" name="TextBox 9"/>
+          <p:cNvSpPr txBox="1"/>
+          <p:nvPr/>
+        </p:nvSpPr>
+        <p:spPr>
+          <a:xfrm>
+            <a:off x="8732520" y="1737360"/>
+            <a:ext cx="274320" cy="1737360"/>
+          </a:xfrm>
+          <a:prstGeom prst="rect">
+            <a:avLst/>
+          </a:prstGeom>
+          <a:noFill/>
+        </p:spPr>
+        <p:txBody>
+          <a:bodyPr wrap="square" anchor="ctr">
+            <a:spAutoFit/>
+          </a:bodyPr>
+          <a:lstStyle/>
+          <a:p>
+            <a:pPr algn="ctr">
+              <a:spcAft>
+                <a:spcPts val="800"/>
+              </a:spcAft>
+            </a:pPr>
+            <a:r>
+              <a:rPr sz="2400" b="0" i="0">
+                <a:solidFill>
+                  <a:srgbClr val="2E9E5B"/>
+                </a:solidFill>
+                <a:latin typeface="Segoe UI"/>
+              </a:rPr>
+              <a:t>→</a:t>
+            </a:r>
+          </a:p>
+        </p:txBody>
+      </p:sp>
+      <p:sp>
+        <p:nvSpPr>
+          <p:cNvPr id="11" name="Rounded Rectangle 10"/>
+          <p:cNvSpPr/>
+          <p:nvPr/>
+        </p:nvSpPr>
+        <p:spPr>
+          <a:xfrm>
+            <a:off x="9006840" y="1737360"/>
+            <a:ext cx="2514600" cy="1737360"/>
+          </a:xfrm>
+          <a:prstGeom prst="roundRect">
+            <a:avLst/>
+          </a:prstGeom>
+          <a:solidFill>
+            <a:srgbClr val="E6F4EC"/>
+          </a:solidFill>
+          <a:ln w="12700">
+            <a:solidFill>
+              <a:srgbClr val="2E9E5B"/>
+            </a:solidFill>
+          </a:ln>
+          <a:effectLst/>
+        </p:spPr>
+        <p:style>
+          <a:lnRef idx="1">
+            <a:schemeClr val="accent1"/>
+          </a:lnRef>
+          <a:fillRef idx="3">
+            <a:schemeClr val="accent1"/>
+          </a:fillRef>
+          <a:effectRef idx="2">
+            <a:schemeClr val="accent1"/>
+          </a:effectRef>
+          <a:fontRef idx="minor">
+            <a:schemeClr val="lt1"/>
+          </a:fontRef>
+        </p:style>
+        <p:txBody>
+          <a:bodyPr rtlCol="0" anchor="ctr" wrap="square"/>
+          <a:lstStyle/>
+          <a:p>
+            <a:pPr algn="ctr">
+              <a:spcAft>
+                <a:spcPts val="400"/>
+              </a:spcAft>
+            </a:pPr>
+            <a:r>
+              <a:rPr sz="1800" b="1" i="0">
+                <a:solidFill>
+                  <a:srgbClr val="2E9E5B"/>
+                </a:solidFill>
+                <a:latin typeface="Segoe UI"/>
+              </a:rPr>
+              <a:t>Кэш</a:t>
+            </a:r>
+          </a:p>
+          <a:p>
+            <a:pPr algn="ctr">
+              <a:spcAft>
+                <a:spcPts val="0"/>
+              </a:spcAft>
+            </a:pPr>
+            <a:r>
+              <a:rPr sz="1300" b="0" i="0">
+                <a:solidFill>
+                  <a:srgbClr val="1F2430"/>
+                </a:solidFill>
+                <a:latin typeface="Segoe UI"/>
+              </a:rPr>
+              <a:t>мгновенный
+повтор</a:t>
+            </a:r>
+          </a:p>
+        </p:txBody>
+      </p:sp>
+      <p:sp>
+        <p:nvSpPr>
+          <p:cNvPr id="12" name="Rounded Rectangle 11"/>
+          <p:cNvSpPr/>
+          <p:nvPr/>
+        </p:nvSpPr>
+        <p:spPr>
+          <a:xfrm>
+            <a:off x="640080" y="4114800"/>
+            <a:ext cx="10881360" cy="1371600"/>
+          </a:xfrm>
+          <a:prstGeom prst="roundRect">
+            <a:avLst/>
+          </a:prstGeom>
+          <a:solidFill>
+            <a:srgbClr val="112A1D"/>
+          </a:solidFill>
+          <a:ln>
+            <a:noFill/>
+          </a:ln>
+          <a:effectLst/>
+        </p:spPr>
+        <p:style>
+          <a:lnRef idx="1">
+            <a:schemeClr val="accent1"/>
+          </a:lnRef>
+          <a:fillRef idx="3">
+            <a:schemeClr val="accent1"/>
+          </a:fillRef>
+          <a:effectRef idx="2">
+            <a:schemeClr val="accent1"/>
+          </a:effectRef>
+          <a:fontRef idx="minor">
+            <a:schemeClr val="lt1"/>
+          </a:fontRef>
+        </p:style>
+        <p:txBody>
+          <a:bodyPr rtlCol="0" anchor="ctr" wrap="square" lIns="365760"/>
+          <a:lstStyle/>
+          <a:p>
+            <a:pPr algn="l">
+              <a:spcAft>
+                <a:spcPts val="0"/>
+              </a:spcAft>
+            </a:pPr>
+            <a:r>
+              <a:rPr sz="2200" b="1" i="0">
+                <a:solidFill>
+                  <a:srgbClr val="FFFFFF"/>
+                </a:solidFill>
+                <a:latin typeface="Segoe UI"/>
+              </a:rPr>
+              <a:t>Рабочий MVP собран за 2 недели — без тяжёлой разработки и большой команды.</a:t>
+            </a:r>
+          </a:p>
+        </p:txBody>
+      </p:sp>
+      <p:sp>
+        <p:nvSpPr>
+          <p:cNvPr id="13" name="TextBox 12"/>
+          <p:cNvSpPr txBox="1"/>
+          <p:nvPr/>
+        </p:nvSpPr>
+        <p:spPr>
+          <a:xfrm>
+            <a:off x="457200" y="6437376"/>
+            <a:ext cx="9144000" cy="365760"/>
           </a:xfrm>
           <a:prstGeom prst="rect">
             <a:avLst/>
@@ -6149,21 +6071,21 @@
                 </a:solidFill>
                 <a:latin typeface="Segoe UI"/>
               </a:rPr>
-              <a:t>Учебная (ознакомительная) практика · РЭУ им. Г.В. Плеханова · 2026</a:t>
-            </a:r>
-          </a:p>
-        </p:txBody>
-      </p:sp>
-      <p:sp>
-        <p:nvSpPr>
-          <p:cNvPr id="7" name="TextBox 6"/>
+              <a:t>Instacart Insights · РЭУ им. Г.В. Плеханова · 2026</a:t>
+            </a:r>
+          </a:p>
+        </p:txBody>
+      </p:sp>
+      <p:sp>
+        <p:nvSpPr>
+          <p:cNvPr id="14" name="TextBox 13"/>
           <p:cNvSpPr txBox="1"/>
           <p:nvPr/>
         </p:nvSpPr>
         <p:spPr>
           <a:xfrm>
-            <a:off x="11247120" y="6419088"/>
-            <a:ext cx="731520" cy="365760"/>
+            <a:off x="11338560" y="6437376"/>
+            <a:ext cx="640080" cy="365760"/>
           </a:xfrm>
           <a:prstGeom prst="rect">
             <a:avLst/>
@@ -6193,186 +6115,6 @@
           </a:p>
         </p:txBody>
       </p:sp>
-      <p:sp>
-        <p:nvSpPr>
-          <p:cNvPr id="8" name="TextBox 7"/>
-          <p:cNvSpPr txBox="1"/>
-          <p:nvPr/>
-        </p:nvSpPr>
-        <p:spPr>
-          <a:xfrm>
-            <a:off x="640080" y="1325880"/>
-            <a:ext cx="6126480" cy="4937760"/>
-          </a:xfrm>
-          <a:prstGeom prst="rect">
-            <a:avLst/>
-          </a:prstGeom>
-          <a:noFill/>
-        </p:spPr>
-        <p:txBody>
-          <a:bodyPr wrap="square" anchor="t">
-            <a:spAutoFit/>
-          </a:bodyPr>
-          <a:lstStyle/>
-          <a:p>
-            <a:pPr algn="l">
-              <a:spcAft>
-                <a:spcPts val="600"/>
-              </a:spcAft>
-            </a:pPr>
-            <a:r>
-              <a:rPr sz="1700" b="1" i="0">
-                <a:solidFill>
-                  <a:srgbClr val="217A45"/>
-                </a:solidFill>
-                <a:latin typeface="Segoe UI"/>
-              </a:rPr>
-              <a:t>Пять сервисов в едином кабинете:</a:t>
-            </a:r>
-          </a:p>
-          <a:p>
-            <a:pPr algn="l">
-              <a:spcAft>
-                <a:spcPts val="700"/>
-              </a:spcAft>
-            </a:pPr>
-            <a:r>
-              <a:rPr sz="1500" b="0" i="0">
-                <a:solidFill>
-                  <a:srgbClr val="1F2430"/>
-                </a:solidFill>
-                <a:latin typeface="Segoe UI"/>
-              </a:rPr>
-              <a:t>•  Топ-10 товаров — что клиент покупает чаще всего</a:t>
-            </a:r>
-          </a:p>
-          <a:p>
-            <a:pPr algn="l">
-              <a:spcAft>
-                <a:spcPts val="700"/>
-              </a:spcAft>
-            </a:pPr>
-            <a:r>
-              <a:rPr sz="1500" b="0" i="0">
-                <a:solidFill>
-                  <a:srgbClr val="1F2430"/>
-                </a:solidFill>
-                <a:latin typeface="Segoe UI"/>
-              </a:rPr>
-              <a:t>•  Забытые товары — привычное, чего давно не было в заказах</a:t>
-            </a:r>
-          </a:p>
-          <a:p>
-            <a:pPr algn="l">
-              <a:spcAft>
-                <a:spcPts val="700"/>
-              </a:spcAft>
-            </a:pPr>
-            <a:r>
-              <a:rPr sz="1500" b="0" i="0">
-                <a:solidFill>
-                  <a:srgbClr val="1F2430"/>
-                </a:solidFill>
-                <a:latin typeface="Segoe UI"/>
-              </a:rPr>
-              <a:t>•  Ритм покупок — как часто и когда клиент заказывает</a:t>
-            </a:r>
-          </a:p>
-          <a:p>
-            <a:pPr algn="l">
-              <a:spcAft>
-                <a:spcPts val="700"/>
-              </a:spcAft>
-            </a:pPr>
-            <a:r>
-              <a:rPr sz="1500" b="0" i="0">
-                <a:solidFill>
-                  <a:srgbClr val="1F2430"/>
-                </a:solidFill>
-                <a:latin typeface="Segoe UI"/>
-              </a:rPr>
-              <a:t>•  Сводка по клиенту — ключевые метрики поведения</a:t>
-            </a:r>
-          </a:p>
-          <a:p>
-            <a:pPr algn="l">
-              <a:spcAft>
-                <a:spcPts val="700"/>
-              </a:spcAft>
-            </a:pPr>
-            <a:r>
-              <a:rPr sz="1500" b="0" i="0">
-                <a:solidFill>
-                  <a:srgbClr val="1F2430"/>
-                </a:solidFill>
-                <a:latin typeface="Segoe UI"/>
-              </a:rPr>
-              <a:t>•  Отделы и категории — из чего состоит корзина</a:t>
-            </a:r>
-          </a:p>
-          <a:p>
-            <a:pPr algn="l">
-              <a:spcAft>
-                <a:spcPts val="400"/>
-              </a:spcAft>
-            </a:pPr>
-            <a:r>
-              <a:rPr sz="1400" b="0" i="0">
-                <a:solidFill>
-                  <a:srgbClr val="6B7280"/>
-                </a:solidFill>
-                <a:latin typeface="Segoe UI"/>
-              </a:rPr>
-              <a:t>4 опубликованы как REST-сервисы Loginom, 1 считается в приложении.</a:t>
-            </a:r>
-          </a:p>
-          <a:p>
-            <a:pPr algn="l">
-              <a:spcAft>
-                <a:spcPts val="800"/>
-              </a:spcAft>
-            </a:pPr>
-            <a:r>
-              <a:rPr sz="1400" b="1" i="0">
-                <a:solidFill>
-                  <a:srgbClr val="217A45"/>
-                </a:solidFill>
-                <a:latin typeface="Segoe UI"/>
-              </a:rPr>
-              <a:t>2 сервиса — самостоятельные идеи команды.</a:t>
-            </a:r>
-          </a:p>
-        </p:txBody>
-      </p:sp>
-      <p:pic>
-        <p:nvPicPr>
-          <p:cNvPr id="9" name="Picture 8" descr="image1.jpg"/>
-          <p:cNvPicPr>
-            <a:picLocks noChangeAspect="1"/>
-          </p:cNvPicPr>
-          <p:nvPr/>
-        </p:nvPicPr>
-        <p:blipFill>
-          <a:blip r:embed="rId2"/>
-          <a:stretch>
-            <a:fillRect/>
-          </a:stretch>
-        </p:blipFill>
-        <p:spPr>
-          <a:xfrm>
-            <a:off x="6949440" y="2331113"/>
-            <a:ext cx="4846320" cy="2835854"/>
-          </a:xfrm>
-          <a:prstGeom prst="rect">
-            <a:avLst/>
-          </a:prstGeom>
-          <a:ln w="12700">
-            <a:solidFill>
-              <a:srgbClr val="D0D5DD"/>
-            </a:solidFill>
-          </a:ln>
-        </p:spPr>
-      </p:pic>
     </p:spTree>
   </p:cSld>
   <p:clrMapOvr>
@@ -6400,7 +6142,7 @@
         <p:spPr>
           <a:xfrm>
             <a:off x="0" y="0"/>
-            <a:ext cx="12191695" cy="1051560"/>
+            <a:ext cx="12191695" cy="1143000"/>
           </a:xfrm>
           <a:prstGeom prst="rect">
             <a:avLst/>
@@ -6443,7 +6185,7 @@
         </p:nvSpPr>
         <p:spPr>
           <a:xfrm>
-            <a:off x="0" y="1051560"/>
+            <a:off x="0" y="1143000"/>
             <a:ext cx="12191695" cy="54864"/>
           </a:xfrm>
           <a:prstGeom prst="rect">
@@ -6487,8 +6229,8 @@
         </p:nvSpPr>
         <p:spPr>
           <a:xfrm>
-            <a:off x="548640" y="109728"/>
-            <a:ext cx="10972800" cy="868680"/>
+            <a:off x="548640" y="128016"/>
+            <a:ext cx="11155680" cy="960120"/>
           </a:xfrm>
           <a:prstGeom prst="rect">
             <a:avLst/>
@@ -6503,17 +6245,33 @@
           <a:p>
             <a:pPr algn="l">
               <a:spcAft>
-                <a:spcPts val="800"/>
-              </a:spcAft>
-            </a:pPr>
-            <a:r>
-              <a:rPr sz="2600" b="1" i="0">
+                <a:spcPts val="200"/>
+              </a:spcAft>
+            </a:pPr>
+            <a:r>
+              <a:rPr sz="1200" b="1" i="0">
+                <a:solidFill>
+                  <a:srgbClr val="E6F4EC"/>
+                </a:solidFill>
+                <a:latin typeface="Segoe UI"/>
+              </a:rPr>
+              <a:t>КАК РАБОТАЕТ · 1</a:t>
+            </a:r>
+          </a:p>
+          <a:p>
+            <a:pPr algn="l">
+              <a:spcAft>
+                <a:spcPts val="0"/>
+              </a:spcAft>
+            </a:pPr>
+            <a:r>
+              <a:rPr sz="2700" b="1" i="0">
                 <a:solidFill>
                   <a:srgbClr val="FFFFFF"/>
                 </a:solidFill>
                 <a:latin typeface="Segoe UI"/>
               </a:rPr>
-              <a:t>Интерфейс и UX-решения</a:t>
+              <a:t>Что получает клиент — 5 сервисов</a:t>
             </a:r>
           </a:p>
         </p:txBody>
@@ -6526,47 +6284,8 @@
         </p:nvSpPr>
         <p:spPr>
           <a:xfrm>
-            <a:off x="9692640" y="109728"/>
-            <a:ext cx="2194560" cy="868680"/>
-          </a:xfrm>
-          <a:prstGeom prst="rect">
-            <a:avLst/>
-          </a:prstGeom>
-          <a:noFill/>
-        </p:spPr>
-        <p:txBody>
-          <a:bodyPr wrap="square" anchor="ctr">
-            <a:spAutoFit/>
-          </a:bodyPr>
-          <a:lstStyle/>
-          <a:p>
-            <a:pPr algn="r">
-              <a:spcAft>
-                <a:spcPts val="800"/>
-              </a:spcAft>
-            </a:pPr>
-            <a:r>
-              <a:rPr sz="1200" b="1" i="0">
-                <a:solidFill>
-                  <a:srgbClr val="E6F4EC"/>
-                </a:solidFill>
-                <a:latin typeface="Segoe UI"/>
-              </a:rPr>
-              <a:t>показать интерфейс</a:t>
-            </a:r>
-          </a:p>
-        </p:txBody>
-      </p:sp>
-      <p:sp>
-        <p:nvSpPr>
-          <p:cNvPr id="6" name="TextBox 5"/>
-          <p:cNvSpPr txBox="1"/>
-          <p:nvPr/>
-        </p:nvSpPr>
-        <p:spPr>
-          <a:xfrm>
-            <a:off x="457200" y="6419088"/>
-            <a:ext cx="8229600" cy="365760"/>
+            <a:off x="640080" y="1463040"/>
+            <a:ext cx="5943600" cy="4754880"/>
           </a:xfrm>
           <a:prstGeom prst="rect">
             <a:avLst/>
@@ -6579,105 +6298,20 @@
           </a:bodyPr>
           <a:lstStyle/>
           <a:p>
-            <a:pPr algn="l">
-              <a:spcAft>
-                <a:spcPts val="800"/>
-              </a:spcAft>
-            </a:pPr>
-            <a:r>
-              <a:rPr sz="1000" b="0" i="0">
-                <a:solidFill>
-                  <a:srgbClr val="6B7280"/>
-                </a:solidFill>
-                <a:latin typeface="Segoe UI"/>
-              </a:rPr>
-              <a:t>Учебная (ознакомительная) практика · РЭУ им. Г.В. Плеханова · 2026</a:t>
-            </a:r>
-          </a:p>
-        </p:txBody>
-      </p:sp>
-      <p:sp>
-        <p:nvSpPr>
-          <p:cNvPr id="7" name="TextBox 6"/>
-          <p:cNvSpPr txBox="1"/>
-          <p:nvPr/>
-        </p:nvSpPr>
-        <p:spPr>
-          <a:xfrm>
-            <a:off x="11247120" y="6419088"/>
-            <a:ext cx="731520" cy="365760"/>
-          </a:xfrm>
-          <a:prstGeom prst="rect">
-            <a:avLst/>
-          </a:prstGeom>
-          <a:noFill/>
-        </p:spPr>
-        <p:txBody>
-          <a:bodyPr wrap="square" anchor="t">
-            <a:spAutoFit/>
-          </a:bodyPr>
-          <a:lstStyle/>
-          <a:p>
-            <a:pPr algn="r">
-              <a:spcAft>
-                <a:spcPts val="800"/>
-              </a:spcAft>
-            </a:pPr>
-            <a:r>
-              <a:rPr sz="1000" b="0" i="0">
-                <a:solidFill>
-                  <a:srgbClr val="6B7280"/>
-                </a:solidFill>
-                <a:latin typeface="Segoe UI"/>
-              </a:rPr>
-              <a:t>6</a:t>
-            </a:r>
-          </a:p>
-        </p:txBody>
-      </p:sp>
-      <p:sp>
-        <p:nvSpPr>
-          <p:cNvPr id="8" name="TextBox 7"/>
-          <p:cNvSpPr txBox="1"/>
-          <p:nvPr/>
-        </p:nvSpPr>
-        <p:spPr>
-          <a:xfrm>
-            <a:off x="640080" y="1325880"/>
-            <a:ext cx="4572000" cy="4937760"/>
-          </a:xfrm>
-          <a:prstGeom prst="rect">
-            <a:avLst/>
-          </a:prstGeom>
-          <a:noFill/>
-        </p:spPr>
-        <p:txBody>
-          <a:bodyPr wrap="square" anchor="t">
-            <a:spAutoFit/>
-          </a:bodyPr>
-          <a:lstStyle/>
-          <a:p>
-            <a:pPr algn="l">
-              <a:spcAft>
-                <a:spcPts val="600"/>
+            <a:pPr>
+              <a:spcAft>
+                <a:spcPts val="1100"/>
               </a:spcAft>
             </a:pPr>
             <a:r>
               <a:rPr sz="1600" b="1" i="0">
                 <a:solidFill>
-                  <a:srgbClr val="217A45"/>
-                </a:solidFill>
-                <a:latin typeface="Segoe UI"/>
-              </a:rPr>
-              <a:t>Многостраничный кабинет:</a:t>
-            </a:r>
-          </a:p>
-          <a:p>
-            <a:pPr algn="l">
-              <a:spcAft>
-                <a:spcPts val="700"/>
-              </a:spcAft>
-            </a:pPr>
+                  <a:srgbClr val="2E9E5B"/>
+                </a:solidFill>
+                <a:latin typeface="Segoe UI"/>
+              </a:rPr>
+              <a:t>●  Топ-10 товаров — </a:t>
+            </a:r>
             <a:r>
               <a:rPr sz="1500" b="0" i="0">
                 <a:solidFill>
@@ -6685,15 +6319,24 @@
                 </a:solidFill>
                 <a:latin typeface="Segoe UI"/>
               </a:rPr>
-              <a:t>•  Кабинет · Мои покупки · Аналитика</a:t>
-            </a:r>
-          </a:p>
-          <a:p>
-            <a:pPr algn="l">
-              <a:spcAft>
-                <a:spcPts val="700"/>
-              </a:spcAft>
-            </a:pPr>
+              <a:t>любимое клиента + персональный совет</a:t>
+            </a:r>
+          </a:p>
+          <a:p>
+            <a:pPr>
+              <a:spcAft>
+                <a:spcPts val="1100"/>
+              </a:spcAft>
+            </a:pPr>
+            <a:r>
+              <a:rPr sz="1600" b="1" i="0">
+                <a:solidFill>
+                  <a:srgbClr val="2E9E5B"/>
+                </a:solidFill>
+                <a:latin typeface="Segoe UI"/>
+              </a:rPr>
+              <a:t>●  Забытые товары — </a:t>
+            </a:r>
             <a:r>
               <a:rPr sz="1500" b="0" i="0">
                 <a:solidFill>
@@ -6701,15 +6344,24 @@
                 </a:solidFill>
                 <a:latin typeface="Segoe UI"/>
               </a:rPr>
-              <a:t>•  Вход по user_id, единый сценарий</a:t>
-            </a:r>
-          </a:p>
-          <a:p>
-            <a:pPr algn="l">
-              <a:spcAft>
-                <a:spcPts val="700"/>
-              </a:spcAft>
-            </a:pPr>
+              <a:t>напомним о привычном, что выпало из заказов</a:t>
+            </a:r>
+          </a:p>
+          <a:p>
+            <a:pPr>
+              <a:spcAft>
+                <a:spcPts val="1100"/>
+              </a:spcAft>
+            </a:pPr>
+            <a:r>
+              <a:rPr sz="1600" b="1" i="0">
+                <a:solidFill>
+                  <a:srgbClr val="2E9E5B"/>
+                </a:solidFill>
+                <a:latin typeface="Segoe UI"/>
+              </a:rPr>
+              <a:t>●  Ритм покупок — </a:t>
+            </a:r>
             <a:r>
               <a:rPr sz="1500" b="0" i="0">
                 <a:solidFill>
@@ -6717,15 +6369,24 @@
                 </a:solidFill>
                 <a:latin typeface="Segoe UI"/>
               </a:rPr>
-              <a:t>•  Диаграммы Chart.js (столбцы, кольцо)</a:t>
-            </a:r>
-          </a:p>
-          <a:p>
-            <a:pPr algn="l">
-              <a:spcAft>
-                <a:spcPts val="700"/>
-              </a:spcAft>
-            </a:pPr>
+              <a:t>когда клиенту снова пора оформить заказ</a:t>
+            </a:r>
+          </a:p>
+          <a:p>
+            <a:pPr>
+              <a:spcAft>
+                <a:spcPts val="1100"/>
+              </a:spcAft>
+            </a:pPr>
+            <a:r>
+              <a:rPr sz="1600" b="1" i="0">
+                <a:solidFill>
+                  <a:srgbClr val="2E9E5B"/>
+                </a:solidFill>
+                <a:latin typeface="Segoe UI"/>
+              </a:rPr>
+              <a:t>●  Сводка по клиенту — </a:t>
+            </a:r>
             <a:r>
               <a:rPr sz="1500" b="0" i="0">
                 <a:solidFill>
@@ -6733,15 +6394,24 @@
                 </a:solidFill>
                 <a:latin typeface="Segoe UI"/>
               </a:rPr>
-              <a:t>•  Баннер, сгенерированный нейросетью</a:t>
-            </a:r>
-          </a:p>
-          <a:p>
-            <a:pPr algn="l">
-              <a:spcAft>
-                <a:spcPts val="700"/>
-              </a:spcAft>
-            </a:pPr>
+              <a:t>портрет поведения одним экраном</a:t>
+            </a:r>
+          </a:p>
+          <a:p>
+            <a:pPr>
+              <a:spcAft>
+                <a:spcPts val="1100"/>
+              </a:spcAft>
+            </a:pPr>
+            <a:r>
+              <a:rPr sz="1600" b="1" i="0">
+                <a:solidFill>
+                  <a:srgbClr val="2E9E5B"/>
+                </a:solidFill>
+                <a:latin typeface="Segoe UI"/>
+              </a:rPr>
+              <a:t>●  Отделы и категории — </a:t>
+            </a:r>
             <a:r>
               <a:rPr sz="1500" b="0" i="0">
                 <a:solidFill>
@@ -6749,30 +6419,14 @@
                 </a:solidFill>
                 <a:latin typeface="Segoe UI"/>
               </a:rPr>
-              <a:t>•  Индикатор «из кэша» и время ответа</a:t>
-            </a:r>
-          </a:p>
-          <a:p>
-            <a:pPr algn="l">
-              <a:spcAft>
-                <a:spcPts val="700"/>
-              </a:spcAft>
-            </a:pPr>
-            <a:r>
-              <a:rPr sz="1500" b="0" i="0">
-                <a:solidFill>
-                  <a:srgbClr val="1F2430"/>
-                </a:solidFill>
-                <a:latin typeface="Segoe UI"/>
-              </a:rPr>
-              <a:t>•  Единый стиль: палитра, шрифты, карточки</a:t>
+              <a:t>из чего состоит корзина</a:t>
             </a:r>
           </a:p>
         </p:txBody>
       </p:sp>
       <p:pic>
         <p:nvPicPr>
-          <p:cNvPr id="9" name="Picture 8" descr="image5.jpg"/>
+          <p:cNvPr id="6" name="Picture 5" descr="image4.jpg"/>
           <p:cNvPicPr>
             <a:picLocks noChangeAspect="1"/>
           </p:cNvPicPr>
@@ -6786,8 +6440,8 @@
         </p:blipFill>
         <p:spPr>
           <a:xfrm>
-            <a:off x="5394960" y="2192060"/>
-            <a:ext cx="6400800" cy="3205400"/>
+            <a:off x="7001446" y="1417320"/>
+            <a:ext cx="4650867" cy="4754880"/>
           </a:xfrm>
           <a:prstGeom prst="rect">
             <a:avLst/>
@@ -6799,6 +6453,84 @@
           </a:ln>
         </p:spPr>
       </p:pic>
+      <p:sp>
+        <p:nvSpPr>
+          <p:cNvPr id="7" name="TextBox 6"/>
+          <p:cNvSpPr txBox="1"/>
+          <p:nvPr/>
+        </p:nvSpPr>
+        <p:spPr>
+          <a:xfrm>
+            <a:off x="457200" y="6437376"/>
+            <a:ext cx="9144000" cy="365760"/>
+          </a:xfrm>
+          <a:prstGeom prst="rect">
+            <a:avLst/>
+          </a:prstGeom>
+          <a:noFill/>
+        </p:spPr>
+        <p:txBody>
+          <a:bodyPr wrap="square" anchor="t">
+            <a:spAutoFit/>
+          </a:bodyPr>
+          <a:lstStyle/>
+          <a:p>
+            <a:pPr algn="l">
+              <a:spcAft>
+                <a:spcPts val="800"/>
+              </a:spcAft>
+            </a:pPr>
+            <a:r>
+              <a:rPr sz="1000" b="0" i="0">
+                <a:solidFill>
+                  <a:srgbClr val="6B7280"/>
+                </a:solidFill>
+                <a:latin typeface="Segoe UI"/>
+              </a:rPr>
+              <a:t>Instacart Insights · РЭУ им. Г.В. Плеханова · 2026</a:t>
+            </a:r>
+          </a:p>
+        </p:txBody>
+      </p:sp>
+      <p:sp>
+        <p:nvSpPr>
+          <p:cNvPr id="8" name="TextBox 7"/>
+          <p:cNvSpPr txBox="1"/>
+          <p:nvPr/>
+        </p:nvSpPr>
+        <p:spPr>
+          <a:xfrm>
+            <a:off x="11338560" y="6437376"/>
+            <a:ext cx="640080" cy="365760"/>
+          </a:xfrm>
+          <a:prstGeom prst="rect">
+            <a:avLst/>
+          </a:prstGeom>
+          <a:noFill/>
+        </p:spPr>
+        <p:txBody>
+          <a:bodyPr wrap="square" anchor="t">
+            <a:spAutoFit/>
+          </a:bodyPr>
+          <a:lstStyle/>
+          <a:p>
+            <a:pPr algn="r">
+              <a:spcAft>
+                <a:spcPts val="800"/>
+              </a:spcAft>
+            </a:pPr>
+            <a:r>
+              <a:rPr sz="1000" b="0" i="0">
+                <a:solidFill>
+                  <a:srgbClr val="6B7280"/>
+                </a:solidFill>
+                <a:latin typeface="Segoe UI"/>
+              </a:rPr>
+              <a:t>6</a:t>
+            </a:r>
+          </a:p>
+        </p:txBody>
+      </p:sp>
     </p:spTree>
   </p:cSld>
   <p:clrMapOvr>
@@ -6826,7 +6558,7 @@
         <p:spPr>
           <a:xfrm>
             <a:off x="0" y="0"/>
-            <a:ext cx="12191695" cy="1051560"/>
+            <a:ext cx="12191695" cy="1143000"/>
           </a:xfrm>
           <a:prstGeom prst="rect">
             <a:avLst/>
@@ -6869,7 +6601,7 @@
         </p:nvSpPr>
         <p:spPr>
           <a:xfrm>
-            <a:off x="0" y="1051560"/>
+            <a:off x="0" y="1143000"/>
             <a:ext cx="12191695" cy="54864"/>
           </a:xfrm>
           <a:prstGeom prst="rect">
@@ -6913,8 +6645,8 @@
         </p:nvSpPr>
         <p:spPr>
           <a:xfrm>
-            <a:off x="548640" y="109728"/>
-            <a:ext cx="10972800" cy="868680"/>
+            <a:off x="548640" y="128016"/>
+            <a:ext cx="11155680" cy="960120"/>
           </a:xfrm>
           <a:prstGeom prst="rect">
             <a:avLst/>
@@ -6929,141 +6661,40 @@
           <a:p>
             <a:pPr algn="l">
               <a:spcAft>
-                <a:spcPts val="800"/>
-              </a:spcAft>
-            </a:pPr>
-            <a:r>
-              <a:rPr sz="2600" b="1" i="0">
+                <a:spcPts val="200"/>
+              </a:spcAft>
+            </a:pPr>
+            <a:r>
+              <a:rPr sz="1200" b="1" i="0">
+                <a:solidFill>
+                  <a:srgbClr val="E6F4EC"/>
+                </a:solidFill>
+                <a:latin typeface="Segoe UI"/>
+              </a:rPr>
+              <a:t>КАК РАБОТАЕТ · 2</a:t>
+            </a:r>
+          </a:p>
+          <a:p>
+            <a:pPr algn="l">
+              <a:spcAft>
+                <a:spcPts val="0"/>
+              </a:spcAft>
+            </a:pPr>
+            <a:r>
+              <a:rPr sz="2700" b="1" i="0">
                 <a:solidFill>
                   <a:srgbClr val="FFFFFF"/>
                 </a:solidFill>
                 <a:latin typeface="Segoe UI"/>
               </a:rPr>
-              <a:t>Результат сервиса: числа + визуализация</a:t>
-            </a:r>
-          </a:p>
-        </p:txBody>
-      </p:sp>
-      <p:sp>
-        <p:nvSpPr>
-          <p:cNvPr id="5" name="TextBox 4"/>
-          <p:cNvSpPr txBox="1"/>
-          <p:nvPr/>
-        </p:nvSpPr>
-        <p:spPr>
-          <a:xfrm>
-            <a:off x="457200" y="6419088"/>
-            <a:ext cx="8229600" cy="365760"/>
-          </a:xfrm>
-          <a:prstGeom prst="rect">
-            <a:avLst/>
-          </a:prstGeom>
-          <a:noFill/>
-        </p:spPr>
-        <p:txBody>
-          <a:bodyPr wrap="square" anchor="t">
-            <a:spAutoFit/>
-          </a:bodyPr>
-          <a:lstStyle/>
-          <a:p>
-            <a:pPr algn="l">
-              <a:spcAft>
-                <a:spcPts val="800"/>
-              </a:spcAft>
-            </a:pPr>
-            <a:r>
-              <a:rPr sz="1000" b="0" i="0">
-                <a:solidFill>
-                  <a:srgbClr val="6B7280"/>
-                </a:solidFill>
-                <a:latin typeface="Segoe UI"/>
-              </a:rPr>
-              <a:t>Учебная (ознакомительная) практика · РЭУ им. Г.В. Плеханова · 2026</a:t>
-            </a:r>
-          </a:p>
-        </p:txBody>
-      </p:sp>
-      <p:sp>
-        <p:nvSpPr>
-          <p:cNvPr id="6" name="TextBox 5"/>
-          <p:cNvSpPr txBox="1"/>
-          <p:nvPr/>
-        </p:nvSpPr>
-        <p:spPr>
-          <a:xfrm>
-            <a:off x="11247120" y="6419088"/>
-            <a:ext cx="731520" cy="365760"/>
-          </a:xfrm>
-          <a:prstGeom prst="rect">
-            <a:avLst/>
-          </a:prstGeom>
-          <a:noFill/>
-        </p:spPr>
-        <p:txBody>
-          <a:bodyPr wrap="square" anchor="t">
-            <a:spAutoFit/>
-          </a:bodyPr>
-          <a:lstStyle/>
-          <a:p>
-            <a:pPr algn="r">
-              <a:spcAft>
-                <a:spcPts val="800"/>
-              </a:spcAft>
-            </a:pPr>
-            <a:r>
-              <a:rPr sz="1000" b="0" i="0">
-                <a:solidFill>
-                  <a:srgbClr val="6B7280"/>
-                </a:solidFill>
-                <a:latin typeface="Segoe UI"/>
-              </a:rPr>
-              <a:t>7</a:t>
-            </a:r>
-          </a:p>
-        </p:txBody>
-      </p:sp>
-      <p:sp>
-        <p:nvSpPr>
-          <p:cNvPr id="7" name="TextBox 6"/>
-          <p:cNvSpPr txBox="1"/>
-          <p:nvPr/>
-        </p:nvSpPr>
-        <p:spPr>
-          <a:xfrm>
-            <a:off x="640080" y="1234440"/>
-            <a:ext cx="10972800" cy="731520"/>
-          </a:xfrm>
-          <a:prstGeom prst="rect">
-            <a:avLst/>
-          </a:prstGeom>
-          <a:noFill/>
-        </p:spPr>
-        <p:txBody>
-          <a:bodyPr wrap="square" anchor="t">
-            <a:spAutoFit/>
-          </a:bodyPr>
-          <a:lstStyle/>
-          <a:p>
-            <a:pPr algn="l">
-              <a:spcAft>
-                <a:spcPts val="800"/>
-              </a:spcAft>
-            </a:pPr>
-            <a:r>
-              <a:rPr sz="1600" b="0" i="0">
-                <a:solidFill>
-                  <a:srgbClr val="1F2430"/>
-                </a:solidFill>
-                <a:latin typeface="Segoe UI"/>
-              </a:rPr>
-              <a:t>Клиент видит таблицу, диаграмму и текстовую интерпретацию на одном экране.</a:t>
+              <a:t>Один экран — вся аналитика</a:t>
             </a:r>
           </a:p>
         </p:txBody>
       </p:sp>
       <p:pic>
         <p:nvPicPr>
-          <p:cNvPr id="8" name="Picture 7" descr="image6.jpg"/>
+          <p:cNvPr id="5" name="Picture 4" descr="image5.jpg"/>
           <p:cNvPicPr>
             <a:picLocks noChangeAspect="1"/>
           </p:cNvPicPr>
@@ -7077,8 +6708,8 @@
         </p:blipFill>
         <p:spPr>
           <a:xfrm>
-            <a:off x="2194560" y="2065437"/>
-            <a:ext cx="7772400" cy="4098726"/>
+            <a:off x="2063677" y="1417320"/>
+            <a:ext cx="8034166" cy="4023360"/>
           </a:xfrm>
           <a:prstGeom prst="rect">
             <a:avLst/>
@@ -7090,6 +6721,123 @@
           </a:ln>
         </p:spPr>
       </p:pic>
+      <p:sp>
+        <p:nvSpPr>
+          <p:cNvPr id="6" name="TextBox 5"/>
+          <p:cNvSpPr txBox="1"/>
+          <p:nvPr/>
+        </p:nvSpPr>
+        <p:spPr>
+          <a:xfrm>
+            <a:off x="640080" y="5623560"/>
+            <a:ext cx="10972800" cy="822960"/>
+          </a:xfrm>
+          <a:prstGeom prst="rect">
+            <a:avLst/>
+          </a:prstGeom>
+          <a:noFill/>
+        </p:spPr>
+        <p:txBody>
+          <a:bodyPr wrap="square" anchor="t">
+            <a:spAutoFit/>
+          </a:bodyPr>
+          <a:lstStyle/>
+          <a:p>
+            <a:pPr algn="ctr">
+              <a:spcAft>
+                <a:spcPts val="800"/>
+              </a:spcAft>
+            </a:pPr>
+            <a:r>
+              <a:rPr sz="1600" b="0" i="0">
+                <a:solidFill>
+                  <a:srgbClr val="1F2430"/>
+                </a:solidFill>
+                <a:latin typeface="Segoe UI"/>
+              </a:rPr>
+              <a:t>Вход по user_id · навигация по разделам · диаграммы Chart.js · всё в едином стиле.</a:t>
+            </a:r>
+          </a:p>
+        </p:txBody>
+      </p:sp>
+      <p:sp>
+        <p:nvSpPr>
+          <p:cNvPr id="7" name="TextBox 6"/>
+          <p:cNvSpPr txBox="1"/>
+          <p:nvPr/>
+        </p:nvSpPr>
+        <p:spPr>
+          <a:xfrm>
+            <a:off x="457200" y="6437376"/>
+            <a:ext cx="9144000" cy="365760"/>
+          </a:xfrm>
+          <a:prstGeom prst="rect">
+            <a:avLst/>
+          </a:prstGeom>
+          <a:noFill/>
+        </p:spPr>
+        <p:txBody>
+          <a:bodyPr wrap="square" anchor="t">
+            <a:spAutoFit/>
+          </a:bodyPr>
+          <a:lstStyle/>
+          <a:p>
+            <a:pPr algn="l">
+              <a:spcAft>
+                <a:spcPts val="800"/>
+              </a:spcAft>
+            </a:pPr>
+            <a:r>
+              <a:rPr sz="1000" b="0" i="0">
+                <a:solidFill>
+                  <a:srgbClr val="6B7280"/>
+                </a:solidFill>
+                <a:latin typeface="Segoe UI"/>
+              </a:rPr>
+              <a:t>Instacart Insights · РЭУ им. Г.В. Плеханова · 2026</a:t>
+            </a:r>
+          </a:p>
+        </p:txBody>
+      </p:sp>
+      <p:sp>
+        <p:nvSpPr>
+          <p:cNvPr id="8" name="TextBox 7"/>
+          <p:cNvSpPr txBox="1"/>
+          <p:nvPr/>
+        </p:nvSpPr>
+        <p:spPr>
+          <a:xfrm>
+            <a:off x="11338560" y="6437376"/>
+            <a:ext cx="640080" cy="365760"/>
+          </a:xfrm>
+          <a:prstGeom prst="rect">
+            <a:avLst/>
+          </a:prstGeom>
+          <a:noFill/>
+        </p:spPr>
+        <p:txBody>
+          <a:bodyPr wrap="square" anchor="t">
+            <a:spAutoFit/>
+          </a:bodyPr>
+          <a:lstStyle/>
+          <a:p>
+            <a:pPr algn="r">
+              <a:spcAft>
+                <a:spcPts val="800"/>
+              </a:spcAft>
+            </a:pPr>
+            <a:r>
+              <a:rPr sz="1000" b="0" i="0">
+                <a:solidFill>
+                  <a:srgbClr val="6B7280"/>
+                </a:solidFill>
+                <a:latin typeface="Segoe UI"/>
+              </a:rPr>
+              <a:t>7</a:t>
+            </a:r>
+          </a:p>
+        </p:txBody>
+      </p:sp>
     </p:spTree>
   </p:cSld>
   <p:clrMapOvr>
@@ -7117,7 +6865,7 @@
         <p:spPr>
           <a:xfrm>
             <a:off x="0" y="0"/>
-            <a:ext cx="12191695" cy="1051560"/>
+            <a:ext cx="12191695" cy="1143000"/>
           </a:xfrm>
           <a:prstGeom prst="rect">
             <a:avLst/>
@@ -7160,7 +6908,7 @@
         </p:nvSpPr>
         <p:spPr>
           <a:xfrm>
-            <a:off x="0" y="1051560"/>
+            <a:off x="0" y="1143000"/>
             <a:ext cx="12191695" cy="54864"/>
           </a:xfrm>
           <a:prstGeom prst="rect">
@@ -7204,8 +6952,8 @@
         </p:nvSpPr>
         <p:spPr>
           <a:xfrm>
-            <a:off x="548640" y="109728"/>
-            <a:ext cx="10972800" cy="868680"/>
+            <a:off x="548640" y="128016"/>
+            <a:ext cx="11155680" cy="960120"/>
           </a:xfrm>
           <a:prstGeom prst="rect">
             <a:avLst/>
@@ -7220,244 +6968,40 @@
           <a:p>
             <a:pPr algn="l">
               <a:spcAft>
-                <a:spcPts val="800"/>
-              </a:spcAft>
-            </a:pPr>
-            <a:r>
-              <a:rPr sz="2600" b="1" i="0">
+                <a:spcPts val="200"/>
+              </a:spcAft>
+            </a:pPr>
+            <a:r>
+              <a:rPr sz="1200" b="1" i="0">
+                <a:solidFill>
+                  <a:srgbClr val="E6F4EC"/>
+                </a:solidFill>
+                <a:latin typeface="Segoe UI"/>
+              </a:rPr>
+              <a:t>КАК РАБОТАЕТ · 3</a:t>
+            </a:r>
+          </a:p>
+          <a:p>
+            <a:pPr algn="l">
+              <a:spcAft>
+                <a:spcPts val="0"/>
+              </a:spcAft>
+            </a:pPr>
+            <a:r>
+              <a:rPr sz="2700" b="1" i="0">
                 <a:solidFill>
                   <a:srgbClr val="FFFFFF"/>
                 </a:solidFill>
                 <a:latin typeface="Segoe UI"/>
               </a:rPr>
-              <a:t>Языковая модель и логика рекомендаций</a:t>
-            </a:r>
-          </a:p>
-        </p:txBody>
-      </p:sp>
-      <p:sp>
-        <p:nvSpPr>
-          <p:cNvPr id="5" name="TextBox 4"/>
-          <p:cNvSpPr txBox="1"/>
-          <p:nvPr/>
-        </p:nvSpPr>
-        <p:spPr>
-          <a:xfrm>
-            <a:off x="9692640" y="109728"/>
-            <a:ext cx="2194560" cy="868680"/>
-          </a:xfrm>
-          <a:prstGeom prst="rect">
-            <a:avLst/>
-          </a:prstGeom>
-          <a:noFill/>
-        </p:spPr>
-        <p:txBody>
-          <a:bodyPr wrap="square" anchor="ctr">
-            <a:spAutoFit/>
-          </a:bodyPr>
-          <a:lstStyle/>
-          <a:p>
-            <a:pPr algn="r">
-              <a:spcAft>
-                <a:spcPts val="800"/>
-              </a:spcAft>
-            </a:pPr>
-            <a:r>
-              <a:rPr sz="1200" b="1" i="0">
-                <a:solidFill>
-                  <a:srgbClr val="E6F4EC"/>
-                </a:solidFill>
-                <a:latin typeface="Segoe UI"/>
-              </a:rPr>
-              <a:t>показать работу LLM</a:t>
-            </a:r>
-          </a:p>
-        </p:txBody>
-      </p:sp>
-      <p:sp>
-        <p:nvSpPr>
-          <p:cNvPr id="6" name="TextBox 5"/>
-          <p:cNvSpPr txBox="1"/>
-          <p:nvPr/>
-        </p:nvSpPr>
-        <p:spPr>
-          <a:xfrm>
-            <a:off x="457200" y="6419088"/>
-            <a:ext cx="8229600" cy="365760"/>
-          </a:xfrm>
-          <a:prstGeom prst="rect">
-            <a:avLst/>
-          </a:prstGeom>
-          <a:noFill/>
-        </p:spPr>
-        <p:txBody>
-          <a:bodyPr wrap="square" anchor="t">
-            <a:spAutoFit/>
-          </a:bodyPr>
-          <a:lstStyle/>
-          <a:p>
-            <a:pPr algn="l">
-              <a:spcAft>
-                <a:spcPts val="800"/>
-              </a:spcAft>
-            </a:pPr>
-            <a:r>
-              <a:rPr sz="1000" b="0" i="0">
-                <a:solidFill>
-                  <a:srgbClr val="6B7280"/>
-                </a:solidFill>
-                <a:latin typeface="Segoe UI"/>
-              </a:rPr>
-              <a:t>Учебная (ознакомительная) практика · РЭУ им. Г.В. Плеханова · 2026</a:t>
-            </a:r>
-          </a:p>
-        </p:txBody>
-      </p:sp>
-      <p:sp>
-        <p:nvSpPr>
-          <p:cNvPr id="7" name="TextBox 6"/>
-          <p:cNvSpPr txBox="1"/>
-          <p:nvPr/>
-        </p:nvSpPr>
-        <p:spPr>
-          <a:xfrm>
-            <a:off x="11247120" y="6419088"/>
-            <a:ext cx="731520" cy="365760"/>
-          </a:xfrm>
-          <a:prstGeom prst="rect">
-            <a:avLst/>
-          </a:prstGeom>
-          <a:noFill/>
-        </p:spPr>
-        <p:txBody>
-          <a:bodyPr wrap="square" anchor="t">
-            <a:spAutoFit/>
-          </a:bodyPr>
-          <a:lstStyle/>
-          <a:p>
-            <a:pPr algn="r">
-              <a:spcAft>
-                <a:spcPts val="800"/>
-              </a:spcAft>
-            </a:pPr>
-            <a:r>
-              <a:rPr sz="1000" b="0" i="0">
-                <a:solidFill>
-                  <a:srgbClr val="6B7280"/>
-                </a:solidFill>
-                <a:latin typeface="Segoe UI"/>
-              </a:rPr>
-              <a:t>8</a:t>
-            </a:r>
-          </a:p>
-        </p:txBody>
-      </p:sp>
-      <p:sp>
-        <p:nvSpPr>
-          <p:cNvPr id="8" name="TextBox 7"/>
-          <p:cNvSpPr txBox="1"/>
-          <p:nvPr/>
-        </p:nvSpPr>
-        <p:spPr>
-          <a:xfrm>
-            <a:off x="640080" y="1325880"/>
-            <a:ext cx="5120640" cy="4937760"/>
-          </a:xfrm>
-          <a:prstGeom prst="rect">
-            <a:avLst/>
-          </a:prstGeom>
-          <a:noFill/>
-        </p:spPr>
-        <p:txBody>
-          <a:bodyPr wrap="square" anchor="t">
-            <a:spAutoFit/>
-          </a:bodyPr>
-          <a:lstStyle/>
-          <a:p>
-            <a:pPr algn="l">
-              <a:spcAft>
-                <a:spcPts val="900"/>
-              </a:spcAft>
-            </a:pPr>
-            <a:r>
-              <a:rPr sz="1500" b="0" i="0">
-                <a:solidFill>
-                  <a:srgbClr val="1F2430"/>
-                </a:solidFill>
-                <a:latin typeface="Segoe UI"/>
-              </a:rPr>
-              <a:t>•  Mistral large через библиотеку LangChain</a:t>
-            </a:r>
-          </a:p>
-          <a:p>
-            <a:pPr algn="l">
-              <a:spcAft>
-                <a:spcPts val="900"/>
-              </a:spcAft>
-            </a:pPr>
-            <a:r>
-              <a:rPr sz="1500" b="0" i="0">
-                <a:solidFill>
-                  <a:srgbClr val="1F2430"/>
-                </a:solidFill>
-                <a:latin typeface="Segoe UI"/>
-              </a:rPr>
-              <a:t>•  Низкая «температура» (0.3) — стабильные ответы</a:t>
-            </a:r>
-          </a:p>
-          <a:p>
-            <a:pPr algn="l">
-              <a:spcAft>
-                <a:spcPts val="900"/>
-              </a:spcAft>
-            </a:pPr>
-            <a:r>
-              <a:rPr sz="1500" b="0" i="0">
-                <a:solidFill>
-                  <a:srgbClr val="1F2430"/>
-                </a:solidFill>
-                <a:latin typeface="Segoe UI"/>
-              </a:rPr>
-              <a:t>•  Свой промпт под каждый сервис, обращение к клиенту на «вы»</a:t>
-            </a:r>
-          </a:p>
-          <a:p>
-            <a:pPr algn="l">
-              <a:spcAft>
-                <a:spcPts val="900"/>
-              </a:spcAft>
-            </a:pPr>
-            <a:r>
-              <a:rPr sz="1500" b="0" i="0">
-                <a:solidFill>
-                  <a:srgbClr val="1F2430"/>
-                </a:solidFill>
-                <a:latin typeface="Segoe UI"/>
-              </a:rPr>
-              <a:t>•  Метрики Loginom → человекочитаемый текст</a:t>
-            </a:r>
-          </a:p>
-          <a:p>
-            <a:pPr algn="l">
-              <a:spcAft>
-                <a:spcPts val="900"/>
-              </a:spcAft>
-            </a:pPr>
-            <a:r>
-              <a:rPr sz="1500" b="0" i="0">
-                <a:solidFill>
-                  <a:srgbClr val="1F2430"/>
-                </a:solidFill>
-                <a:latin typeface="Segoe UI"/>
-              </a:rPr>
-              <a:t>•  Пустой результат не отправляется в модель — экономия токенов</a:t>
+              <a:t>Числа, график и совет — вместе</a:t>
             </a:r>
           </a:p>
         </p:txBody>
       </p:sp>
       <p:pic>
         <p:nvPicPr>
-          <p:cNvPr id="9" name="Picture 8" descr="image7.jpg"/>
+          <p:cNvPr id="5" name="Picture 4" descr="image6.jpg"/>
           <p:cNvPicPr>
             <a:picLocks noChangeAspect="1"/>
           </p:cNvPicPr>
@@ -7471,8 +7015,8 @@
         </p:blipFill>
         <p:spPr>
           <a:xfrm>
-            <a:off x="5943600" y="2336292"/>
-            <a:ext cx="5852160" cy="2916936"/>
+            <a:off x="2377440" y="1750397"/>
+            <a:ext cx="7406640" cy="3905845"/>
           </a:xfrm>
           <a:prstGeom prst="rect">
             <a:avLst/>
@@ -7484,6 +7028,84 @@
           </a:ln>
         </p:spPr>
       </p:pic>
+      <p:sp>
+        <p:nvSpPr>
+          <p:cNvPr id="6" name="TextBox 5"/>
+          <p:cNvSpPr txBox="1"/>
+          <p:nvPr/>
+        </p:nvSpPr>
+        <p:spPr>
+          <a:xfrm>
+            <a:off x="457200" y="6437376"/>
+            <a:ext cx="9144000" cy="365760"/>
+          </a:xfrm>
+          <a:prstGeom prst="rect">
+            <a:avLst/>
+          </a:prstGeom>
+          <a:noFill/>
+        </p:spPr>
+        <p:txBody>
+          <a:bodyPr wrap="square" anchor="t">
+            <a:spAutoFit/>
+          </a:bodyPr>
+          <a:lstStyle/>
+          <a:p>
+            <a:pPr algn="l">
+              <a:spcAft>
+                <a:spcPts val="800"/>
+              </a:spcAft>
+            </a:pPr>
+            <a:r>
+              <a:rPr sz="1000" b="0" i="0">
+                <a:solidFill>
+                  <a:srgbClr val="6B7280"/>
+                </a:solidFill>
+                <a:latin typeface="Segoe UI"/>
+              </a:rPr>
+              <a:t>Instacart Insights · РЭУ им. Г.В. Плеханова · 2026</a:t>
+            </a:r>
+          </a:p>
+        </p:txBody>
+      </p:sp>
+      <p:sp>
+        <p:nvSpPr>
+          <p:cNvPr id="7" name="TextBox 6"/>
+          <p:cNvSpPr txBox="1"/>
+          <p:nvPr/>
+        </p:nvSpPr>
+        <p:spPr>
+          <a:xfrm>
+            <a:off x="11338560" y="6437376"/>
+            <a:ext cx="640080" cy="365760"/>
+          </a:xfrm>
+          <a:prstGeom prst="rect">
+            <a:avLst/>
+          </a:prstGeom>
+          <a:noFill/>
+        </p:spPr>
+        <p:txBody>
+          <a:bodyPr wrap="square" anchor="t">
+            <a:spAutoFit/>
+          </a:bodyPr>
+          <a:lstStyle/>
+          <a:p>
+            <a:pPr algn="r">
+              <a:spcAft>
+                <a:spcPts val="800"/>
+              </a:spcAft>
+            </a:pPr>
+            <a:r>
+              <a:rPr sz="1000" b="0" i="0">
+                <a:solidFill>
+                  <a:srgbClr val="6B7280"/>
+                </a:solidFill>
+                <a:latin typeface="Segoe UI"/>
+              </a:rPr>
+              <a:t>8</a:t>
+            </a:r>
+          </a:p>
+        </p:txBody>
+      </p:sp>
     </p:spTree>
   </p:cSld>
   <p:clrMapOvr>
@@ -7511,7 +7133,7 @@
         <p:spPr>
           <a:xfrm>
             <a:off x="0" y="0"/>
-            <a:ext cx="12191695" cy="1051560"/>
+            <a:ext cx="12191695" cy="1143000"/>
           </a:xfrm>
           <a:prstGeom prst="rect">
             <a:avLst/>
@@ -7554,7 +7176,7 @@
         </p:nvSpPr>
         <p:spPr>
           <a:xfrm>
-            <a:off x="0" y="1051560"/>
+            <a:off x="0" y="1143000"/>
             <a:ext cx="12191695" cy="54864"/>
           </a:xfrm>
           <a:prstGeom prst="rect">
@@ -7598,8 +7220,8 @@
         </p:nvSpPr>
         <p:spPr>
           <a:xfrm>
-            <a:off x="548640" y="109728"/>
-            <a:ext cx="10972800" cy="868680"/>
+            <a:off x="548640" y="128016"/>
+            <a:ext cx="11155680" cy="960120"/>
           </a:xfrm>
           <a:prstGeom prst="rect">
             <a:avLst/>
@@ -7614,243 +7236,84 @@
           <a:p>
             <a:pPr algn="l">
               <a:spcAft>
-                <a:spcPts val="800"/>
-              </a:spcAft>
-            </a:pPr>
-            <a:r>
-              <a:rPr sz="2600" b="1" i="0">
+                <a:spcPts val="200"/>
+              </a:spcAft>
+            </a:pPr>
+            <a:r>
+              <a:rPr sz="1200" b="1" i="0">
+                <a:solidFill>
+                  <a:srgbClr val="E6F4EC"/>
+                </a:solidFill>
+                <a:latin typeface="Segoe UI"/>
+              </a:rPr>
+              <a:t>КАК РАБОТАЕТ · 4</a:t>
+            </a:r>
+          </a:p>
+          <a:p>
+            <a:pPr algn="l">
+              <a:spcAft>
+                <a:spcPts val="0"/>
+              </a:spcAft>
+            </a:pPr>
+            <a:r>
+              <a:rPr sz="2700" b="1" i="0">
                 <a:solidFill>
                   <a:srgbClr val="FFFFFF"/>
                 </a:solidFill>
                 <a:latin typeface="Segoe UI"/>
               </a:rPr>
-              <a:t>Кэширование ответов модели</a:t>
-            </a:r>
-          </a:p>
-        </p:txBody>
-      </p:sp>
-      <p:sp>
-        <p:nvSpPr>
-          <p:cNvPr id="5" name="TextBox 4"/>
-          <p:cNvSpPr txBox="1"/>
-          <p:nvPr/>
-        </p:nvSpPr>
-        <p:spPr>
-          <a:xfrm>
-            <a:off x="9692640" y="109728"/>
-            <a:ext cx="2194560" cy="868680"/>
+              <a:t>ИИ объясняет данные человеческим языком</a:t>
+            </a:r>
+          </a:p>
+        </p:txBody>
+      </p:sp>
+      <p:pic>
+        <p:nvPicPr>
+          <p:cNvPr id="5" name="Picture 4" descr="image7.jpg"/>
+          <p:cNvPicPr>
+            <a:picLocks noChangeAspect="1"/>
+          </p:cNvPicPr>
+          <p:nvPr/>
+        </p:nvPicPr>
+        <p:blipFill>
+          <a:blip r:embed="rId2"/>
+          <a:stretch>
+            <a:fillRect/>
+          </a:stretch>
+        </p:blipFill>
+        <p:spPr>
+          <a:xfrm>
+            <a:off x="640080" y="2153841"/>
+            <a:ext cx="6400800" cy="3190398"/>
           </a:xfrm>
           <a:prstGeom prst="rect">
             <a:avLst/>
           </a:prstGeom>
-          <a:noFill/>
-        </p:spPr>
-        <p:txBody>
-          <a:bodyPr wrap="square" anchor="ctr">
-            <a:spAutoFit/>
-          </a:bodyPr>
-          <a:lstStyle/>
-          <a:p>
-            <a:pPr algn="r">
-              <a:spcAft>
-                <a:spcPts val="800"/>
-              </a:spcAft>
-            </a:pPr>
-            <a:r>
-              <a:rPr sz="1200" b="1" i="0">
-                <a:solidFill>
-                  <a:srgbClr val="E6F4EC"/>
-                </a:solidFill>
-                <a:latin typeface="Segoe UI"/>
-              </a:rPr>
-              <a:t>показать работу кэша</a:t>
-            </a:r>
-          </a:p>
-        </p:txBody>
-      </p:sp>
-      <p:sp>
-        <p:nvSpPr>
-          <p:cNvPr id="6" name="TextBox 5"/>
-          <p:cNvSpPr txBox="1"/>
-          <p:nvPr/>
-        </p:nvSpPr>
-        <p:spPr>
-          <a:xfrm>
-            <a:off x="457200" y="6419088"/>
-            <a:ext cx="8229600" cy="365760"/>
-          </a:xfrm>
-          <a:prstGeom prst="rect">
-            <a:avLst/>
-          </a:prstGeom>
-          <a:noFill/>
-        </p:spPr>
-        <p:txBody>
-          <a:bodyPr wrap="square" anchor="t">
-            <a:spAutoFit/>
-          </a:bodyPr>
-          <a:lstStyle/>
-          <a:p>
-            <a:pPr algn="l">
-              <a:spcAft>
-                <a:spcPts val="800"/>
-              </a:spcAft>
-            </a:pPr>
-            <a:r>
-              <a:rPr sz="1000" b="0" i="0">
-                <a:solidFill>
-                  <a:srgbClr val="6B7280"/>
-                </a:solidFill>
-                <a:latin typeface="Segoe UI"/>
-              </a:rPr>
-              <a:t>Учебная (ознакомительная) практика · РЭУ им. Г.В. Плеханова · 2026</a:t>
-            </a:r>
-          </a:p>
-        </p:txBody>
-      </p:sp>
-      <p:sp>
-        <p:nvSpPr>
-          <p:cNvPr id="7" name="TextBox 6"/>
-          <p:cNvSpPr txBox="1"/>
-          <p:nvPr/>
-        </p:nvSpPr>
-        <p:spPr>
-          <a:xfrm>
-            <a:off x="11247120" y="6419088"/>
-            <a:ext cx="731520" cy="365760"/>
-          </a:xfrm>
-          <a:prstGeom prst="rect">
-            <a:avLst/>
-          </a:prstGeom>
-          <a:noFill/>
-        </p:spPr>
-        <p:txBody>
-          <a:bodyPr wrap="square" anchor="t">
-            <a:spAutoFit/>
-          </a:bodyPr>
-          <a:lstStyle/>
-          <a:p>
-            <a:pPr algn="r">
-              <a:spcAft>
-                <a:spcPts val="800"/>
-              </a:spcAft>
-            </a:pPr>
-            <a:r>
-              <a:rPr sz="1000" b="0" i="0">
-                <a:solidFill>
-                  <a:srgbClr val="6B7280"/>
-                </a:solidFill>
-                <a:latin typeface="Segoe UI"/>
-              </a:rPr>
-              <a:t>9</a:t>
-            </a:r>
-          </a:p>
-        </p:txBody>
-      </p:sp>
-      <p:sp>
-        <p:nvSpPr>
-          <p:cNvPr id="8" name="TextBox 7"/>
-          <p:cNvSpPr txBox="1"/>
-          <p:nvPr/>
-        </p:nvSpPr>
-        <p:spPr>
-          <a:xfrm>
-            <a:off x="640080" y="1371600"/>
-            <a:ext cx="6492240" cy="4846320"/>
-          </a:xfrm>
-          <a:prstGeom prst="rect">
-            <a:avLst/>
-          </a:prstGeom>
-          <a:noFill/>
-        </p:spPr>
-        <p:txBody>
-          <a:bodyPr wrap="square" anchor="t">
-            <a:spAutoFit/>
-          </a:bodyPr>
-          <a:lstStyle/>
-          <a:p>
-            <a:pPr algn="l">
-              <a:spcAft>
-                <a:spcPts val="1000"/>
-              </a:spcAft>
-            </a:pPr>
-            <a:r>
-              <a:rPr sz="1600" b="0" i="0">
-                <a:solidFill>
-                  <a:srgbClr val="1F2430"/>
-                </a:solidFill>
-                <a:latin typeface="Segoe UI"/>
-              </a:rPr>
-              <a:t>•  Ключ кэша — SHA-256 от (сервис + user_id + данные)</a:t>
-            </a:r>
-          </a:p>
-          <a:p>
-            <a:pPr algn="l">
-              <a:spcAft>
-                <a:spcPts val="1000"/>
-              </a:spcAft>
-            </a:pPr>
-            <a:r>
-              <a:rPr sz="1600" b="0" i="0">
-                <a:solidFill>
-                  <a:srgbClr val="1F2430"/>
-                </a:solidFill>
-                <a:latin typeface="Segoe UI"/>
-              </a:rPr>
-              <a:t>•  Хранение на диске: переживает перезагрузку модуля бизнес-логики</a:t>
-            </a:r>
-          </a:p>
-          <a:p>
-            <a:pPr algn="l">
-              <a:spcAft>
-                <a:spcPts val="1000"/>
-              </a:spcAft>
-            </a:pPr>
-            <a:r>
-              <a:rPr sz="1600" b="0" i="0">
-                <a:solidFill>
-                  <a:srgbClr val="1F2430"/>
-                </a:solidFill>
-                <a:latin typeface="Segoe UI"/>
-              </a:rPr>
-              <a:t>•  Повторный запрос берётся из кэша, не обращаясь к модели</a:t>
-            </a:r>
-          </a:p>
-          <a:p>
-            <a:pPr algn="l">
-              <a:spcAft>
-                <a:spcPts val="1000"/>
-              </a:spcAft>
-            </a:pPr>
-            <a:r>
-              <a:rPr sz="1600" b="0" i="0">
-                <a:solidFill>
-                  <a:srgbClr val="1F2430"/>
-                </a:solidFill>
-                <a:latin typeface="Segoe UI"/>
-              </a:rPr>
-              <a:t>•  В интерфейсе — бейдж «из кэша» / «новый запрос» и время ответа</a:t>
-            </a:r>
-          </a:p>
-        </p:txBody>
-      </p:sp>
-      <p:sp>
-        <p:nvSpPr>
-          <p:cNvPr id="9" name="Rectangle 8"/>
+          <a:ln w="12700">
+            <a:solidFill>
+              <a:srgbClr val="D0D5DD"/>
+            </a:solidFill>
+          </a:ln>
+        </p:spPr>
+      </p:pic>
+      <p:sp>
+        <p:nvSpPr>
+          <p:cNvPr id="6" name="Rounded Rectangle 5"/>
           <p:cNvSpPr/>
           <p:nvPr/>
         </p:nvSpPr>
         <p:spPr>
           <a:xfrm>
-            <a:off x="7406640" y="1737360"/>
+            <a:off x="7406640" y="1691640"/>
             <a:ext cx="4206240" cy="1234440"/>
           </a:xfrm>
-          <a:prstGeom prst="rect">
+          <a:prstGeom prst="roundRect">
             <a:avLst/>
           </a:prstGeom>
           <a:solidFill>
             <a:srgbClr val="E6F4EC"/>
           </a:solidFill>
-          <a:ln>
+          <a:ln w="12700">
             <a:solidFill>
               <a:srgbClr val="2E9E5B"/>
             </a:solidFill>
@@ -7881,13 +7344,13 @@
               </a:spcAft>
             </a:pPr>
             <a:r>
-              <a:rPr sz="3000" b="1" i="0">
-                <a:solidFill>
-                  <a:srgbClr val="217A45"/>
-                </a:solidFill>
-                <a:latin typeface="Segoe UI"/>
-              </a:rPr>
-              <a:t>~4,3 с</a:t>
+              <a:rPr sz="2800" b="1" i="0">
+                <a:solidFill>
+                  <a:srgbClr val="2E9E5B"/>
+                </a:solidFill>
+                <a:latin typeface="Segoe UI"/>
+              </a:rPr>
+              <a:t>×300</a:t>
             </a:r>
           </a:p>
           <a:p>
@@ -7903,29 +7366,29 @@
                 </a:solidFill>
                 <a:latin typeface="Segoe UI"/>
               </a:rPr>
-              <a:t>первый запрос</a:t>
-            </a:r>
-          </a:p>
-        </p:txBody>
-      </p:sp>
-      <p:sp>
-        <p:nvSpPr>
-          <p:cNvPr id="10" name="Rectangle 9"/>
+              <a:t>быстрее по кэшу</a:t>
+            </a:r>
+          </a:p>
+        </p:txBody>
+      </p:sp>
+      <p:sp>
+        <p:nvSpPr>
+          <p:cNvPr id="7" name="Rounded Rectangle 6"/>
           <p:cNvSpPr/>
           <p:nvPr/>
         </p:nvSpPr>
         <p:spPr>
           <a:xfrm>
-            <a:off x="7406640" y="3227832"/>
+            <a:off x="7406640" y="3163824"/>
             <a:ext cx="4206240" cy="1234440"/>
           </a:xfrm>
-          <a:prstGeom prst="rect">
+          <a:prstGeom prst="roundRect">
             <a:avLst/>
           </a:prstGeom>
           <a:solidFill>
             <a:srgbClr val="E6F4EC"/>
           </a:solidFill>
-          <a:ln>
+          <a:ln w="12700">
             <a:solidFill>
               <a:srgbClr val="2E9E5B"/>
             </a:solidFill>
@@ -7956,9 +7419,9 @@
               </a:spcAft>
             </a:pPr>
             <a:r>
-              <a:rPr sz="3000" b="1" i="0">
-                <a:solidFill>
-                  <a:srgbClr val="217A45"/>
+              <a:rPr sz="2800" b="1" i="0">
+                <a:solidFill>
+                  <a:srgbClr val="2E9E5B"/>
                 </a:solidFill>
                 <a:latin typeface="Segoe UI"/>
               </a:rPr>
@@ -7978,29 +7441,29 @@
                 </a:solidFill>
                 <a:latin typeface="Segoe UI"/>
               </a:rPr>
-              <a:t>повтор из кэша</a:t>
-            </a:r>
-          </a:p>
-        </p:txBody>
-      </p:sp>
-      <p:sp>
-        <p:nvSpPr>
-          <p:cNvPr id="11" name="Rectangle 10"/>
+              <a:t>повторный ответ</a:t>
+            </a:r>
+          </a:p>
+        </p:txBody>
+      </p:sp>
+      <p:sp>
+        <p:nvSpPr>
+          <p:cNvPr id="8" name="Rounded Rectangle 7"/>
           <p:cNvSpPr/>
           <p:nvPr/>
         </p:nvSpPr>
         <p:spPr>
           <a:xfrm>
-            <a:off x="7406640" y="4718304"/>
+            <a:off x="7406640" y="4636008"/>
             <a:ext cx="4206240" cy="1234440"/>
           </a:xfrm>
-          <a:prstGeom prst="rect">
+          <a:prstGeom prst="roundRect">
             <a:avLst/>
           </a:prstGeom>
           <a:solidFill>
             <a:srgbClr val="E6F4EC"/>
           </a:solidFill>
-          <a:ln>
+          <a:ln w="12700">
             <a:solidFill>
               <a:srgbClr val="2E9E5B"/>
             </a:solidFill>
@@ -8031,13 +7494,13 @@
               </a:spcAft>
             </a:pPr>
             <a:r>
-              <a:rPr sz="3000" b="1" i="0">
-                <a:solidFill>
-                  <a:srgbClr val="217A45"/>
-                </a:solidFill>
-                <a:latin typeface="Segoe UI"/>
-              </a:rPr>
-              <a:t>&gt;300×</a:t>
+              <a:rPr sz="2800" b="1" i="0">
+                <a:solidFill>
+                  <a:srgbClr val="2E9E5B"/>
+                </a:solidFill>
+                <a:latin typeface="Segoe UI"/>
+              </a:rPr>
+              <a:t>0.3</a:t>
             </a:r>
           </a:p>
           <a:p>
@@ -8053,7 +7516,85 @@
                 </a:solidFill>
                 <a:latin typeface="Segoe UI"/>
               </a:rPr>
-              <a:t>ускорение</a:t>
+              <a:t>температура — стабильно</a:t>
+            </a:r>
+          </a:p>
+        </p:txBody>
+      </p:sp>
+      <p:sp>
+        <p:nvSpPr>
+          <p:cNvPr id="9" name="TextBox 8"/>
+          <p:cNvSpPr txBox="1"/>
+          <p:nvPr/>
+        </p:nvSpPr>
+        <p:spPr>
+          <a:xfrm>
+            <a:off x="457200" y="6437376"/>
+            <a:ext cx="9144000" cy="365760"/>
+          </a:xfrm>
+          <a:prstGeom prst="rect">
+            <a:avLst/>
+          </a:prstGeom>
+          <a:noFill/>
+        </p:spPr>
+        <p:txBody>
+          <a:bodyPr wrap="square" anchor="t">
+            <a:spAutoFit/>
+          </a:bodyPr>
+          <a:lstStyle/>
+          <a:p>
+            <a:pPr algn="l">
+              <a:spcAft>
+                <a:spcPts val="800"/>
+              </a:spcAft>
+            </a:pPr>
+            <a:r>
+              <a:rPr sz="1000" b="0" i="0">
+                <a:solidFill>
+                  <a:srgbClr val="6B7280"/>
+                </a:solidFill>
+                <a:latin typeface="Segoe UI"/>
+              </a:rPr>
+              <a:t>Instacart Insights · РЭУ им. Г.В. Плеханова · 2026</a:t>
+            </a:r>
+          </a:p>
+        </p:txBody>
+      </p:sp>
+      <p:sp>
+        <p:nvSpPr>
+          <p:cNvPr id="10" name="TextBox 9"/>
+          <p:cNvSpPr txBox="1"/>
+          <p:nvPr/>
+        </p:nvSpPr>
+        <p:spPr>
+          <a:xfrm>
+            <a:off x="11338560" y="6437376"/>
+            <a:ext cx="640080" cy="365760"/>
+          </a:xfrm>
+          <a:prstGeom prst="rect">
+            <a:avLst/>
+          </a:prstGeom>
+          <a:noFill/>
+        </p:spPr>
+        <p:txBody>
+          <a:bodyPr wrap="square" anchor="t">
+            <a:spAutoFit/>
+          </a:bodyPr>
+          <a:lstStyle/>
+          <a:p>
+            <a:pPr algn="r">
+              <a:spcAft>
+                <a:spcPts val="800"/>
+              </a:spcAft>
+            </a:pPr>
+            <a:r>
+              <a:rPr sz="1000" b="0" i="0">
+                <a:solidFill>
+                  <a:srgbClr val="6B7280"/>
+                </a:solidFill>
+                <a:latin typeface="Segoe UI"/>
+              </a:rPr>
+              <a:t>9</a:t>
             </a:r>
           </a:p>
         </p:txBody>

--- a/Презентация_к_защите.pptx
+++ b/Презентация_к_защите.pptx
@@ -15,7 +15,6 @@
     <p:sldId id="263" r:id="rId14"/>
     <p:sldId id="264" r:id="rId15"/>
     <p:sldId id="265" r:id="rId16"/>
-    <p:sldId id="266" r:id="rId17"/>
   </p:sldIdLst>
   <p:sldSz cx="12191695" cy="6858000" type="screen4x3"/>
   <p:notesSz cx="6858000" cy="9144000"/>
@@ -3353,432 +3352,6 @@
             <a:avLst/>
           </a:prstGeom>
           <a:solidFill>
-            <a:srgbClr val="112A1D"/>
-          </a:solidFill>
-          <a:ln>
-            <a:noFill/>
-          </a:ln>
-          <a:effectLst/>
-        </p:spPr>
-        <p:style>
-          <a:lnRef idx="1">
-            <a:schemeClr val="accent1"/>
-          </a:lnRef>
-          <a:fillRef idx="3">
-            <a:schemeClr val="accent1"/>
-          </a:fillRef>
-          <a:effectRef idx="2">
-            <a:schemeClr val="accent1"/>
-          </a:effectRef>
-          <a:fontRef idx="minor">
-            <a:schemeClr val="lt1"/>
-          </a:fontRef>
-        </p:style>
-        <p:txBody>
-          <a:bodyPr rtlCol="0" anchor="ctr"/>
-          <a:lstStyle/>
-          <a:p>
-            <a:pPr algn="ctr"/>
-          </a:p>
-        </p:txBody>
-      </p:sp>
-      <p:sp>
-        <p:nvSpPr>
-          <p:cNvPr id="3" name="Rectangle 2"/>
-          <p:cNvSpPr/>
-          <p:nvPr/>
-        </p:nvSpPr>
-        <p:spPr>
-          <a:xfrm>
-            <a:off x="822960" y="1874519"/>
-            <a:ext cx="1280160" cy="76200"/>
-          </a:xfrm>
-          <a:prstGeom prst="rect">
-            <a:avLst/>
-          </a:prstGeom>
-          <a:solidFill>
-            <a:srgbClr val="6FCE97"/>
-          </a:solidFill>
-          <a:ln>
-            <a:noFill/>
-          </a:ln>
-          <a:effectLst/>
-        </p:spPr>
-        <p:style>
-          <a:lnRef idx="1">
-            <a:schemeClr val="accent1"/>
-          </a:lnRef>
-          <a:fillRef idx="3">
-            <a:schemeClr val="accent1"/>
-          </a:fillRef>
-          <a:effectRef idx="2">
-            <a:schemeClr val="accent1"/>
-          </a:effectRef>
-          <a:fontRef idx="minor">
-            <a:schemeClr val="lt1"/>
-          </a:fontRef>
-        </p:style>
-        <p:txBody>
-          <a:bodyPr rtlCol="0" anchor="ctr"/>
-          <a:lstStyle/>
-          <a:p>
-            <a:pPr algn="ctr"/>
-          </a:p>
-        </p:txBody>
-      </p:sp>
-      <p:sp>
-        <p:nvSpPr>
-          <p:cNvPr id="4" name="TextBox 3"/>
-          <p:cNvSpPr txBox="1"/>
-          <p:nvPr/>
-        </p:nvSpPr>
-        <p:spPr>
-          <a:xfrm>
-            <a:off x="822960" y="777240"/>
-            <a:ext cx="10515600" cy="548640"/>
-          </a:xfrm>
-          <a:prstGeom prst="rect">
-            <a:avLst/>
-          </a:prstGeom>
-          <a:noFill/>
-        </p:spPr>
-        <p:txBody>
-          <a:bodyPr wrap="square" anchor="t">
-            <a:spAutoFit/>
-          </a:bodyPr>
-          <a:lstStyle/>
-          <a:p>
-            <a:pPr algn="l">
-              <a:spcAft>
-                <a:spcPts val="800"/>
-              </a:spcAft>
-            </a:pPr>
-            <a:r>
-              <a:rPr sz="1500" b="1" i="0">
-                <a:solidFill>
-                  <a:srgbClr val="6FCE97"/>
-                </a:solidFill>
-                <a:latin typeface="Segoe UI"/>
-              </a:rPr>
-              <a:t>ЭТО ТОЛЬКО НАЧАЛО</a:t>
-            </a:r>
-          </a:p>
-        </p:txBody>
-      </p:sp>
-      <p:sp>
-        <p:nvSpPr>
-          <p:cNvPr id="5" name="TextBox 4"/>
-          <p:cNvSpPr txBox="1"/>
-          <p:nvPr/>
-        </p:nvSpPr>
-        <p:spPr>
-          <a:xfrm>
-            <a:off x="822960" y="2194560"/>
-            <a:ext cx="10515600" cy="2926080"/>
-          </a:xfrm>
-          <a:prstGeom prst="rect">
-            <a:avLst/>
-          </a:prstGeom>
-          <a:noFill/>
-        </p:spPr>
-        <p:txBody>
-          <a:bodyPr wrap="square" anchor="t">
-            <a:spAutoFit/>
-          </a:bodyPr>
-          <a:lstStyle/>
-          <a:p>
-            <a:pPr algn="l">
-              <a:spcAft>
-                <a:spcPts val="1000"/>
-              </a:spcAft>
-            </a:pPr>
-            <a:r>
-              <a:rPr sz="4200" b="1" i="0">
-                <a:solidFill>
-                  <a:srgbClr val="FFFFFF"/>
-                </a:solidFill>
-                <a:latin typeface="Segoe UI"/>
-              </a:rPr>
-              <a:t>Сегодня — Instacart.
-Завтра — любой ретейл.</a:t>
-            </a:r>
-          </a:p>
-          <a:p>
-            <a:pPr algn="l">
-              <a:spcAft>
-                <a:spcPts val="0"/>
-              </a:spcAft>
-            </a:pPr>
-            <a:r>
-              <a:rPr sz="2100" b="0" i="0">
-                <a:solidFill>
-                  <a:srgbClr val="B8C4BC"/>
-                </a:solidFill>
-                <a:latin typeface="Segoe UI"/>
-              </a:rPr>
-              <a:t>Новые сервисы, персонализация на реальных пользователях, проверка HMW-гипотез.</a:t>
-            </a:r>
-          </a:p>
-        </p:txBody>
-      </p:sp>
-      <p:sp>
-        <p:nvSpPr>
-          <p:cNvPr id="6" name="Rounded Rectangle 5"/>
-          <p:cNvSpPr/>
-          <p:nvPr/>
-        </p:nvSpPr>
-        <p:spPr>
-          <a:xfrm>
-            <a:off x="822960" y="5212080"/>
-            <a:ext cx="2286000" cy="914400"/>
-          </a:xfrm>
-          <a:prstGeom prst="roundRect">
-            <a:avLst/>
-          </a:prstGeom>
-          <a:solidFill>
-            <a:srgbClr val="1C3B2A"/>
-          </a:solidFill>
-          <a:ln w="12700">
-            <a:solidFill>
-              <a:srgbClr val="2E9E5B"/>
-            </a:solidFill>
-          </a:ln>
-          <a:effectLst/>
-        </p:spPr>
-        <p:style>
-          <a:lnRef idx="1">
-            <a:schemeClr val="accent1"/>
-          </a:lnRef>
-          <a:fillRef idx="3">
-            <a:schemeClr val="accent1"/>
-          </a:fillRef>
-          <a:effectRef idx="2">
-            <a:schemeClr val="accent1"/>
-          </a:effectRef>
-          <a:fontRef idx="minor">
-            <a:schemeClr val="lt1"/>
-          </a:fontRef>
-        </p:style>
-        <p:txBody>
-          <a:bodyPr rtlCol="0" anchor="ctr" wrap="square"/>
-          <a:lstStyle/>
-          <a:p>
-            <a:pPr algn="ctr">
-              <a:spcAft>
-                <a:spcPts val="0"/>
-              </a:spcAft>
-            </a:pPr>
-            <a:r>
-              <a:rPr sz="2400" b="1" i="0">
-                <a:solidFill>
-                  <a:srgbClr val="6FCE97"/>
-                </a:solidFill>
-                <a:latin typeface="Segoe UI"/>
-              </a:rPr>
-              <a:t>5</a:t>
-            </a:r>
-          </a:p>
-          <a:p>
-            <a:pPr algn="ctr">
-              <a:spcAft>
-                <a:spcPts val="0"/>
-              </a:spcAft>
-            </a:pPr>
-            <a:r>
-              <a:rPr sz="1200" b="0" i="0">
-                <a:solidFill>
-                  <a:srgbClr val="B8C4BC"/>
-                </a:solidFill>
-                <a:latin typeface="Segoe UI"/>
-              </a:rPr>
-              <a:t>сервисов</a:t>
-            </a:r>
-          </a:p>
-        </p:txBody>
-      </p:sp>
-      <p:sp>
-        <p:nvSpPr>
-          <p:cNvPr id="7" name="Rounded Rectangle 6"/>
-          <p:cNvSpPr/>
-          <p:nvPr/>
-        </p:nvSpPr>
-        <p:spPr>
-          <a:xfrm>
-            <a:off x="3383280" y="5212080"/>
-            <a:ext cx="2286000" cy="914400"/>
-          </a:xfrm>
-          <a:prstGeom prst="roundRect">
-            <a:avLst/>
-          </a:prstGeom>
-          <a:solidFill>
-            <a:srgbClr val="1C3B2A"/>
-          </a:solidFill>
-          <a:ln w="12700">
-            <a:solidFill>
-              <a:srgbClr val="2E9E5B"/>
-            </a:solidFill>
-          </a:ln>
-          <a:effectLst/>
-        </p:spPr>
-        <p:style>
-          <a:lnRef idx="1">
-            <a:schemeClr val="accent1"/>
-          </a:lnRef>
-          <a:fillRef idx="3">
-            <a:schemeClr val="accent1"/>
-          </a:fillRef>
-          <a:effectRef idx="2">
-            <a:schemeClr val="accent1"/>
-          </a:effectRef>
-          <a:fontRef idx="minor">
-            <a:schemeClr val="lt1"/>
-          </a:fontRef>
-        </p:style>
-        <p:txBody>
-          <a:bodyPr rtlCol="0" anchor="ctr" wrap="square"/>
-          <a:lstStyle/>
-          <a:p>
-            <a:pPr algn="ctr">
-              <a:spcAft>
-                <a:spcPts val="0"/>
-              </a:spcAft>
-            </a:pPr>
-            <a:r>
-              <a:rPr sz="2400" b="1" i="0">
-                <a:solidFill>
-                  <a:srgbClr val="6FCE97"/>
-                </a:solidFill>
-                <a:latin typeface="Segoe UI"/>
-              </a:rPr>
-              <a:t>25</a:t>
-            </a:r>
-          </a:p>
-          <a:p>
-            <a:pPr algn="ctr">
-              <a:spcAft>
-                <a:spcPts val="0"/>
-              </a:spcAft>
-            </a:pPr>
-            <a:r>
-              <a:rPr sz="1200" b="0" i="0">
-                <a:solidFill>
-                  <a:srgbClr val="B8C4BC"/>
-                </a:solidFill>
-                <a:latin typeface="Segoe UI"/>
-              </a:rPr>
-              <a:t>тестов</a:t>
-            </a:r>
-          </a:p>
-        </p:txBody>
-      </p:sp>
-      <p:sp>
-        <p:nvSpPr>
-          <p:cNvPr id="8" name="Rounded Rectangle 7"/>
-          <p:cNvSpPr/>
-          <p:nvPr/>
-        </p:nvSpPr>
-        <p:spPr>
-          <a:xfrm>
-            <a:off x="5943600" y="5212080"/>
-            <a:ext cx="2286000" cy="914400"/>
-          </a:xfrm>
-          <a:prstGeom prst="roundRect">
-            <a:avLst/>
-          </a:prstGeom>
-          <a:solidFill>
-            <a:srgbClr val="1C3B2A"/>
-          </a:solidFill>
-          <a:ln w="12700">
-            <a:solidFill>
-              <a:srgbClr val="2E9E5B"/>
-            </a:solidFill>
-          </a:ln>
-          <a:effectLst/>
-        </p:spPr>
-        <p:style>
-          <a:lnRef idx="1">
-            <a:schemeClr val="accent1"/>
-          </a:lnRef>
-          <a:fillRef idx="3">
-            <a:schemeClr val="accent1"/>
-          </a:fillRef>
-          <a:effectRef idx="2">
-            <a:schemeClr val="accent1"/>
-          </a:effectRef>
-          <a:fontRef idx="minor">
-            <a:schemeClr val="lt1"/>
-          </a:fontRef>
-        </p:style>
-        <p:txBody>
-          <a:bodyPr rtlCol="0" anchor="ctr" wrap="square"/>
-          <a:lstStyle/>
-          <a:p>
-            <a:pPr algn="ctr">
-              <a:spcAft>
-                <a:spcPts val="0"/>
-              </a:spcAft>
-            </a:pPr>
-            <a:r>
-              <a:rPr sz="2400" b="1" i="0">
-                <a:solidFill>
-                  <a:srgbClr val="6FCE97"/>
-                </a:solidFill>
-                <a:latin typeface="Segoe UI"/>
-              </a:rPr>
-              <a:t>2 нед.</a:t>
-            </a:r>
-          </a:p>
-          <a:p>
-            <a:pPr algn="ctr">
-              <a:spcAft>
-                <a:spcPts val="0"/>
-              </a:spcAft>
-            </a:pPr>
-            <a:r>
-              <a:rPr sz="1200" b="0" i="0">
-                <a:solidFill>
-                  <a:srgbClr val="B8C4BC"/>
-                </a:solidFill>
-                <a:latin typeface="Segoe UI"/>
-              </a:rPr>
-              <a:t>до MVP</a:t>
-            </a:r>
-          </a:p>
-        </p:txBody>
-      </p:sp>
-    </p:spTree>
-  </p:cSld>
-  <p:clrMapOvr>
-    <a:masterClrMapping/>
-  </p:clrMapOvr>
-</p:sld>
-</file>
-
-<file path=ppt/slides/slide11.xml><?xml version="1.0" encoding="utf-8"?>
-<p:sld xmlns:a="http://schemas.openxmlformats.org/drawingml/2006/main" xmlns:p="http://schemas.openxmlformats.org/presentationml/2006/main" xmlns:r="http://schemas.openxmlformats.org/officeDocument/2006/relationships">
-  <p:cSld>
-    <p:spTree>
-      <p:nvGrpSpPr>
-        <p:cNvPr id="1" name=""/>
-        <p:cNvGrpSpPr/>
-        <p:nvPr/>
-      </p:nvGrpSpPr>
-      <p:grpSpPr/>
-      <p:sp>
-        <p:nvSpPr>
-          <p:cNvPr id="2" name="Rectangle 1"/>
-          <p:cNvSpPr/>
-          <p:nvPr/>
-        </p:nvSpPr>
-        <p:spPr>
-          <a:xfrm>
-            <a:off x="0" y="0"/>
-            <a:ext cx="12191695" cy="6858000"/>
-          </a:xfrm>
-          <a:prstGeom prst="rect">
-            <a:avLst/>
-          </a:prstGeom>
-          <a:solidFill>
             <a:srgbClr val="2E9E5B"/>
           </a:solidFill>
           <a:ln>
@@ -5538,7 +5111,7 @@
                 </a:solidFill>
                 <a:latin typeface="Segoe UI"/>
               </a:rPr>
-              <a:t>СУТЬ</a:t>
+              <a:t>КАК РАБОТАЕТ · 1</a:t>
             </a:r>
           </a:p>
           <a:p>
@@ -5554,499 +5127,21 @@
                 </a:solidFill>
                 <a:latin typeface="Segoe UI"/>
               </a:rPr>
-              <a:t>Почему это возможно так быстро</a:t>
-            </a:r>
-          </a:p>
-        </p:txBody>
-      </p:sp>
-      <p:sp>
-        <p:nvSpPr>
-          <p:cNvPr id="5" name="Rounded Rectangle 4"/>
-          <p:cNvSpPr/>
-          <p:nvPr/>
-        </p:nvSpPr>
-        <p:spPr>
-          <a:xfrm>
-            <a:off x="640080" y="1737360"/>
-            <a:ext cx="2514600" cy="1737360"/>
-          </a:xfrm>
-          <a:prstGeom prst="roundRect">
-            <a:avLst/>
-          </a:prstGeom>
-          <a:solidFill>
-            <a:srgbClr val="E6F4EC"/>
-          </a:solidFill>
-          <a:ln w="12700">
-            <a:solidFill>
-              <a:srgbClr val="2E9E5B"/>
-            </a:solidFill>
-          </a:ln>
-          <a:effectLst/>
-        </p:spPr>
-        <p:style>
-          <a:lnRef idx="1">
-            <a:schemeClr val="accent1"/>
-          </a:lnRef>
-          <a:fillRef idx="3">
-            <a:schemeClr val="accent1"/>
-          </a:fillRef>
-          <a:effectRef idx="2">
-            <a:schemeClr val="accent1"/>
-          </a:effectRef>
-          <a:fontRef idx="minor">
-            <a:schemeClr val="lt1"/>
-          </a:fontRef>
-        </p:style>
-        <p:txBody>
-          <a:bodyPr rtlCol="0" anchor="ctr" wrap="square"/>
-          <a:lstStyle/>
-          <a:p>
-            <a:pPr algn="ctr">
-              <a:spcAft>
-                <a:spcPts val="400"/>
-              </a:spcAft>
-            </a:pPr>
-            <a:r>
-              <a:rPr sz="1800" b="1" i="0">
-                <a:solidFill>
-                  <a:srgbClr val="2E9E5B"/>
-                </a:solidFill>
-                <a:latin typeface="Segoe UI"/>
-              </a:rPr>
-              <a:t>Loginom</a:t>
-            </a:r>
-          </a:p>
-          <a:p>
-            <a:pPr algn="ctr">
-              <a:spcAft>
-                <a:spcPts val="0"/>
-              </a:spcAft>
-            </a:pPr>
-            <a:r>
-              <a:rPr sz="1300" b="0" i="0">
-                <a:solidFill>
-                  <a:srgbClr val="1F2430"/>
-                </a:solidFill>
-                <a:latin typeface="Segoe UI"/>
-              </a:rPr>
-              <a:t>аналитика
-без кода</a:t>
-            </a:r>
-          </a:p>
-        </p:txBody>
-      </p:sp>
-      <p:sp>
-        <p:nvSpPr>
-          <p:cNvPr id="6" name="TextBox 5"/>
+              <a:t>Что получает клиент — 5 сервисов</a:t>
+            </a:r>
+          </a:p>
+        </p:txBody>
+      </p:sp>
+      <p:sp>
+        <p:nvSpPr>
+          <p:cNvPr id="5" name="TextBox 4"/>
           <p:cNvSpPr txBox="1"/>
           <p:nvPr/>
         </p:nvSpPr>
         <p:spPr>
           <a:xfrm>
-            <a:off x="3154680" y="1737360"/>
-            <a:ext cx="274320" cy="1737360"/>
-          </a:xfrm>
-          <a:prstGeom prst="rect">
-            <a:avLst/>
-          </a:prstGeom>
-          <a:noFill/>
-        </p:spPr>
-        <p:txBody>
-          <a:bodyPr wrap="square" anchor="ctr">
-            <a:spAutoFit/>
-          </a:bodyPr>
-          <a:lstStyle/>
-          <a:p>
-            <a:pPr algn="ctr">
-              <a:spcAft>
-                <a:spcPts val="800"/>
-              </a:spcAft>
-            </a:pPr>
-            <a:r>
-              <a:rPr sz="2400" b="0" i="0">
-                <a:solidFill>
-                  <a:srgbClr val="2E9E5B"/>
-                </a:solidFill>
-                <a:latin typeface="Segoe UI"/>
-              </a:rPr>
-              <a:t>→</a:t>
-            </a:r>
-          </a:p>
-        </p:txBody>
-      </p:sp>
-      <p:sp>
-        <p:nvSpPr>
-          <p:cNvPr id="7" name="Rounded Rectangle 6"/>
-          <p:cNvSpPr/>
-          <p:nvPr/>
-        </p:nvSpPr>
-        <p:spPr>
-          <a:xfrm>
-            <a:off x="3429000" y="1737360"/>
-            <a:ext cx="2514600" cy="1737360"/>
-          </a:xfrm>
-          <a:prstGeom prst="roundRect">
-            <a:avLst/>
-          </a:prstGeom>
-          <a:solidFill>
-            <a:srgbClr val="E6F4EC"/>
-          </a:solidFill>
-          <a:ln w="12700">
-            <a:solidFill>
-              <a:srgbClr val="2E9E5B"/>
-            </a:solidFill>
-          </a:ln>
-          <a:effectLst/>
-        </p:spPr>
-        <p:style>
-          <a:lnRef idx="1">
-            <a:schemeClr val="accent1"/>
-          </a:lnRef>
-          <a:fillRef idx="3">
-            <a:schemeClr val="accent1"/>
-          </a:fillRef>
-          <a:effectRef idx="2">
-            <a:schemeClr val="accent1"/>
-          </a:effectRef>
-          <a:fontRef idx="minor">
-            <a:schemeClr val="lt1"/>
-          </a:fontRef>
-        </p:style>
-        <p:txBody>
-          <a:bodyPr rtlCol="0" anchor="ctr" wrap="square"/>
-          <a:lstStyle/>
-          <a:p>
-            <a:pPr algn="ctr">
-              <a:spcAft>
-                <a:spcPts val="400"/>
-              </a:spcAft>
-            </a:pPr>
-            <a:r>
-              <a:rPr sz="1800" b="1" i="0">
-                <a:solidFill>
-                  <a:srgbClr val="2E9E5B"/>
-                </a:solidFill>
-                <a:latin typeface="Segoe UI"/>
-              </a:rPr>
-              <a:t>Flask</a:t>
-            </a:r>
-          </a:p>
-          <a:p>
-            <a:pPr algn="ctr">
-              <a:spcAft>
-                <a:spcPts val="0"/>
-              </a:spcAft>
-            </a:pPr>
-            <a:r>
-              <a:rPr sz="1300" b="0" i="0">
-                <a:solidFill>
-                  <a:srgbClr val="1F2430"/>
-                </a:solidFill>
-                <a:latin typeface="Segoe UI"/>
-              </a:rPr>
-              <a:t>лёгкое
-веб-приложение</a:t>
-            </a:r>
-          </a:p>
-        </p:txBody>
-      </p:sp>
-      <p:sp>
-        <p:nvSpPr>
-          <p:cNvPr id="8" name="TextBox 7"/>
-          <p:cNvSpPr txBox="1"/>
-          <p:nvPr/>
-        </p:nvSpPr>
-        <p:spPr>
-          <a:xfrm>
-            <a:off x="5943600" y="1737360"/>
-            <a:ext cx="274320" cy="1737360"/>
-          </a:xfrm>
-          <a:prstGeom prst="rect">
-            <a:avLst/>
-          </a:prstGeom>
-          <a:noFill/>
-        </p:spPr>
-        <p:txBody>
-          <a:bodyPr wrap="square" anchor="ctr">
-            <a:spAutoFit/>
-          </a:bodyPr>
-          <a:lstStyle/>
-          <a:p>
-            <a:pPr algn="ctr">
-              <a:spcAft>
-                <a:spcPts val="800"/>
-              </a:spcAft>
-            </a:pPr>
-            <a:r>
-              <a:rPr sz="2400" b="0" i="0">
-                <a:solidFill>
-                  <a:srgbClr val="2E9E5B"/>
-                </a:solidFill>
-                <a:latin typeface="Segoe UI"/>
-              </a:rPr>
-              <a:t>→</a:t>
-            </a:r>
-          </a:p>
-        </p:txBody>
-      </p:sp>
-      <p:sp>
-        <p:nvSpPr>
-          <p:cNvPr id="9" name="Rounded Rectangle 8"/>
-          <p:cNvSpPr/>
-          <p:nvPr/>
-        </p:nvSpPr>
-        <p:spPr>
-          <a:xfrm>
-            <a:off x="6217920" y="1737360"/>
-            <a:ext cx="2514600" cy="1737360"/>
-          </a:xfrm>
-          <a:prstGeom prst="roundRect">
-            <a:avLst/>
-          </a:prstGeom>
-          <a:solidFill>
-            <a:srgbClr val="E6F4EC"/>
-          </a:solidFill>
-          <a:ln w="12700">
-            <a:solidFill>
-              <a:srgbClr val="2E9E5B"/>
-            </a:solidFill>
-          </a:ln>
-          <a:effectLst/>
-        </p:spPr>
-        <p:style>
-          <a:lnRef idx="1">
-            <a:schemeClr val="accent1"/>
-          </a:lnRef>
-          <a:fillRef idx="3">
-            <a:schemeClr val="accent1"/>
-          </a:fillRef>
-          <a:effectRef idx="2">
-            <a:schemeClr val="accent1"/>
-          </a:effectRef>
-          <a:fontRef idx="minor">
-            <a:schemeClr val="lt1"/>
-          </a:fontRef>
-        </p:style>
-        <p:txBody>
-          <a:bodyPr rtlCol="0" anchor="ctr" wrap="square"/>
-          <a:lstStyle/>
-          <a:p>
-            <a:pPr algn="ctr">
-              <a:spcAft>
-                <a:spcPts val="400"/>
-              </a:spcAft>
-            </a:pPr>
-            <a:r>
-              <a:rPr sz="1800" b="1" i="0">
-                <a:solidFill>
-                  <a:srgbClr val="2E9E5B"/>
-                </a:solidFill>
-                <a:latin typeface="Segoe UI"/>
-              </a:rPr>
-              <a:t>Mistral (ИИ)</a:t>
-            </a:r>
-          </a:p>
-          <a:p>
-            <a:pPr algn="ctr">
-              <a:spcAft>
-                <a:spcPts val="0"/>
-              </a:spcAft>
-            </a:pPr>
-            <a:r>
-              <a:rPr sz="1300" b="0" i="0">
-                <a:solidFill>
-                  <a:srgbClr val="1F2430"/>
-                </a:solidFill>
-                <a:latin typeface="Segoe UI"/>
-              </a:rPr>
-              <a:t>советы
-человеческим языком</a:t>
-            </a:r>
-          </a:p>
-        </p:txBody>
-      </p:sp>
-      <p:sp>
-        <p:nvSpPr>
-          <p:cNvPr id="10" name="TextBox 9"/>
-          <p:cNvSpPr txBox="1"/>
-          <p:nvPr/>
-        </p:nvSpPr>
-        <p:spPr>
-          <a:xfrm>
-            <a:off x="8732520" y="1737360"/>
-            <a:ext cx="274320" cy="1737360"/>
-          </a:xfrm>
-          <a:prstGeom prst="rect">
-            <a:avLst/>
-          </a:prstGeom>
-          <a:noFill/>
-        </p:spPr>
-        <p:txBody>
-          <a:bodyPr wrap="square" anchor="ctr">
-            <a:spAutoFit/>
-          </a:bodyPr>
-          <a:lstStyle/>
-          <a:p>
-            <a:pPr algn="ctr">
-              <a:spcAft>
-                <a:spcPts val="800"/>
-              </a:spcAft>
-            </a:pPr>
-            <a:r>
-              <a:rPr sz="2400" b="0" i="0">
-                <a:solidFill>
-                  <a:srgbClr val="2E9E5B"/>
-                </a:solidFill>
-                <a:latin typeface="Segoe UI"/>
-              </a:rPr>
-              <a:t>→</a:t>
-            </a:r>
-          </a:p>
-        </p:txBody>
-      </p:sp>
-      <p:sp>
-        <p:nvSpPr>
-          <p:cNvPr id="11" name="Rounded Rectangle 10"/>
-          <p:cNvSpPr/>
-          <p:nvPr/>
-        </p:nvSpPr>
-        <p:spPr>
-          <a:xfrm>
-            <a:off x="9006840" y="1737360"/>
-            <a:ext cx="2514600" cy="1737360"/>
-          </a:xfrm>
-          <a:prstGeom prst="roundRect">
-            <a:avLst/>
-          </a:prstGeom>
-          <a:solidFill>
-            <a:srgbClr val="E6F4EC"/>
-          </a:solidFill>
-          <a:ln w="12700">
-            <a:solidFill>
-              <a:srgbClr val="2E9E5B"/>
-            </a:solidFill>
-          </a:ln>
-          <a:effectLst/>
-        </p:spPr>
-        <p:style>
-          <a:lnRef idx="1">
-            <a:schemeClr val="accent1"/>
-          </a:lnRef>
-          <a:fillRef idx="3">
-            <a:schemeClr val="accent1"/>
-          </a:fillRef>
-          <a:effectRef idx="2">
-            <a:schemeClr val="accent1"/>
-          </a:effectRef>
-          <a:fontRef idx="minor">
-            <a:schemeClr val="lt1"/>
-          </a:fontRef>
-        </p:style>
-        <p:txBody>
-          <a:bodyPr rtlCol="0" anchor="ctr" wrap="square"/>
-          <a:lstStyle/>
-          <a:p>
-            <a:pPr algn="ctr">
-              <a:spcAft>
-                <a:spcPts val="400"/>
-              </a:spcAft>
-            </a:pPr>
-            <a:r>
-              <a:rPr sz="1800" b="1" i="0">
-                <a:solidFill>
-                  <a:srgbClr val="2E9E5B"/>
-                </a:solidFill>
-                <a:latin typeface="Segoe UI"/>
-              </a:rPr>
-              <a:t>Кэш</a:t>
-            </a:r>
-          </a:p>
-          <a:p>
-            <a:pPr algn="ctr">
-              <a:spcAft>
-                <a:spcPts val="0"/>
-              </a:spcAft>
-            </a:pPr>
-            <a:r>
-              <a:rPr sz="1300" b="0" i="0">
-                <a:solidFill>
-                  <a:srgbClr val="1F2430"/>
-                </a:solidFill>
-                <a:latin typeface="Segoe UI"/>
-              </a:rPr>
-              <a:t>мгновенный
-повтор</a:t>
-            </a:r>
-          </a:p>
-        </p:txBody>
-      </p:sp>
-      <p:sp>
-        <p:nvSpPr>
-          <p:cNvPr id="12" name="Rounded Rectangle 11"/>
-          <p:cNvSpPr/>
-          <p:nvPr/>
-        </p:nvSpPr>
-        <p:spPr>
-          <a:xfrm>
-            <a:off x="640080" y="4114800"/>
-            <a:ext cx="10881360" cy="1371600"/>
-          </a:xfrm>
-          <a:prstGeom prst="roundRect">
-            <a:avLst/>
-          </a:prstGeom>
-          <a:solidFill>
-            <a:srgbClr val="112A1D"/>
-          </a:solidFill>
-          <a:ln>
-            <a:noFill/>
-          </a:ln>
-          <a:effectLst/>
-        </p:spPr>
-        <p:style>
-          <a:lnRef idx="1">
-            <a:schemeClr val="accent1"/>
-          </a:lnRef>
-          <a:fillRef idx="3">
-            <a:schemeClr val="accent1"/>
-          </a:fillRef>
-          <a:effectRef idx="2">
-            <a:schemeClr val="accent1"/>
-          </a:effectRef>
-          <a:fontRef idx="minor">
-            <a:schemeClr val="lt1"/>
-          </a:fontRef>
-        </p:style>
-        <p:txBody>
-          <a:bodyPr rtlCol="0" anchor="ctr" wrap="square" lIns="365760"/>
-          <a:lstStyle/>
-          <a:p>
-            <a:pPr algn="l">
-              <a:spcAft>
-                <a:spcPts val="0"/>
-              </a:spcAft>
-            </a:pPr>
-            <a:r>
-              <a:rPr sz="2200" b="1" i="0">
-                <a:solidFill>
-                  <a:srgbClr val="FFFFFF"/>
-                </a:solidFill>
-                <a:latin typeface="Segoe UI"/>
-              </a:rPr>
-              <a:t>Рабочий MVP собран за 2 недели — без тяжёлой разработки и большой команды.</a:t>
-            </a:r>
-          </a:p>
-        </p:txBody>
-      </p:sp>
-      <p:sp>
-        <p:nvSpPr>
-          <p:cNvPr id="13" name="TextBox 12"/>
-          <p:cNvSpPr txBox="1"/>
-          <p:nvPr/>
-        </p:nvSpPr>
-        <p:spPr>
-          <a:xfrm>
-            <a:off x="457200" y="6437376"/>
-            <a:ext cx="9144000" cy="365760"/>
+            <a:off x="640080" y="1463040"/>
+            <a:ext cx="5943600" cy="4754880"/>
           </a:xfrm>
           <a:prstGeom prst="rect">
             <a:avLst/>
@@ -6059,6 +5154,183 @@
           </a:bodyPr>
           <a:lstStyle/>
           <a:p>
+            <a:pPr>
+              <a:spcAft>
+                <a:spcPts val="1100"/>
+              </a:spcAft>
+            </a:pPr>
+            <a:r>
+              <a:rPr sz="1600" b="1" i="0">
+                <a:solidFill>
+                  <a:srgbClr val="2E9E5B"/>
+                </a:solidFill>
+                <a:latin typeface="Segoe UI"/>
+              </a:rPr>
+              <a:t>●  Топ-10 товаров — </a:t>
+            </a:r>
+            <a:r>
+              <a:rPr sz="1500" b="0" i="0">
+                <a:solidFill>
+                  <a:srgbClr val="1F2430"/>
+                </a:solidFill>
+                <a:latin typeface="Segoe UI"/>
+              </a:rPr>
+              <a:t>любимое клиента + персональный совет</a:t>
+            </a:r>
+          </a:p>
+          <a:p>
+            <a:pPr>
+              <a:spcAft>
+                <a:spcPts val="1100"/>
+              </a:spcAft>
+            </a:pPr>
+            <a:r>
+              <a:rPr sz="1600" b="1" i="0">
+                <a:solidFill>
+                  <a:srgbClr val="2E9E5B"/>
+                </a:solidFill>
+                <a:latin typeface="Segoe UI"/>
+              </a:rPr>
+              <a:t>●  Забытые товары — </a:t>
+            </a:r>
+            <a:r>
+              <a:rPr sz="1500" b="0" i="0">
+                <a:solidFill>
+                  <a:srgbClr val="1F2430"/>
+                </a:solidFill>
+                <a:latin typeface="Segoe UI"/>
+              </a:rPr>
+              <a:t>напомним о привычном, что выпало из заказов</a:t>
+            </a:r>
+          </a:p>
+          <a:p>
+            <a:pPr>
+              <a:spcAft>
+                <a:spcPts val="1100"/>
+              </a:spcAft>
+            </a:pPr>
+            <a:r>
+              <a:rPr sz="1600" b="1" i="0">
+                <a:solidFill>
+                  <a:srgbClr val="2E9E5B"/>
+                </a:solidFill>
+                <a:latin typeface="Segoe UI"/>
+              </a:rPr>
+              <a:t>●  Ритм покупок — </a:t>
+            </a:r>
+            <a:r>
+              <a:rPr sz="1500" b="0" i="0">
+                <a:solidFill>
+                  <a:srgbClr val="1F2430"/>
+                </a:solidFill>
+                <a:latin typeface="Segoe UI"/>
+              </a:rPr>
+              <a:t>когда клиенту снова пора оформить заказ</a:t>
+            </a:r>
+          </a:p>
+          <a:p>
+            <a:pPr>
+              <a:spcAft>
+                <a:spcPts val="1100"/>
+              </a:spcAft>
+            </a:pPr>
+            <a:r>
+              <a:rPr sz="1600" b="1" i="0">
+                <a:solidFill>
+                  <a:srgbClr val="2E9E5B"/>
+                </a:solidFill>
+                <a:latin typeface="Segoe UI"/>
+              </a:rPr>
+              <a:t>●  Сводка по клиенту — </a:t>
+            </a:r>
+            <a:r>
+              <a:rPr sz="1500" b="0" i="0">
+                <a:solidFill>
+                  <a:srgbClr val="1F2430"/>
+                </a:solidFill>
+                <a:latin typeface="Segoe UI"/>
+              </a:rPr>
+              <a:t>портрет поведения одним экраном</a:t>
+            </a:r>
+          </a:p>
+          <a:p>
+            <a:pPr>
+              <a:spcAft>
+                <a:spcPts val="1100"/>
+              </a:spcAft>
+            </a:pPr>
+            <a:r>
+              <a:rPr sz="1600" b="1" i="0">
+                <a:solidFill>
+                  <a:srgbClr val="2E9E5B"/>
+                </a:solidFill>
+                <a:latin typeface="Segoe UI"/>
+              </a:rPr>
+              <a:t>●  Отделы и категории — </a:t>
+            </a:r>
+            <a:r>
+              <a:rPr sz="1500" b="0" i="0">
+                <a:solidFill>
+                  <a:srgbClr val="1F2430"/>
+                </a:solidFill>
+                <a:latin typeface="Segoe UI"/>
+              </a:rPr>
+              <a:t>из чего состоит корзина</a:t>
+            </a:r>
+          </a:p>
+        </p:txBody>
+      </p:sp>
+      <p:pic>
+        <p:nvPicPr>
+          <p:cNvPr id="6" name="Picture 5" descr="image4.jpg"/>
+          <p:cNvPicPr>
+            <a:picLocks noChangeAspect="1"/>
+          </p:cNvPicPr>
+          <p:nvPr/>
+        </p:nvPicPr>
+        <p:blipFill>
+          <a:blip r:embed="rId2"/>
+          <a:stretch>
+            <a:fillRect/>
+          </a:stretch>
+        </p:blipFill>
+        <p:spPr>
+          <a:xfrm>
+            <a:off x="7001446" y="1417320"/>
+            <a:ext cx="4650867" cy="4754880"/>
+          </a:xfrm>
+          <a:prstGeom prst="rect">
+            <a:avLst/>
+          </a:prstGeom>
+          <a:ln w="12700">
+            <a:solidFill>
+              <a:srgbClr val="D0D5DD"/>
+            </a:solidFill>
+          </a:ln>
+        </p:spPr>
+      </p:pic>
+      <p:sp>
+        <p:nvSpPr>
+          <p:cNvPr id="7" name="TextBox 6"/>
+          <p:cNvSpPr txBox="1"/>
+          <p:nvPr/>
+        </p:nvSpPr>
+        <p:spPr>
+          <a:xfrm>
+            <a:off x="457200" y="6437376"/>
+            <a:ext cx="9144000" cy="365760"/>
+          </a:xfrm>
+          <a:prstGeom prst="rect">
+            <a:avLst/>
+          </a:prstGeom>
+          <a:noFill/>
+        </p:spPr>
+        <p:txBody>
+          <a:bodyPr wrap="square" anchor="t">
+            <a:spAutoFit/>
+          </a:bodyPr>
+          <a:lstStyle/>
+          <a:p>
             <a:pPr algn="l">
               <a:spcAft>
                 <a:spcPts val="800"/>
@@ -6078,7 +5350,7 @@
       </p:sp>
       <p:sp>
         <p:nvSpPr>
-          <p:cNvPr id="14" name="TextBox 13"/>
+          <p:cNvPr id="8" name="TextBox 7"/>
           <p:cNvSpPr txBox="1"/>
           <p:nvPr/>
         </p:nvSpPr>
@@ -6255,7 +5527,7 @@
                 </a:solidFill>
                 <a:latin typeface="Segoe UI"/>
               </a:rPr>
-              <a:t>КАК РАБОТАЕТ · 1</a:t>
+              <a:t>КАК РАБОТАЕТ · 2</a:t>
             </a:r>
           </a:p>
           <a:p>
@@ -6271,162 +5543,14 @@
                 </a:solidFill>
                 <a:latin typeface="Segoe UI"/>
               </a:rPr>
-              <a:t>Что получает клиент — 5 сервисов</a:t>
-            </a:r>
-          </a:p>
-        </p:txBody>
-      </p:sp>
-      <p:sp>
-        <p:nvSpPr>
-          <p:cNvPr id="5" name="TextBox 4"/>
-          <p:cNvSpPr txBox="1"/>
-          <p:nvPr/>
-        </p:nvSpPr>
-        <p:spPr>
-          <a:xfrm>
-            <a:off x="640080" y="1463040"/>
-            <a:ext cx="5943600" cy="4754880"/>
-          </a:xfrm>
-          <a:prstGeom prst="rect">
-            <a:avLst/>
-          </a:prstGeom>
-          <a:noFill/>
-        </p:spPr>
-        <p:txBody>
-          <a:bodyPr wrap="square" anchor="t">
-            <a:spAutoFit/>
-          </a:bodyPr>
-          <a:lstStyle/>
-          <a:p>
-            <a:pPr>
-              <a:spcAft>
-                <a:spcPts val="1100"/>
-              </a:spcAft>
-            </a:pPr>
-            <a:r>
-              <a:rPr sz="1600" b="1" i="0">
-                <a:solidFill>
-                  <a:srgbClr val="2E9E5B"/>
-                </a:solidFill>
-                <a:latin typeface="Segoe UI"/>
-              </a:rPr>
-              <a:t>●  Топ-10 товаров — </a:t>
-            </a:r>
-            <a:r>
-              <a:rPr sz="1500" b="0" i="0">
-                <a:solidFill>
-                  <a:srgbClr val="1F2430"/>
-                </a:solidFill>
-                <a:latin typeface="Segoe UI"/>
-              </a:rPr>
-              <a:t>любимое клиента + персональный совет</a:t>
-            </a:r>
-          </a:p>
-          <a:p>
-            <a:pPr>
-              <a:spcAft>
-                <a:spcPts val="1100"/>
-              </a:spcAft>
-            </a:pPr>
-            <a:r>
-              <a:rPr sz="1600" b="1" i="0">
-                <a:solidFill>
-                  <a:srgbClr val="2E9E5B"/>
-                </a:solidFill>
-                <a:latin typeface="Segoe UI"/>
-              </a:rPr>
-              <a:t>●  Забытые товары — </a:t>
-            </a:r>
-            <a:r>
-              <a:rPr sz="1500" b="0" i="0">
-                <a:solidFill>
-                  <a:srgbClr val="1F2430"/>
-                </a:solidFill>
-                <a:latin typeface="Segoe UI"/>
-              </a:rPr>
-              <a:t>напомним о привычном, что выпало из заказов</a:t>
-            </a:r>
-          </a:p>
-          <a:p>
-            <a:pPr>
-              <a:spcAft>
-                <a:spcPts val="1100"/>
-              </a:spcAft>
-            </a:pPr>
-            <a:r>
-              <a:rPr sz="1600" b="1" i="0">
-                <a:solidFill>
-                  <a:srgbClr val="2E9E5B"/>
-                </a:solidFill>
-                <a:latin typeface="Segoe UI"/>
-              </a:rPr>
-              <a:t>●  Ритм покупок — </a:t>
-            </a:r>
-            <a:r>
-              <a:rPr sz="1500" b="0" i="0">
-                <a:solidFill>
-                  <a:srgbClr val="1F2430"/>
-                </a:solidFill>
-                <a:latin typeface="Segoe UI"/>
-              </a:rPr>
-              <a:t>когда клиенту снова пора оформить заказ</a:t>
-            </a:r>
-          </a:p>
-          <a:p>
-            <a:pPr>
-              <a:spcAft>
-                <a:spcPts val="1100"/>
-              </a:spcAft>
-            </a:pPr>
-            <a:r>
-              <a:rPr sz="1600" b="1" i="0">
-                <a:solidFill>
-                  <a:srgbClr val="2E9E5B"/>
-                </a:solidFill>
-                <a:latin typeface="Segoe UI"/>
-              </a:rPr>
-              <a:t>●  Сводка по клиенту — </a:t>
-            </a:r>
-            <a:r>
-              <a:rPr sz="1500" b="0" i="0">
-                <a:solidFill>
-                  <a:srgbClr val="1F2430"/>
-                </a:solidFill>
-                <a:latin typeface="Segoe UI"/>
-              </a:rPr>
-              <a:t>портрет поведения одним экраном</a:t>
-            </a:r>
-          </a:p>
-          <a:p>
-            <a:pPr>
-              <a:spcAft>
-                <a:spcPts val="1100"/>
-              </a:spcAft>
-            </a:pPr>
-            <a:r>
-              <a:rPr sz="1600" b="1" i="0">
-                <a:solidFill>
-                  <a:srgbClr val="2E9E5B"/>
-                </a:solidFill>
-                <a:latin typeface="Segoe UI"/>
-              </a:rPr>
-              <a:t>●  Отделы и категории — </a:t>
-            </a:r>
-            <a:r>
-              <a:rPr sz="1500" b="0" i="0">
-                <a:solidFill>
-                  <a:srgbClr val="1F2430"/>
-                </a:solidFill>
-                <a:latin typeface="Segoe UI"/>
-              </a:rPr>
-              <a:t>из чего состоит корзина</a:t>
+              <a:t>Один экран — вся аналитика</a:t>
             </a:r>
           </a:p>
         </p:txBody>
       </p:sp>
       <p:pic>
         <p:nvPicPr>
-          <p:cNvPr id="6" name="Picture 5" descr="image4.jpg"/>
+          <p:cNvPr id="5" name="Picture 4" descr="image5.jpg"/>
           <p:cNvPicPr>
             <a:picLocks noChangeAspect="1"/>
           </p:cNvPicPr>
@@ -6440,8 +5564,8 @@
         </p:blipFill>
         <p:spPr>
           <a:xfrm>
-            <a:off x="7001446" y="1417320"/>
-            <a:ext cx="4650867" cy="4754880"/>
+            <a:off x="2063677" y="1417320"/>
+            <a:ext cx="8034166" cy="4023360"/>
           </a:xfrm>
           <a:prstGeom prst="rect">
             <a:avLst/>
@@ -6453,6 +5577,45 @@
           </a:ln>
         </p:spPr>
       </p:pic>
+      <p:sp>
+        <p:nvSpPr>
+          <p:cNvPr id="6" name="TextBox 5"/>
+          <p:cNvSpPr txBox="1"/>
+          <p:nvPr/>
+        </p:nvSpPr>
+        <p:spPr>
+          <a:xfrm>
+            <a:off x="640080" y="5623560"/>
+            <a:ext cx="10972800" cy="822960"/>
+          </a:xfrm>
+          <a:prstGeom prst="rect">
+            <a:avLst/>
+          </a:prstGeom>
+          <a:noFill/>
+        </p:spPr>
+        <p:txBody>
+          <a:bodyPr wrap="square" anchor="t">
+            <a:spAutoFit/>
+          </a:bodyPr>
+          <a:lstStyle/>
+          <a:p>
+            <a:pPr algn="ctr">
+              <a:spcAft>
+                <a:spcPts val="800"/>
+              </a:spcAft>
+            </a:pPr>
+            <a:r>
+              <a:rPr sz="1600" b="0" i="0">
+                <a:solidFill>
+                  <a:srgbClr val="1F2430"/>
+                </a:solidFill>
+                <a:latin typeface="Segoe UI"/>
+              </a:rPr>
+              <a:t>Вход по user_id · навигация по разделам · диаграммы Chart.js · всё в едином стиле.</a:t>
+            </a:r>
+          </a:p>
+        </p:txBody>
+      </p:sp>
       <p:sp>
         <p:nvSpPr>
           <p:cNvPr id="7" name="TextBox 6"/>
@@ -6671,7 +5834,7 @@
                 </a:solidFill>
                 <a:latin typeface="Segoe UI"/>
               </a:rPr>
-              <a:t>КАК РАБОТАЕТ · 2</a:t>
+              <a:t>КАК РАБОТАЕТ · 3</a:t>
             </a:r>
           </a:p>
           <a:p>
@@ -6687,14 +5850,14 @@
                 </a:solidFill>
                 <a:latin typeface="Segoe UI"/>
               </a:rPr>
-              <a:t>Один экран — вся аналитика</a:t>
+              <a:t>Числа, график и совет — вместе</a:t>
             </a:r>
           </a:p>
         </p:txBody>
       </p:sp>
       <p:pic>
         <p:nvPicPr>
-          <p:cNvPr id="5" name="Picture 4" descr="image5.jpg"/>
+          <p:cNvPr id="5" name="Picture 4" descr="image6.jpg"/>
           <p:cNvPicPr>
             <a:picLocks noChangeAspect="1"/>
           </p:cNvPicPr>
@@ -6708,8 +5871,8 @@
         </p:blipFill>
         <p:spPr>
           <a:xfrm>
-            <a:off x="2063677" y="1417320"/>
-            <a:ext cx="8034166" cy="4023360"/>
+            <a:off x="2377440" y="1750397"/>
+            <a:ext cx="7406640" cy="3905845"/>
           </a:xfrm>
           <a:prstGeom prst="rect">
             <a:avLst/>
@@ -6729,8 +5892,8 @@
         </p:nvSpPr>
         <p:spPr>
           <a:xfrm>
-            <a:off x="640080" y="5623560"/>
-            <a:ext cx="10972800" cy="822960"/>
+            <a:off x="457200" y="6437376"/>
+            <a:ext cx="9144000" cy="365760"/>
           </a:xfrm>
           <a:prstGeom prst="rect">
             <a:avLst/>
@@ -6743,19 +5906,19 @@
           </a:bodyPr>
           <a:lstStyle/>
           <a:p>
-            <a:pPr algn="ctr">
+            <a:pPr algn="l">
               <a:spcAft>
                 <a:spcPts val="800"/>
               </a:spcAft>
             </a:pPr>
             <a:r>
-              <a:rPr sz="1600" b="0" i="0">
-                <a:solidFill>
-                  <a:srgbClr val="1F2430"/>
-                </a:solidFill>
-                <a:latin typeface="Segoe UI"/>
-              </a:rPr>
-              <a:t>Вход по user_id · навигация по разделам · диаграммы Chart.js · всё в едином стиле.</a:t>
+              <a:rPr sz="1000" b="0" i="0">
+                <a:solidFill>
+                  <a:srgbClr val="6B7280"/>
+                </a:solidFill>
+                <a:latin typeface="Segoe UI"/>
+              </a:rPr>
+              <a:t>Instacart Insights · РЭУ им. Г.В. Плеханова · 2026</a:t>
             </a:r>
           </a:p>
         </p:txBody>
@@ -6763,45 +5926,6 @@
       <p:sp>
         <p:nvSpPr>
           <p:cNvPr id="7" name="TextBox 6"/>
-          <p:cNvSpPr txBox="1"/>
-          <p:nvPr/>
-        </p:nvSpPr>
-        <p:spPr>
-          <a:xfrm>
-            <a:off x="457200" y="6437376"/>
-            <a:ext cx="9144000" cy="365760"/>
-          </a:xfrm>
-          <a:prstGeom prst="rect">
-            <a:avLst/>
-          </a:prstGeom>
-          <a:noFill/>
-        </p:spPr>
-        <p:txBody>
-          <a:bodyPr wrap="square" anchor="t">
-            <a:spAutoFit/>
-          </a:bodyPr>
-          <a:lstStyle/>
-          <a:p>
-            <a:pPr algn="l">
-              <a:spcAft>
-                <a:spcPts val="800"/>
-              </a:spcAft>
-            </a:pPr>
-            <a:r>
-              <a:rPr sz="1000" b="0" i="0">
-                <a:solidFill>
-                  <a:srgbClr val="6B7280"/>
-                </a:solidFill>
-                <a:latin typeface="Segoe UI"/>
-              </a:rPr>
-              <a:t>Instacart Insights · РЭУ им. Г.В. Плеханова · 2026</a:t>
-            </a:r>
-          </a:p>
-        </p:txBody>
-      </p:sp>
-      <p:sp>
-        <p:nvSpPr>
-          <p:cNvPr id="8" name="TextBox 7"/>
           <p:cNvSpPr txBox="1"/>
           <p:nvPr/>
         </p:nvSpPr>
@@ -6978,7 +6102,7 @@
                 </a:solidFill>
                 <a:latin typeface="Segoe UI"/>
               </a:rPr>
-              <a:t>КАК РАБОТАЕТ · 3</a:t>
+              <a:t>КАК РАБОТАЕТ · 4</a:t>
             </a:r>
           </a:p>
           <a:p>
@@ -6994,14 +6118,14 @@
                 </a:solidFill>
                 <a:latin typeface="Segoe UI"/>
               </a:rPr>
-              <a:t>Числа, график и совет — вместе</a:t>
+              <a:t>ИИ объясняет данные человеческим языком</a:t>
             </a:r>
           </a:p>
         </p:txBody>
       </p:sp>
       <p:pic>
         <p:nvPicPr>
-          <p:cNvPr id="5" name="Picture 4" descr="image6.jpg"/>
+          <p:cNvPr id="5" name="Picture 4" descr="image7.jpg"/>
           <p:cNvPicPr>
             <a:picLocks noChangeAspect="1"/>
           </p:cNvPicPr>
@@ -7015,8 +6139,8 @@
         </p:blipFill>
         <p:spPr>
           <a:xfrm>
-            <a:off x="2377440" y="1750397"/>
-            <a:ext cx="7406640" cy="3905845"/>
+            <a:off x="640080" y="2153841"/>
+            <a:ext cx="6400800" cy="3190398"/>
           </a:xfrm>
           <a:prstGeom prst="rect">
             <a:avLst/>
@@ -7030,7 +6154,232 @@
       </p:pic>
       <p:sp>
         <p:nvSpPr>
-          <p:cNvPr id="6" name="TextBox 5"/>
+          <p:cNvPr id="6" name="Rounded Rectangle 5"/>
+          <p:cNvSpPr/>
+          <p:nvPr/>
+        </p:nvSpPr>
+        <p:spPr>
+          <a:xfrm>
+            <a:off x="7406640" y="1691640"/>
+            <a:ext cx="4206240" cy="1234440"/>
+          </a:xfrm>
+          <a:prstGeom prst="roundRect">
+            <a:avLst/>
+          </a:prstGeom>
+          <a:solidFill>
+            <a:srgbClr val="E6F4EC"/>
+          </a:solidFill>
+          <a:ln w="12700">
+            <a:solidFill>
+              <a:srgbClr val="2E9E5B"/>
+            </a:solidFill>
+          </a:ln>
+          <a:effectLst/>
+        </p:spPr>
+        <p:style>
+          <a:lnRef idx="1">
+            <a:schemeClr val="accent1"/>
+          </a:lnRef>
+          <a:fillRef idx="3">
+            <a:schemeClr val="accent1"/>
+          </a:fillRef>
+          <a:effectRef idx="2">
+            <a:schemeClr val="accent1"/>
+          </a:effectRef>
+          <a:fontRef idx="minor">
+            <a:schemeClr val="lt1"/>
+          </a:fontRef>
+        </p:style>
+        <p:txBody>
+          <a:bodyPr rtlCol="0" anchor="ctr" wrap="square"/>
+          <a:lstStyle/>
+          <a:p>
+            <a:pPr algn="ctr">
+              <a:spcAft>
+                <a:spcPts val="0"/>
+              </a:spcAft>
+            </a:pPr>
+            <a:r>
+              <a:rPr sz="2800" b="1" i="0">
+                <a:solidFill>
+                  <a:srgbClr val="2E9E5B"/>
+                </a:solidFill>
+                <a:latin typeface="Segoe UI"/>
+              </a:rPr>
+              <a:t>×300</a:t>
+            </a:r>
+          </a:p>
+          <a:p>
+            <a:pPr algn="ctr">
+              <a:spcAft>
+                <a:spcPts val="0"/>
+              </a:spcAft>
+            </a:pPr>
+            <a:r>
+              <a:rPr sz="1300" b="0" i="0">
+                <a:solidFill>
+                  <a:srgbClr val="6B7280"/>
+                </a:solidFill>
+                <a:latin typeface="Segoe UI"/>
+              </a:rPr>
+              <a:t>быстрее по кэшу</a:t>
+            </a:r>
+          </a:p>
+        </p:txBody>
+      </p:sp>
+      <p:sp>
+        <p:nvSpPr>
+          <p:cNvPr id="7" name="Rounded Rectangle 6"/>
+          <p:cNvSpPr/>
+          <p:nvPr/>
+        </p:nvSpPr>
+        <p:spPr>
+          <a:xfrm>
+            <a:off x="7406640" y="3163824"/>
+            <a:ext cx="4206240" cy="1234440"/>
+          </a:xfrm>
+          <a:prstGeom prst="roundRect">
+            <a:avLst/>
+          </a:prstGeom>
+          <a:solidFill>
+            <a:srgbClr val="E6F4EC"/>
+          </a:solidFill>
+          <a:ln w="12700">
+            <a:solidFill>
+              <a:srgbClr val="2E9E5B"/>
+            </a:solidFill>
+          </a:ln>
+          <a:effectLst/>
+        </p:spPr>
+        <p:style>
+          <a:lnRef idx="1">
+            <a:schemeClr val="accent1"/>
+          </a:lnRef>
+          <a:fillRef idx="3">
+            <a:schemeClr val="accent1"/>
+          </a:fillRef>
+          <a:effectRef idx="2">
+            <a:schemeClr val="accent1"/>
+          </a:effectRef>
+          <a:fontRef idx="minor">
+            <a:schemeClr val="lt1"/>
+          </a:fontRef>
+        </p:style>
+        <p:txBody>
+          <a:bodyPr rtlCol="0" anchor="ctr" wrap="square"/>
+          <a:lstStyle/>
+          <a:p>
+            <a:pPr algn="ctr">
+              <a:spcAft>
+                <a:spcPts val="0"/>
+              </a:spcAft>
+            </a:pPr>
+            <a:r>
+              <a:rPr sz="2800" b="1" i="0">
+                <a:solidFill>
+                  <a:srgbClr val="2E9E5B"/>
+                </a:solidFill>
+                <a:latin typeface="Segoe UI"/>
+              </a:rPr>
+              <a:t>~10 мс</a:t>
+            </a:r>
+          </a:p>
+          <a:p>
+            <a:pPr algn="ctr">
+              <a:spcAft>
+                <a:spcPts val="0"/>
+              </a:spcAft>
+            </a:pPr>
+            <a:r>
+              <a:rPr sz="1300" b="0" i="0">
+                <a:solidFill>
+                  <a:srgbClr val="6B7280"/>
+                </a:solidFill>
+                <a:latin typeface="Segoe UI"/>
+              </a:rPr>
+              <a:t>повторный ответ</a:t>
+            </a:r>
+          </a:p>
+        </p:txBody>
+      </p:sp>
+      <p:sp>
+        <p:nvSpPr>
+          <p:cNvPr id="8" name="Rounded Rectangle 7"/>
+          <p:cNvSpPr/>
+          <p:nvPr/>
+        </p:nvSpPr>
+        <p:spPr>
+          <a:xfrm>
+            <a:off x="7406640" y="4636008"/>
+            <a:ext cx="4206240" cy="1234440"/>
+          </a:xfrm>
+          <a:prstGeom prst="roundRect">
+            <a:avLst/>
+          </a:prstGeom>
+          <a:solidFill>
+            <a:srgbClr val="E6F4EC"/>
+          </a:solidFill>
+          <a:ln w="12700">
+            <a:solidFill>
+              <a:srgbClr val="2E9E5B"/>
+            </a:solidFill>
+          </a:ln>
+          <a:effectLst/>
+        </p:spPr>
+        <p:style>
+          <a:lnRef idx="1">
+            <a:schemeClr val="accent1"/>
+          </a:lnRef>
+          <a:fillRef idx="3">
+            <a:schemeClr val="accent1"/>
+          </a:fillRef>
+          <a:effectRef idx="2">
+            <a:schemeClr val="accent1"/>
+          </a:effectRef>
+          <a:fontRef idx="minor">
+            <a:schemeClr val="lt1"/>
+          </a:fontRef>
+        </p:style>
+        <p:txBody>
+          <a:bodyPr rtlCol="0" anchor="ctr" wrap="square"/>
+          <a:lstStyle/>
+          <a:p>
+            <a:pPr algn="ctr">
+              <a:spcAft>
+                <a:spcPts val="0"/>
+              </a:spcAft>
+            </a:pPr>
+            <a:r>
+              <a:rPr sz="2800" b="1" i="0">
+                <a:solidFill>
+                  <a:srgbClr val="2E9E5B"/>
+                </a:solidFill>
+                <a:latin typeface="Segoe UI"/>
+              </a:rPr>
+              <a:t>0.3</a:t>
+            </a:r>
+          </a:p>
+          <a:p>
+            <a:pPr algn="ctr">
+              <a:spcAft>
+                <a:spcPts val="0"/>
+              </a:spcAft>
+            </a:pPr>
+            <a:r>
+              <a:rPr sz="1300" b="0" i="0">
+                <a:solidFill>
+                  <a:srgbClr val="6B7280"/>
+                </a:solidFill>
+                <a:latin typeface="Segoe UI"/>
+              </a:rPr>
+              <a:t>температура — стабильно</a:t>
+            </a:r>
+          </a:p>
+        </p:txBody>
+      </p:sp>
+      <p:sp>
+        <p:nvSpPr>
+          <p:cNvPr id="9" name="TextBox 8"/>
           <p:cNvSpPr txBox="1"/>
           <p:nvPr/>
         </p:nvSpPr>
@@ -7069,7 +6418,7 @@
       </p:sp>
       <p:sp>
         <p:nvSpPr>
-          <p:cNvPr id="7" name="TextBox 6"/>
+          <p:cNvPr id="10" name="TextBox 9"/>
           <p:cNvSpPr txBox="1"/>
           <p:nvPr/>
         </p:nvSpPr>
@@ -7133,13 +6482,13 @@
         <p:spPr>
           <a:xfrm>
             <a:off x="0" y="0"/>
-            <a:ext cx="12191695" cy="1143000"/>
+            <a:ext cx="12191695" cy="6858000"/>
           </a:xfrm>
           <a:prstGeom prst="rect">
             <a:avLst/>
           </a:prstGeom>
           <a:solidFill>
-            <a:srgbClr val="2E9E5B"/>
+            <a:srgbClr val="112A1D"/>
           </a:solidFill>
           <a:ln>
             <a:noFill/>
@@ -7176,14 +6525,14 @@
         </p:nvSpPr>
         <p:spPr>
           <a:xfrm>
-            <a:off x="0" y="1143000"/>
-            <a:ext cx="12191695" cy="54864"/>
+            <a:off x="822960" y="1874519"/>
+            <a:ext cx="1280160" cy="76200"/>
           </a:xfrm>
           <a:prstGeom prst="rect">
             <a:avLst/>
           </a:prstGeom>
           <a:solidFill>
-            <a:srgbClr val="217A45"/>
+            <a:srgbClr val="6FCE97"/>
           </a:solidFill>
           <a:ln>
             <a:noFill/>
@@ -7220,8 +6569,8 @@
         </p:nvSpPr>
         <p:spPr>
           <a:xfrm>
-            <a:off x="548640" y="128016"/>
-            <a:ext cx="11155680" cy="960120"/>
+            <a:off x="822960" y="777240"/>
+            <a:ext cx="10515600" cy="548640"/>
           </a:xfrm>
           <a:prstGeom prst="rect">
             <a:avLst/>
@@ -7229,73 +6578,84 @@
           <a:noFill/>
         </p:spPr>
         <p:txBody>
-          <a:bodyPr wrap="square" anchor="ctr">
+          <a:bodyPr wrap="square" anchor="t">
             <a:spAutoFit/>
           </a:bodyPr>
           <a:lstStyle/>
           <a:p>
             <a:pPr algn="l">
               <a:spcAft>
-                <a:spcPts val="200"/>
-              </a:spcAft>
-            </a:pPr>
-            <a:r>
-              <a:rPr sz="1200" b="1" i="0">
-                <a:solidFill>
-                  <a:srgbClr val="E6F4EC"/>
-                </a:solidFill>
-                <a:latin typeface="Segoe UI"/>
-              </a:rPr>
-              <a:t>КАК РАБОТАЕТ · 4</a:t>
-            </a:r>
-          </a:p>
+                <a:spcPts val="800"/>
+              </a:spcAft>
+            </a:pPr>
+            <a:r>
+              <a:rPr sz="1500" b="1" i="0">
+                <a:solidFill>
+                  <a:srgbClr val="6FCE97"/>
+                </a:solidFill>
+                <a:latin typeface="Segoe UI"/>
+              </a:rPr>
+              <a:t>ЭТО ТОЛЬКО НАЧАЛО</a:t>
+            </a:r>
+          </a:p>
+        </p:txBody>
+      </p:sp>
+      <p:sp>
+        <p:nvSpPr>
+          <p:cNvPr id="5" name="TextBox 4"/>
+          <p:cNvSpPr txBox="1"/>
+          <p:nvPr/>
+        </p:nvSpPr>
+        <p:spPr>
+          <a:xfrm>
+            <a:off x="822960" y="2194560"/>
+            <a:ext cx="10515600" cy="2926080"/>
+          </a:xfrm>
+          <a:prstGeom prst="rect">
+            <a:avLst/>
+          </a:prstGeom>
+          <a:noFill/>
+        </p:spPr>
+        <p:txBody>
+          <a:bodyPr wrap="square" anchor="t">
+            <a:spAutoFit/>
+          </a:bodyPr>
+          <a:lstStyle/>
           <a:p>
             <a:pPr algn="l">
               <a:spcAft>
+                <a:spcPts val="1000"/>
+              </a:spcAft>
+            </a:pPr>
+            <a:r>
+              <a:rPr sz="4200" b="1" i="0">
+                <a:solidFill>
+                  <a:srgbClr val="FFFFFF"/>
+                </a:solidFill>
+                <a:latin typeface="Segoe UI"/>
+              </a:rPr>
+              <a:t>Сегодня — Instacart.
+Завтра — любой ретейл.</a:t>
+            </a:r>
+          </a:p>
+          <a:p>
+            <a:pPr algn="l">
+              <a:spcAft>
                 <a:spcPts val="0"/>
               </a:spcAft>
             </a:pPr>
             <a:r>
-              <a:rPr sz="2700" b="1" i="0">
-                <a:solidFill>
-                  <a:srgbClr val="FFFFFF"/>
-                </a:solidFill>
-                <a:latin typeface="Segoe UI"/>
-              </a:rPr>
-              <a:t>ИИ объясняет данные человеческим языком</a:t>
-            </a:r>
-          </a:p>
-        </p:txBody>
-      </p:sp>
-      <p:pic>
-        <p:nvPicPr>
-          <p:cNvPr id="5" name="Picture 4" descr="image7.jpg"/>
-          <p:cNvPicPr>
-            <a:picLocks noChangeAspect="1"/>
-          </p:cNvPicPr>
-          <p:nvPr/>
-        </p:nvPicPr>
-        <p:blipFill>
-          <a:blip r:embed="rId2"/>
-          <a:stretch>
-            <a:fillRect/>
-          </a:stretch>
-        </p:blipFill>
-        <p:spPr>
-          <a:xfrm>
-            <a:off x="640080" y="2153841"/>
-            <a:ext cx="6400800" cy="3190398"/>
-          </a:xfrm>
-          <a:prstGeom prst="rect">
-            <a:avLst/>
-          </a:prstGeom>
-          <a:ln w="12700">
-            <a:solidFill>
-              <a:srgbClr val="D0D5DD"/>
-            </a:solidFill>
-          </a:ln>
-        </p:spPr>
-      </p:pic>
+              <a:rPr sz="2100" b="0" i="0">
+                <a:solidFill>
+                  <a:srgbClr val="B8C4BC"/>
+                </a:solidFill>
+                <a:latin typeface="Segoe UI"/>
+              </a:rPr>
+              <a:t>Новые сервисы, персонализация на реальных пользователях, проверка HMW-гипотез.</a:t>
+            </a:r>
+          </a:p>
+        </p:txBody>
+      </p:sp>
       <p:sp>
         <p:nvSpPr>
           <p:cNvPr id="6" name="Rounded Rectangle 5"/>
@@ -7304,14 +6664,14 @@
         </p:nvSpPr>
         <p:spPr>
           <a:xfrm>
-            <a:off x="7406640" y="1691640"/>
-            <a:ext cx="4206240" cy="1234440"/>
+            <a:off x="822960" y="5212080"/>
+            <a:ext cx="2286000" cy="914400"/>
           </a:xfrm>
           <a:prstGeom prst="roundRect">
             <a:avLst/>
           </a:prstGeom>
           <a:solidFill>
-            <a:srgbClr val="E6F4EC"/>
+            <a:srgbClr val="1C3B2A"/>
           </a:solidFill>
           <a:ln w="12700">
             <a:solidFill>
@@ -7344,13 +6704,13 @@
               </a:spcAft>
             </a:pPr>
             <a:r>
-              <a:rPr sz="2800" b="1" i="0">
-                <a:solidFill>
-                  <a:srgbClr val="2E9E5B"/>
-                </a:solidFill>
-                <a:latin typeface="Segoe UI"/>
-              </a:rPr>
-              <a:t>×300</a:t>
+              <a:rPr sz="2400" b="1" i="0">
+                <a:solidFill>
+                  <a:srgbClr val="6FCE97"/>
+                </a:solidFill>
+                <a:latin typeface="Segoe UI"/>
+              </a:rPr>
+              <a:t>5</a:t>
             </a:r>
           </a:p>
           <a:p>
@@ -7360,13 +6720,13 @@
               </a:spcAft>
             </a:pPr>
             <a:r>
-              <a:rPr sz="1300" b="0" i="0">
-                <a:solidFill>
-                  <a:srgbClr val="6B7280"/>
-                </a:solidFill>
-                <a:latin typeface="Segoe UI"/>
-              </a:rPr>
-              <a:t>быстрее по кэшу</a:t>
+              <a:rPr sz="1200" b="0" i="0">
+                <a:solidFill>
+                  <a:srgbClr val="B8C4BC"/>
+                </a:solidFill>
+                <a:latin typeface="Segoe UI"/>
+              </a:rPr>
+              <a:t>сервисов</a:t>
             </a:r>
           </a:p>
         </p:txBody>
@@ -7379,14 +6739,14 @@
         </p:nvSpPr>
         <p:spPr>
           <a:xfrm>
-            <a:off x="7406640" y="3163824"/>
-            <a:ext cx="4206240" cy="1234440"/>
+            <a:off x="3383280" y="5212080"/>
+            <a:ext cx="2286000" cy="914400"/>
           </a:xfrm>
           <a:prstGeom prst="roundRect">
             <a:avLst/>
           </a:prstGeom>
           <a:solidFill>
-            <a:srgbClr val="E6F4EC"/>
+            <a:srgbClr val="1C3B2A"/>
           </a:solidFill>
           <a:ln w="12700">
             <a:solidFill>
@@ -7419,13 +6779,13 @@
               </a:spcAft>
             </a:pPr>
             <a:r>
-              <a:rPr sz="2800" b="1" i="0">
-                <a:solidFill>
-                  <a:srgbClr val="2E9E5B"/>
-                </a:solidFill>
-                <a:latin typeface="Segoe UI"/>
-              </a:rPr>
-              <a:t>~10 мс</a:t>
+              <a:rPr sz="2400" b="1" i="0">
+                <a:solidFill>
+                  <a:srgbClr val="6FCE97"/>
+                </a:solidFill>
+                <a:latin typeface="Segoe UI"/>
+              </a:rPr>
+              <a:t>25</a:t>
             </a:r>
           </a:p>
           <a:p>
@@ -7435,13 +6795,13 @@
               </a:spcAft>
             </a:pPr>
             <a:r>
-              <a:rPr sz="1300" b="0" i="0">
-                <a:solidFill>
-                  <a:srgbClr val="6B7280"/>
-                </a:solidFill>
-                <a:latin typeface="Segoe UI"/>
-              </a:rPr>
-              <a:t>повторный ответ</a:t>
+              <a:rPr sz="1200" b="0" i="0">
+                <a:solidFill>
+                  <a:srgbClr val="B8C4BC"/>
+                </a:solidFill>
+                <a:latin typeface="Segoe UI"/>
+              </a:rPr>
+              <a:t>тестов</a:t>
             </a:r>
           </a:p>
         </p:txBody>
@@ -7454,14 +6814,14 @@
         </p:nvSpPr>
         <p:spPr>
           <a:xfrm>
-            <a:off x="7406640" y="4636008"/>
-            <a:ext cx="4206240" cy="1234440"/>
+            <a:off x="5943600" y="5212080"/>
+            <a:ext cx="2286000" cy="914400"/>
           </a:xfrm>
           <a:prstGeom prst="roundRect">
             <a:avLst/>
           </a:prstGeom>
           <a:solidFill>
-            <a:srgbClr val="E6F4EC"/>
+            <a:srgbClr val="1C3B2A"/>
           </a:solidFill>
           <a:ln w="12700">
             <a:solidFill>
@@ -7494,13 +6854,13 @@
               </a:spcAft>
             </a:pPr>
             <a:r>
-              <a:rPr sz="2800" b="1" i="0">
-                <a:solidFill>
-                  <a:srgbClr val="2E9E5B"/>
-                </a:solidFill>
-                <a:latin typeface="Segoe UI"/>
-              </a:rPr>
-              <a:t>0.3</a:t>
+              <a:rPr sz="2400" b="1" i="0">
+                <a:solidFill>
+                  <a:srgbClr val="6FCE97"/>
+                </a:solidFill>
+                <a:latin typeface="Segoe UI"/>
+              </a:rPr>
+              <a:t>2 нед.</a:t>
             </a:r>
           </a:p>
           <a:p>
@@ -7510,91 +6870,13 @@
               </a:spcAft>
             </a:pPr>
             <a:r>
-              <a:rPr sz="1300" b="0" i="0">
-                <a:solidFill>
-                  <a:srgbClr val="6B7280"/>
-                </a:solidFill>
-                <a:latin typeface="Segoe UI"/>
-              </a:rPr>
-              <a:t>температура — стабильно</a:t>
-            </a:r>
-          </a:p>
-        </p:txBody>
-      </p:sp>
-      <p:sp>
-        <p:nvSpPr>
-          <p:cNvPr id="9" name="TextBox 8"/>
-          <p:cNvSpPr txBox="1"/>
-          <p:nvPr/>
-        </p:nvSpPr>
-        <p:spPr>
-          <a:xfrm>
-            <a:off x="457200" y="6437376"/>
-            <a:ext cx="9144000" cy="365760"/>
-          </a:xfrm>
-          <a:prstGeom prst="rect">
-            <a:avLst/>
-          </a:prstGeom>
-          <a:noFill/>
-        </p:spPr>
-        <p:txBody>
-          <a:bodyPr wrap="square" anchor="t">
-            <a:spAutoFit/>
-          </a:bodyPr>
-          <a:lstStyle/>
-          <a:p>
-            <a:pPr algn="l">
-              <a:spcAft>
-                <a:spcPts val="800"/>
-              </a:spcAft>
-            </a:pPr>
-            <a:r>
-              <a:rPr sz="1000" b="0" i="0">
-                <a:solidFill>
-                  <a:srgbClr val="6B7280"/>
-                </a:solidFill>
-                <a:latin typeface="Segoe UI"/>
-              </a:rPr>
-              <a:t>Instacart Insights · РЭУ им. Г.В. Плеханова · 2026</a:t>
-            </a:r>
-          </a:p>
-        </p:txBody>
-      </p:sp>
-      <p:sp>
-        <p:nvSpPr>
-          <p:cNvPr id="10" name="TextBox 9"/>
-          <p:cNvSpPr txBox="1"/>
-          <p:nvPr/>
-        </p:nvSpPr>
-        <p:spPr>
-          <a:xfrm>
-            <a:off x="11338560" y="6437376"/>
-            <a:ext cx="640080" cy="365760"/>
-          </a:xfrm>
-          <a:prstGeom prst="rect">
-            <a:avLst/>
-          </a:prstGeom>
-          <a:noFill/>
-        </p:spPr>
-        <p:txBody>
-          <a:bodyPr wrap="square" anchor="t">
-            <a:spAutoFit/>
-          </a:bodyPr>
-          <a:lstStyle/>
-          <a:p>
-            <a:pPr algn="r">
-              <a:spcAft>
-                <a:spcPts val="800"/>
-              </a:spcAft>
-            </a:pPr>
-            <a:r>
-              <a:rPr sz="1000" b="0" i="0">
-                <a:solidFill>
-                  <a:srgbClr val="6B7280"/>
-                </a:solidFill>
-                <a:latin typeface="Segoe UI"/>
-              </a:rPr>
-              <a:t>9</a:t>
+              <a:rPr sz="1200" b="0" i="0">
+                <a:solidFill>
+                  <a:srgbClr val="B8C4BC"/>
+                </a:solidFill>
+                <a:latin typeface="Segoe UI"/>
+              </a:rPr>
+              <a:t>до MVP</a:t>
             </a:r>
           </a:p>
         </p:txBody>

--- a/Презентация_к_защите.pptx
+++ b/Презентация_к_защите.pptx
@@ -6206,7 +6206,7 @@
                 </a:solidFill>
                 <a:latin typeface="Segoe UI"/>
               </a:rPr>
-              <a:t>×300</a:t>
+              <a:t>Кэш</a:t>
             </a:r>
           </a:p>
           <a:p>
@@ -6222,7 +6222,7 @@
                 </a:solidFill>
                 <a:latin typeface="Segoe UI"/>
               </a:rPr>
-              <a:t>быстрее по кэшу</a:t>
+              <a:t>экономия токенов</a:t>
             </a:r>
           </a:p>
         </p:txBody>
@@ -6281,7 +6281,7 @@
                 </a:solidFill>
                 <a:latin typeface="Segoe UI"/>
               </a:rPr>
-              <a:t>~10 мс</a:t>
+              <a:t>0.3</a:t>
             </a:r>
           </a:p>
           <a:p>
@@ -6297,7 +6297,7 @@
                 </a:solidFill>
                 <a:latin typeface="Segoe UI"/>
               </a:rPr>
-              <a:t>повторный ответ</a:t>
+              <a:t>стабильная температура</a:t>
             </a:r>
           </a:p>
         </p:txBody>
@@ -6356,7 +6356,7 @@
                 </a:solidFill>
                 <a:latin typeface="Segoe UI"/>
               </a:rPr>
-              <a:t>0.3</a:t>
+              <a:t>5</a:t>
             </a:r>
           </a:p>
           <a:p>
@@ -6372,7 +6372,7 @@
                 </a:solidFill>
                 <a:latin typeface="Segoe UI"/>
               </a:rPr>
-              <a:t>температура — стабильно</a:t>
+              <a:t>промптов под сервисы</a:t>
             </a:r>
           </a:p>
         </p:txBody>
